--- a/week2_progress.pptx
+++ b/week2_progress.pptx
@@ -14,6 +14,7 @@
     <p:sldId id="262" r:id="rId13"/>
     <p:sldId id="263" r:id="rId14"/>
     <p:sldId id="264" r:id="rId15"/>
+    <p:sldId id="265" r:id="rId16"/>
   </p:sldIdLst>
   <p:sldSz cx="12191695" cy="6858000" type="screen4x3"/>
   <p:notesSz cx="6858000" cy="9144000"/>
@@ -3235,6 +3236,490 @@
 </p:sld>
 </file>
 
+<file path=ppt/slides/slide10.xml><?xml version="1.0" encoding="utf-8"?>
+<p:sld xmlns:a="http://schemas.openxmlformats.org/drawingml/2006/main" xmlns:p="http://schemas.openxmlformats.org/presentationml/2006/main" xmlns:r="http://schemas.openxmlformats.org/officeDocument/2006/relationships">
+  <p:cSld>
+    <p:bg>
+      <p:bgPr>
+        <a:solidFill>
+          <a:srgbClr val="FFFFFF"/>
+        </a:solidFill>
+        <a:effectLst/>
+      </p:bgPr>
+    </p:bg>
+    <p:spTree>
+      <p:nvGrpSpPr>
+        <p:cNvPr id="1" name=""/>
+        <p:cNvGrpSpPr/>
+        <p:nvPr/>
+      </p:nvGrpSpPr>
+      <p:grpSpPr/>
+      <p:sp>
+        <p:nvSpPr>
+          <p:cNvPr id="2" name="TextBox 1"/>
+          <p:cNvSpPr txBox="1"/>
+          <p:nvPr/>
+        </p:nvSpPr>
+        <p:spPr>
+          <a:xfrm>
+            <a:off x="548640" y="274320"/>
+            <a:ext cx="10972800" cy="457200"/>
+          </a:xfrm>
+          <a:prstGeom prst="rect">
+            <a:avLst/>
+          </a:prstGeom>
+          <a:noFill/>
+        </p:spPr>
+        <p:txBody>
+          <a:bodyPr wrap="square">
+            <a:spAutoFit/>
+          </a:bodyPr>
+          <a:lstStyle/>
+          <a:p>
+            <a:pPr algn="l">
+              <a:defRPr sz="2800" b="1">
+                <a:solidFill>
+                  <a:srgbClr val="1A478A"/>
+                </a:solidFill>
+              </a:defRPr>
+            </a:pPr>
+            <a:r>
+              <a:t>9. Next Week's Plan</a:t>
+            </a:r>
+          </a:p>
+        </p:txBody>
+      </p:sp>
+      <p:sp>
+        <p:nvSpPr>
+          <p:cNvPr id="3" name="TextBox 2"/>
+          <p:cNvSpPr txBox="1"/>
+          <p:nvPr/>
+        </p:nvSpPr>
+        <p:spPr>
+          <a:xfrm>
+            <a:off x="777240" y="777240"/>
+            <a:ext cx="10972800" cy="365760"/>
+          </a:xfrm>
+          <a:prstGeom prst="rect">
+            <a:avLst/>
+          </a:prstGeom>
+          <a:noFill/>
+        </p:spPr>
+        <p:txBody>
+          <a:bodyPr wrap="square">
+            <a:spAutoFit/>
+          </a:bodyPr>
+          <a:lstStyle/>
+          <a:p>
+            <a:pPr algn="l">
+              <a:defRPr sz="1800" b="0">
+                <a:solidFill>
+                  <a:srgbClr val="666677"/>
+                </a:solidFill>
+              </a:defRPr>
+            </a:pPr>
+            <a:r>
+              <a:t>다음 주 계획</a:t>
+            </a:r>
+          </a:p>
+        </p:txBody>
+      </p:sp>
+      <p:sp>
+        <p:nvSpPr>
+          <p:cNvPr id="4" name="TextBox 3"/>
+          <p:cNvSpPr txBox="1"/>
+          <p:nvPr/>
+        </p:nvSpPr>
+        <p:spPr>
+          <a:xfrm>
+            <a:off x="640080" y="1463040"/>
+            <a:ext cx="5303520" cy="5029200"/>
+          </a:xfrm>
+          <a:prstGeom prst="rect">
+            <a:avLst/>
+          </a:prstGeom>
+          <a:noFill/>
+        </p:spPr>
+        <p:txBody>
+          <a:bodyPr wrap="square">
+            <a:spAutoFit/>
+          </a:bodyPr>
+          <a:lstStyle/>
+          <a:p>
+            <a:pPr algn="l">
+              <a:defRPr sz="2200" b="1">
+                <a:solidFill>
+                  <a:srgbClr val="C0392B"/>
+                </a:solidFill>
+              </a:defRPr>
+            </a:pPr>
+            <a:r>
+              <a:t>Primary comparison</a:t>
+            </a:r>
+          </a:p>
+          <a:p>
+            <a:pPr algn="l">
+              <a:spcBef>
+                <a:spcPts val="0"/>
+              </a:spcBef>
+              <a:spcAft>
+                <a:spcPts val="200"/>
+              </a:spcAft>
+              <a:defRPr sz="1500" b="0">
+                <a:solidFill>
+                  <a:srgbClr val="666677"/>
+                </a:solidFill>
+              </a:defRPr>
+            </a:pPr>
+            <a:r>
+              <a:t>메인 비교 실험</a:t>
+            </a:r>
+          </a:p>
+          <a:p>
+            <a:pPr algn="l">
+              <a:spcBef>
+                <a:spcPts val="400"/>
+              </a:spcBef>
+              <a:spcAft>
+                <a:spcPts val="200"/>
+              </a:spcAft>
+              <a:defRPr sz="600" b="0">
+                <a:solidFill>
+                  <a:srgbClr val="222222"/>
+                </a:solidFill>
+              </a:defRPr>
+            </a:pPr>
+          </a:p>
+          <a:p>
+            <a:pPr algn="l">
+              <a:spcBef>
+                <a:spcPts val="400"/>
+              </a:spcBef>
+              <a:spcAft>
+                <a:spcPts val="200"/>
+              </a:spcAft>
+              <a:defRPr sz="1600" b="0">
+                <a:solidFill>
+                  <a:srgbClr val="222222"/>
+                </a:solidFill>
+              </a:defRPr>
+            </a:pPr>
+            <a:r>
+              <a:t>• Uniform vs non-uniform array — detailed analysis</a:t>
+            </a:r>
+          </a:p>
+          <a:p>
+            <a:pPr algn="l">
+              <a:spcBef>
+                <a:spcPts val="0"/>
+              </a:spcBef>
+              <a:spcAft>
+                <a:spcPts val="200"/>
+              </a:spcAft>
+              <a:defRPr sz="1400" b="0">
+                <a:solidFill>
+                  <a:srgbClr val="666677"/>
+                </a:solidFill>
+              </a:defRPr>
+            </a:pPr>
+            <a:r>
+              <a:t>  균일 vs 비균일 상세 분석</a:t>
+            </a:r>
+          </a:p>
+          <a:p>
+            <a:pPr algn="l">
+              <a:spcBef>
+                <a:spcPts val="400"/>
+              </a:spcBef>
+              <a:spcAft>
+                <a:spcPts val="200"/>
+              </a:spcAft>
+              <a:defRPr sz="1600" b="0">
+                <a:solidFill>
+                  <a:srgbClr val="222222"/>
+                </a:solidFill>
+              </a:defRPr>
+            </a:pPr>
+            <a:r>
+              <a:t>• Focus on off-resonance regions</a:t>
+            </a:r>
+          </a:p>
+          <a:p>
+            <a:pPr algn="l">
+              <a:spcBef>
+                <a:spcPts val="0"/>
+              </a:spcBef>
+              <a:spcAft>
+                <a:spcPts val="200"/>
+              </a:spcAft>
+              <a:defRPr sz="1400" b="0">
+                <a:solidFill>
+                  <a:srgbClr val="666677"/>
+                </a:solidFill>
+              </a:defRPr>
+            </a:pPr>
+            <a:r>
+              <a:t>  공명을 피한 영역에 집중</a:t>
+            </a:r>
+          </a:p>
+          <a:p>
+            <a:pPr algn="l">
+              <a:spcBef>
+                <a:spcPts val="400"/>
+              </a:spcBef>
+              <a:spcAft>
+                <a:spcPts val="200"/>
+              </a:spcAft>
+              <a:defRPr sz="1600" b="0">
+                <a:solidFill>
+                  <a:srgbClr val="222222"/>
+                </a:solidFill>
+              </a:defRPr>
+            </a:pPr>
+            <a:r>
+              <a:t>• Isolate (i) lattice coupling vs (ii) α-inhomogeneity</a:t>
+            </a:r>
+          </a:p>
+          <a:p>
+            <a:pPr algn="l">
+              <a:spcBef>
+                <a:spcPts val="0"/>
+              </a:spcBef>
+              <a:spcAft>
+                <a:spcPts val="200"/>
+              </a:spcAft>
+              <a:defRPr sz="1400" b="0">
+                <a:solidFill>
+                  <a:srgbClr val="666677"/>
+                </a:solidFill>
+              </a:defRPr>
+            </a:pPr>
+            <a:r>
+              <a:t>  (i) 격자 커플링과 (ii) α 비균일성 효과 분리</a:t>
+            </a:r>
+          </a:p>
+          <a:p>
+            <a:pPr algn="l">
+              <a:spcBef>
+                <a:spcPts val="400"/>
+              </a:spcBef>
+              <a:spcAft>
+                <a:spcPts val="200"/>
+              </a:spcAft>
+              <a:defRPr sz="1600" b="0">
+                <a:solidFill>
+                  <a:srgbClr val="222222"/>
+                </a:solidFill>
+              </a:defRPr>
+            </a:pPr>
+            <a:r>
+              <a:t>• Find threshold period P* where mean |Δφ| &lt; 1°</a:t>
+            </a:r>
+          </a:p>
+          <a:p>
+            <a:pPr algn="l">
+              <a:spcBef>
+                <a:spcPts val="0"/>
+              </a:spcBef>
+              <a:spcAft>
+                <a:spcPts val="200"/>
+              </a:spcAft>
+              <a:defRPr sz="1400" b="0">
+                <a:solidFill>
+                  <a:srgbClr val="666677"/>
+                </a:solidFill>
+              </a:defRPr>
+            </a:pPr>
+            <a:r>
+              <a:t>  평균 |Δφ| &lt; 1°가 되는 임계 주기 P* 추정</a:t>
+            </a:r>
+          </a:p>
+        </p:txBody>
+      </p:sp>
+      <p:sp>
+        <p:nvSpPr>
+          <p:cNvPr id="5" name="TextBox 4"/>
+          <p:cNvSpPr txBox="1"/>
+          <p:nvPr/>
+        </p:nvSpPr>
+        <p:spPr>
+          <a:xfrm>
+            <a:off x="6400800" y="1463040"/>
+            <a:ext cx="5303520" cy="5029200"/>
+          </a:xfrm>
+          <a:prstGeom prst="rect">
+            <a:avLst/>
+          </a:prstGeom>
+          <a:noFill/>
+        </p:spPr>
+        <p:txBody>
+          <a:bodyPr wrap="square">
+            <a:spAutoFit/>
+          </a:bodyPr>
+          <a:lstStyle/>
+          <a:p>
+            <a:pPr algn="l">
+              <a:defRPr sz="2200" b="1">
+                <a:solidFill>
+                  <a:srgbClr val="1A478A"/>
+                </a:solidFill>
+              </a:defRPr>
+            </a:pPr>
+            <a:r>
+              <a:t>Additional checks</a:t>
+            </a:r>
+          </a:p>
+          <a:p>
+            <a:pPr algn="l">
+              <a:spcBef>
+                <a:spcPts val="0"/>
+              </a:spcBef>
+              <a:spcAft>
+                <a:spcPts val="200"/>
+              </a:spcAft>
+              <a:defRPr sz="1500" b="0">
+                <a:solidFill>
+                  <a:srgbClr val="666677"/>
+                </a:solidFill>
+              </a:defRPr>
+            </a:pPr>
+            <a:r>
+              <a:t>추가 검증</a:t>
+            </a:r>
+          </a:p>
+          <a:p>
+            <a:pPr algn="l">
+              <a:spcBef>
+                <a:spcPts val="400"/>
+              </a:spcBef>
+              <a:spcAft>
+                <a:spcPts val="200"/>
+              </a:spcAft>
+              <a:defRPr sz="600" b="0">
+                <a:solidFill>
+                  <a:srgbClr val="222222"/>
+                </a:solidFill>
+              </a:defRPr>
+            </a:pPr>
+          </a:p>
+          <a:p>
+            <a:pPr algn="l">
+              <a:spcBef>
+                <a:spcPts val="400"/>
+              </a:spcBef>
+              <a:spcAft>
+                <a:spcPts val="200"/>
+              </a:spcAft>
+              <a:defRPr sz="1600" b="0">
+                <a:solidFill>
+                  <a:srgbClr val="222222"/>
+                </a:solidFill>
+              </a:defRPr>
+            </a:pPr>
+            <a:r>
+              <a:t>• Conditioning study near Wood anomalies</a:t>
+            </a:r>
+          </a:p>
+          <a:p>
+            <a:pPr algn="l">
+              <a:spcBef>
+                <a:spcPts val="0"/>
+              </a:spcBef>
+              <a:spcAft>
+                <a:spcPts val="200"/>
+              </a:spcAft>
+              <a:defRPr sz="1400" b="0">
+                <a:solidFill>
+                  <a:srgbClr val="666677"/>
+                </a:solidFill>
+              </a:defRPr>
+            </a:pPr>
+            <a:r>
+              <a:t>  공명 근처의 행렬 조건수 분석</a:t>
+            </a:r>
+          </a:p>
+          <a:p>
+            <a:pPr algn="l">
+              <a:spcBef>
+                <a:spcPts val="400"/>
+              </a:spcBef>
+              <a:spcAft>
+                <a:spcPts val="200"/>
+              </a:spcAft>
+              <a:defRPr sz="1600" b="0">
+                <a:solidFill>
+                  <a:srgbClr val="222222"/>
+                </a:solidFill>
+              </a:defRPr>
+            </a:pPr>
+            <a:r>
+              <a:t>• Energy budget: P_sca / P_ext ratio</a:t>
+            </a:r>
+          </a:p>
+          <a:p>
+            <a:pPr algn="l">
+              <a:spcBef>
+                <a:spcPts val="0"/>
+              </a:spcBef>
+              <a:spcAft>
+                <a:spcPts val="200"/>
+              </a:spcAft>
+              <a:defRPr sz="1400" b="0">
+                <a:solidFill>
+                  <a:srgbClr val="666677"/>
+                </a:solidFill>
+              </a:defRPr>
+            </a:pPr>
+            <a:r>
+              <a:t>  에너지 예산: P_sca / P_ext 비율</a:t>
+            </a:r>
+          </a:p>
+          <a:p>
+            <a:pPr algn="l">
+              <a:spcBef>
+                <a:spcPts val="400"/>
+              </a:spcBef>
+              <a:spcAft>
+                <a:spcPts val="200"/>
+              </a:spcAft>
+              <a:defRPr sz="1600" b="0">
+                <a:solidFill>
+                  <a:srgbClr val="222222"/>
+                </a:solidFill>
+              </a:defRPr>
+            </a:pPr>
+            <a:r>
+              <a:t>• Sensitivity to α-ordering in non-uniform cases</a:t>
+            </a:r>
+          </a:p>
+          <a:p>
+            <a:pPr algn="l">
+              <a:spcBef>
+                <a:spcPts val="0"/>
+              </a:spcBef>
+              <a:spcAft>
+                <a:spcPts val="200"/>
+              </a:spcAft>
+              <a:defRPr sz="1400" b="0">
+                <a:solidFill>
+                  <a:srgbClr val="666677"/>
+                </a:solidFill>
+              </a:defRPr>
+            </a:pPr>
+            <a:r>
+              <a:t>  비균일 배열의 α 순서 민감도</a:t>
+            </a:r>
+          </a:p>
+        </p:txBody>
+      </p:sp>
+    </p:spTree>
+  </p:cSld>
+  <p:clrMapOvr>
+    <a:masterClrMapping/>
+  </p:clrMapOvr>
+</p:sld>
+</file>
+
 <file path=ppt/slides/slide2.xml><?xml version="1.0" encoding="utf-8"?>
 <p:sld xmlns:a="http://schemas.openxmlformats.org/drawingml/2006/main" xmlns:p="http://schemas.openxmlformats.org/presentationml/2006/main" xmlns:r="http://schemas.openxmlformats.org/officeDocument/2006/relationships">
   <p:cSld>
@@ -4175,7 +4660,7 @@
               </a:defRPr>
             </a:pPr>
             <a:r>
-              <a:t>3. Verification Results  —  10 / 10 PASS</a:t>
+              <a:t>3. Code Walk-Through</a:t>
             </a:r>
           </a:p>
         </p:txBody>
@@ -4210,7 +4695,7 @@
               </a:defRPr>
             </a:pPr>
             <a:r>
-              <a:t>검증 결과 — 10/10 통과</a:t>
+              <a:t>핵심 코드 설명</a:t>
             </a:r>
           </a:p>
         </p:txBody>
@@ -4223,8 +4708,8 @@
         </p:nvSpPr>
         <p:spPr>
           <a:xfrm>
-            <a:off x="457200" y="1371600"/>
-            <a:ext cx="457200" cy="320040"/>
+            <a:off x="548640" y="1371600"/>
+            <a:ext cx="5486400" cy="457200"/>
           </a:xfrm>
           <a:prstGeom prst="rect">
             <a:avLst/>
@@ -4238,28 +4723,76 @@
           <a:lstStyle/>
           <a:p>
             <a:pPr algn="l">
-              <a:defRPr sz="1400" b="1">
-                <a:solidFill>
-                  <a:srgbClr val="1A478A"/>
-                </a:solidFill>
-              </a:defRPr>
-            </a:pPr>
-            <a:r>
-              <a:t>#</a:t>
-            </a:r>
-          </a:p>
-        </p:txBody>
-      </p:sp>
-      <p:sp>
-        <p:nvSpPr>
-          <p:cNvPr id="5" name="TextBox 4"/>
+              <a:defRPr sz="1600" b="1">
+                <a:solidFill>
+                  <a:srgbClr val="C0392B"/>
+                </a:solidFill>
+              </a:defRPr>
+            </a:pPr>
+            <a:r>
+              <a:t>(a) Green's function | Green 함수</a:t>
+            </a:r>
+          </a:p>
+        </p:txBody>
+      </p:sp>
+      <p:pic>
+        <p:nvPicPr>
+          <p:cNvPr id="5" name="Picture 4" descr="w2_eq_97a9a4d1.png"/>
+          <p:cNvPicPr>
+            <a:picLocks noChangeAspect="1"/>
+          </p:cNvPicPr>
+          <p:nvPr/>
+        </p:nvPicPr>
+        <p:blipFill>
+          <a:blip r:embed="rId2"/>
+          <a:stretch>
+            <a:fillRect/>
+          </a:stretch>
+        </p:blipFill>
+        <p:spPr>
+          <a:xfrm>
+            <a:off x="640080" y="1828800"/>
+            <a:ext cx="2015612" cy="457200"/>
+          </a:xfrm>
+          <a:prstGeom prst="rect">
+            <a:avLst/>
+          </a:prstGeom>
+        </p:spPr>
+      </p:pic>
+      <p:pic>
+        <p:nvPicPr>
+          <p:cNvPr id="6" name="Picture 5" descr="w2_code_0f57cb36.png"/>
+          <p:cNvPicPr>
+            <a:picLocks noChangeAspect="1"/>
+          </p:cNvPicPr>
+          <p:nvPr/>
+        </p:nvPicPr>
+        <p:blipFill>
+          <a:blip r:embed="rId3"/>
+          <a:stretch>
+            <a:fillRect/>
+          </a:stretch>
+        </p:blipFill>
+        <p:spPr>
+          <a:xfrm>
+            <a:off x="548640" y="2468880"/>
+            <a:ext cx="4806042" cy="914400"/>
+          </a:xfrm>
+          <a:prstGeom prst="rect">
+            <a:avLst/>
+          </a:prstGeom>
+        </p:spPr>
+      </p:pic>
+      <p:sp>
+        <p:nvSpPr>
+          <p:cNvPr id="7" name="TextBox 6"/>
           <p:cNvSpPr txBox="1"/>
           <p:nvPr/>
         </p:nvSpPr>
         <p:spPr>
           <a:xfrm>
-            <a:off x="914400" y="1371600"/>
-            <a:ext cx="5760720" cy="320040"/>
+            <a:off x="6309360" y="1371600"/>
+            <a:ext cx="5486400" cy="457200"/>
           </a:xfrm>
           <a:prstGeom prst="rect">
             <a:avLst/>
@@ -4273,28 +4806,52 @@
           <a:lstStyle/>
           <a:p>
             <a:pPr algn="l">
-              <a:defRPr sz="1400" b="1">
-                <a:solidFill>
-                  <a:srgbClr val="1A478A"/>
-                </a:solidFill>
-              </a:defRPr>
-            </a:pPr>
-            <a:r>
-              <a:t>Test</a:t>
-            </a:r>
-          </a:p>
-        </p:txBody>
-      </p:sp>
-      <p:sp>
-        <p:nvSpPr>
-          <p:cNvPr id="6" name="TextBox 5"/>
+              <a:defRPr sz="1600" b="1">
+                <a:solidFill>
+                  <a:srgbClr val="C0392B"/>
+                </a:solidFill>
+              </a:defRPr>
+            </a:pPr>
+            <a:r>
+              <a:t>(b) Interaction matrix | 상호작용 행렬</a:t>
+            </a:r>
+          </a:p>
+        </p:txBody>
+      </p:sp>
+      <p:pic>
+        <p:nvPicPr>
+          <p:cNvPr id="8" name="Picture 7" descr="w2_code_d16f6f7a.png"/>
+          <p:cNvPicPr>
+            <a:picLocks noChangeAspect="1"/>
+          </p:cNvPicPr>
+          <p:nvPr/>
+        </p:nvPicPr>
+        <p:blipFill>
+          <a:blip r:embed="rId4"/>
+          <a:stretch>
+            <a:fillRect/>
+          </a:stretch>
+        </p:blipFill>
+        <p:spPr>
+          <a:xfrm>
+            <a:off x="6309360" y="1828800"/>
+            <a:ext cx="5669280" cy="1654442"/>
+          </a:xfrm>
+          <a:prstGeom prst="rect">
+            <a:avLst/>
+          </a:prstGeom>
+        </p:spPr>
+      </p:pic>
+      <p:sp>
+        <p:nvSpPr>
+          <p:cNvPr id="9" name="TextBox 8"/>
           <p:cNvSpPr txBox="1"/>
           <p:nvPr/>
         </p:nvSpPr>
         <p:spPr>
           <a:xfrm>
-            <a:off x="6675120" y="1371600"/>
-            <a:ext cx="2468880" cy="320040"/>
+            <a:off x="548640" y="3749039"/>
+            <a:ext cx="5486400" cy="457200"/>
           </a:xfrm>
           <a:prstGeom prst="rect">
             <a:avLst/>
@@ -4308,28 +4865,52 @@
           <a:lstStyle/>
           <a:p>
             <a:pPr algn="l">
-              <a:defRPr sz="1400" b="1">
-                <a:solidFill>
-                  <a:srgbClr val="1A478A"/>
-                </a:solidFill>
-              </a:defRPr>
-            </a:pPr>
-            <a:r>
-              <a:t>한국어</a:t>
-            </a:r>
-          </a:p>
-        </p:txBody>
-      </p:sp>
-      <p:sp>
-        <p:nvSpPr>
-          <p:cNvPr id="7" name="TextBox 6"/>
+              <a:defRPr sz="1600" b="1">
+                <a:solidFill>
+                  <a:srgbClr val="C0392B"/>
+                </a:solidFill>
+              </a:defRPr>
+            </a:pPr>
+            <a:r>
+              <a:t>(c) Solver | 솔버  →  one line</a:t>
+            </a:r>
+          </a:p>
+        </p:txBody>
+      </p:sp>
+      <p:pic>
+        <p:nvPicPr>
+          <p:cNvPr id="10" name="Picture 9" descr="w2_code_a6a69c65.png"/>
+          <p:cNvPicPr>
+            <a:picLocks noChangeAspect="1"/>
+          </p:cNvPicPr>
+          <p:nvPr/>
+        </p:nvPicPr>
+        <p:blipFill>
+          <a:blip r:embed="rId5"/>
+          <a:stretch>
+            <a:fillRect/>
+          </a:stretch>
+        </p:blipFill>
+        <p:spPr>
+          <a:xfrm>
+            <a:off x="640080" y="4206240"/>
+            <a:ext cx="5486400" cy="477246"/>
+          </a:xfrm>
+          <a:prstGeom prst="rect">
+            <a:avLst/>
+          </a:prstGeom>
+        </p:spPr>
+      </p:pic>
+      <p:sp>
+        <p:nvSpPr>
+          <p:cNvPr id="11" name="TextBox 10"/>
           <p:cNvSpPr txBox="1"/>
           <p:nvPr/>
         </p:nvSpPr>
         <p:spPr>
           <a:xfrm>
-            <a:off x="9144000" y="1371600"/>
-            <a:ext cx="2926080" cy="320040"/>
+            <a:off x="548640" y="4937760"/>
+            <a:ext cx="5486400" cy="1828800"/>
           </a:xfrm>
           <a:prstGeom prst="rect">
             <a:avLst/>
@@ -4341,75 +4922,91 @@
             <a:spAutoFit/>
           </a:bodyPr>
           <a:lstStyle/>
-          <a:p>
-            <a:pPr algn="l">
+          <a:p/>
+          <a:p>
+            <a:pPr algn="l">
+              <a:spcBef>
+                <a:spcPts val="400"/>
+              </a:spcBef>
+              <a:spcAft>
+                <a:spcPts val="200"/>
+              </a:spcAft>
               <a:defRPr sz="1400" b="1">
                 <a:solidFill>
+                  <a:srgbClr val="1E8A4C"/>
+                </a:solidFill>
+              </a:defRPr>
+            </a:pPr>
+            <a:r>
+              <a:t>▸  Verification Test 4: residual = 5×10⁻¹⁶</a:t>
+            </a:r>
+          </a:p>
+          <a:p>
+            <a:pPr algn="l">
+              <a:spcBef>
+                <a:spcPts val="0"/>
+              </a:spcBef>
+              <a:spcAft>
+                <a:spcPts val="200"/>
+              </a:spcAft>
+              <a:defRPr sz="1200" b="0">
+                <a:solidFill>
+                  <a:srgbClr val="666677"/>
+                </a:solidFill>
+              </a:defRPr>
+            </a:pPr>
+            <a:r>
+              <a:t>    선형 시스템이 기계 정밀도로 정확히 풀림</a:t>
+            </a:r>
+          </a:p>
+          <a:p>
+            <a:pPr algn="l">
+              <a:spcBef>
+                <a:spcPts val="800"/>
+              </a:spcBef>
+              <a:spcAft>
+                <a:spcPts val="200"/>
+              </a:spcAft>
+              <a:defRPr sz="1400" b="1">
+                <a:solidFill>
                   <a:srgbClr val="1A478A"/>
                 </a:solidFill>
               </a:defRPr>
             </a:pPr>
             <a:r>
-              <a:t>Result</a:t>
-            </a:r>
-          </a:p>
-        </p:txBody>
-      </p:sp>
-      <p:sp>
-        <p:nvSpPr>
-          <p:cNvPr id="8" name="Rectangle 7"/>
-          <p:cNvSpPr/>
-          <p:nvPr/>
-        </p:nvSpPr>
-        <p:spPr>
-          <a:xfrm>
-            <a:off x="457200" y="1737360"/>
-            <a:ext cx="11612880" cy="411480"/>
-          </a:xfrm>
-          <a:prstGeom prst="rect">
-            <a:avLst/>
-          </a:prstGeom>
-          <a:solidFill>
-            <a:srgbClr val="F8FAFD"/>
-          </a:solidFill>
-          <a:ln w="6350">
-            <a:solidFill>
-              <a:srgbClr val="D0D8E0"/>
-            </a:solidFill>
-          </a:ln>
-        </p:spPr>
-        <p:style>
-          <a:lnRef idx="1">
-            <a:schemeClr val="accent1"/>
-          </a:lnRef>
-          <a:fillRef idx="3">
-            <a:schemeClr val="accent1"/>
-          </a:fillRef>
-          <a:effectRef idx="2">
-            <a:schemeClr val="accent1"/>
-          </a:effectRef>
-          <a:fontRef idx="minor">
-            <a:schemeClr val="lt1"/>
-          </a:fontRef>
-        </p:style>
-        <p:txBody>
-          <a:bodyPr rtlCol="0" anchor="ctr"/>
-          <a:lstStyle/>
-          <a:p>
-            <a:pPr algn="ctr"/>
-          </a:p>
-        </p:txBody>
-      </p:sp>
-      <p:sp>
-        <p:nvSpPr>
-          <p:cNvPr id="9" name="TextBox 8"/>
+              <a:t>▸  Numpy broadcasting → N=320 까지 ~1초</a:t>
+            </a:r>
+          </a:p>
+          <a:p>
+            <a:pPr algn="l">
+              <a:spcBef>
+                <a:spcPts val="0"/>
+              </a:spcBef>
+              <a:spcAft>
+                <a:spcPts val="200"/>
+              </a:spcAft>
+              <a:defRPr sz="1200" b="0">
+                <a:solidFill>
+                  <a:srgbClr val="666677"/>
+                </a:solidFill>
+              </a:defRPr>
+            </a:pPr>
+            <a:r>
+              <a:t>    O(N²) 행렬 구성, O(N³) 풀이</a:t>
+            </a:r>
+          </a:p>
+        </p:txBody>
+      </p:sp>
+      <p:sp>
+        <p:nvSpPr>
+          <p:cNvPr id="12" name="TextBox 11"/>
           <p:cNvSpPr txBox="1"/>
           <p:nvPr/>
         </p:nvSpPr>
         <p:spPr>
           <a:xfrm>
-            <a:off x="502920" y="1783080"/>
-            <a:ext cx="365760" cy="320040"/>
+            <a:off x="6309360" y="3749039"/>
+            <a:ext cx="5486400" cy="457200"/>
           </a:xfrm>
           <a:prstGeom prst="rect">
             <a:avLst/>
@@ -4423,1788 +5020,42 @@
           <a:lstStyle/>
           <a:p>
             <a:pPr algn="l">
-              <a:defRPr sz="1400" b="1">
-                <a:solidFill>
-                  <a:srgbClr val="1E8A4C"/>
-                </a:solidFill>
-              </a:defRPr>
-            </a:pPr>
-            <a:r>
-              <a:t>1</a:t>
-            </a:r>
-          </a:p>
-        </p:txBody>
-      </p:sp>
-      <p:sp>
-        <p:nvSpPr>
-          <p:cNvPr id="10" name="TextBox 9"/>
-          <p:cNvSpPr txBox="1"/>
-          <p:nvPr/>
-        </p:nvSpPr>
-        <p:spPr>
-          <a:xfrm>
-            <a:off x="960120" y="1783080"/>
-            <a:ext cx="5669280" cy="320040"/>
-          </a:xfrm>
-          <a:prstGeom prst="rect">
-            <a:avLst/>
-          </a:prstGeom>
-          <a:noFill/>
-        </p:spPr>
-        <p:txBody>
-          <a:bodyPr wrap="square">
-            <a:spAutoFit/>
-          </a:bodyPr>
-          <a:lstStyle/>
-          <a:p>
-            <a:pPr algn="l">
-              <a:defRPr sz="1300" b="0">
-                <a:solidFill>
-                  <a:srgbClr val="222222"/>
-                </a:solidFill>
-              </a:defRPr>
-            </a:pPr>
-            <a:r>
-              <a:t>Single dipole  =  α · E_inc</a:t>
-            </a:r>
-          </a:p>
-        </p:txBody>
-      </p:sp>
-      <p:sp>
-        <p:nvSpPr>
-          <p:cNvPr id="11" name="TextBox 10"/>
-          <p:cNvSpPr txBox="1"/>
-          <p:nvPr/>
-        </p:nvSpPr>
-        <p:spPr>
-          <a:xfrm>
-            <a:off x="6720840" y="1783080"/>
-            <a:ext cx="2377440" cy="320040"/>
-          </a:xfrm>
-          <a:prstGeom prst="rect">
-            <a:avLst/>
-          </a:prstGeom>
-          <a:noFill/>
-        </p:spPr>
-        <p:txBody>
-          <a:bodyPr wrap="square">
-            <a:spAutoFit/>
-          </a:bodyPr>
-          <a:lstStyle/>
-          <a:p>
-            <a:pPr algn="l">
-              <a:defRPr sz="1200" b="0">
-                <a:solidFill>
-                  <a:srgbClr val="666677"/>
-                </a:solidFill>
-              </a:defRPr>
-            </a:pPr>
-            <a:r>
-              <a:t>1개 쌍극자 해석해</a:t>
-            </a:r>
-          </a:p>
-        </p:txBody>
-      </p:sp>
-      <p:sp>
-        <p:nvSpPr>
-          <p:cNvPr id="12" name="TextBox 11"/>
-          <p:cNvSpPr txBox="1"/>
-          <p:nvPr/>
-        </p:nvSpPr>
-        <p:spPr>
-          <a:xfrm>
-            <a:off x="9189720" y="1783080"/>
-            <a:ext cx="2834640" cy="320040"/>
-          </a:xfrm>
-          <a:prstGeom prst="rect">
-            <a:avLst/>
-          </a:prstGeom>
-          <a:noFill/>
-        </p:spPr>
-        <p:txBody>
-          <a:bodyPr wrap="square">
-            <a:spAutoFit/>
-          </a:bodyPr>
-          <a:lstStyle/>
-          <a:p>
-            <a:pPr algn="l">
-              <a:defRPr sz="1300" b="1">
-                <a:solidFill>
-                  <a:srgbClr val="1E8A4C"/>
-                </a:solidFill>
-              </a:defRPr>
-            </a:pPr>
-            <a:r>
-              <a:t>rel. err  1.5×10⁻¹⁶</a:t>
-            </a:r>
-          </a:p>
-        </p:txBody>
-      </p:sp>
-      <p:sp>
-        <p:nvSpPr>
-          <p:cNvPr id="13" name="Rectangle 12"/>
-          <p:cNvSpPr/>
-          <p:nvPr/>
-        </p:nvSpPr>
-        <p:spPr>
-          <a:xfrm>
-            <a:off x="457200" y="2167128"/>
-            <a:ext cx="11612880" cy="411480"/>
-          </a:xfrm>
-          <a:prstGeom prst="rect">
-            <a:avLst/>
-          </a:prstGeom>
-          <a:solidFill>
-            <a:srgbClr val="FFFFFF"/>
-          </a:solidFill>
-          <a:ln w="6350">
-            <a:solidFill>
-              <a:srgbClr val="D0D8E0"/>
-            </a:solidFill>
-          </a:ln>
-        </p:spPr>
-        <p:style>
-          <a:lnRef idx="1">
-            <a:schemeClr val="accent1"/>
-          </a:lnRef>
-          <a:fillRef idx="3">
-            <a:schemeClr val="accent1"/>
-          </a:fillRef>
-          <a:effectRef idx="2">
-            <a:schemeClr val="accent1"/>
-          </a:effectRef>
-          <a:fontRef idx="minor">
-            <a:schemeClr val="lt1"/>
-          </a:fontRef>
-        </p:style>
-        <p:txBody>
-          <a:bodyPr rtlCol="0" anchor="ctr"/>
-          <a:lstStyle/>
-          <a:p>
-            <a:pPr algn="ctr"/>
-          </a:p>
-        </p:txBody>
-      </p:sp>
-      <p:sp>
-        <p:nvSpPr>
-          <p:cNvPr id="14" name="TextBox 13"/>
-          <p:cNvSpPr txBox="1"/>
-          <p:nvPr/>
-        </p:nvSpPr>
-        <p:spPr>
-          <a:xfrm>
-            <a:off x="502920" y="2212848"/>
-            <a:ext cx="365760" cy="320040"/>
-          </a:xfrm>
-          <a:prstGeom prst="rect">
-            <a:avLst/>
-          </a:prstGeom>
-          <a:noFill/>
-        </p:spPr>
-        <p:txBody>
-          <a:bodyPr wrap="square">
-            <a:spAutoFit/>
-          </a:bodyPr>
-          <a:lstStyle/>
-          <a:p>
-            <a:pPr algn="l">
-              <a:defRPr sz="1400" b="1">
-                <a:solidFill>
-                  <a:srgbClr val="1E8A4C"/>
-                </a:solidFill>
-              </a:defRPr>
-            </a:pPr>
-            <a:r>
-              <a:t>2</a:t>
-            </a:r>
-          </a:p>
-        </p:txBody>
-      </p:sp>
-      <p:sp>
-        <p:nvSpPr>
-          <p:cNvPr id="15" name="TextBox 14"/>
-          <p:cNvSpPr txBox="1"/>
-          <p:nvPr/>
-        </p:nvSpPr>
-        <p:spPr>
-          <a:xfrm>
-            <a:off x="960120" y="2212848"/>
-            <a:ext cx="5669280" cy="320040"/>
-          </a:xfrm>
-          <a:prstGeom prst="rect">
-            <a:avLst/>
-          </a:prstGeom>
-          <a:noFill/>
-        </p:spPr>
-        <p:txBody>
-          <a:bodyPr wrap="square">
-            <a:spAutoFit/>
-          </a:bodyPr>
-          <a:lstStyle/>
-          <a:p>
-            <a:pPr algn="l">
-              <a:defRPr sz="1300" b="0">
-                <a:solidFill>
-                  <a:srgbClr val="222222"/>
-                </a:solidFill>
-              </a:defRPr>
-            </a:pPr>
-            <a:r>
-              <a:t>Two-dipole analytical  p = α/(1 − αG)</a:t>
-            </a:r>
-          </a:p>
-        </p:txBody>
-      </p:sp>
-      <p:sp>
-        <p:nvSpPr>
-          <p:cNvPr id="16" name="TextBox 15"/>
-          <p:cNvSpPr txBox="1"/>
-          <p:nvPr/>
-        </p:nvSpPr>
-        <p:spPr>
-          <a:xfrm>
-            <a:off x="6720840" y="2212848"/>
-            <a:ext cx="2377440" cy="320040"/>
-          </a:xfrm>
-          <a:prstGeom prst="rect">
-            <a:avLst/>
-          </a:prstGeom>
-          <a:noFill/>
-        </p:spPr>
-        <p:txBody>
-          <a:bodyPr wrap="square">
-            <a:spAutoFit/>
-          </a:bodyPr>
-          <a:lstStyle/>
-          <a:p>
-            <a:pPr algn="l">
-              <a:defRPr sz="1200" b="0">
-                <a:solidFill>
-                  <a:srgbClr val="666677"/>
-                </a:solidFill>
-              </a:defRPr>
-            </a:pPr>
-            <a:r>
-              <a:t>2개 쌍극자 해석해</a:t>
-            </a:r>
-          </a:p>
-        </p:txBody>
-      </p:sp>
-      <p:sp>
-        <p:nvSpPr>
-          <p:cNvPr id="17" name="TextBox 16"/>
-          <p:cNvSpPr txBox="1"/>
-          <p:nvPr/>
-        </p:nvSpPr>
-        <p:spPr>
-          <a:xfrm>
-            <a:off x="9189720" y="2212848"/>
-            <a:ext cx="2834640" cy="320040"/>
-          </a:xfrm>
-          <a:prstGeom prst="rect">
-            <a:avLst/>
-          </a:prstGeom>
-          <a:noFill/>
-        </p:spPr>
-        <p:txBody>
-          <a:bodyPr wrap="square">
-            <a:spAutoFit/>
-          </a:bodyPr>
-          <a:lstStyle/>
-          <a:p>
-            <a:pPr algn="l">
-              <a:defRPr sz="1300" b="1">
-                <a:solidFill>
-                  <a:srgbClr val="1E8A4C"/>
-                </a:solidFill>
-              </a:defRPr>
-            </a:pPr>
-            <a:r>
-              <a:t>rel. err  2.5×10⁻¹⁶</a:t>
-            </a:r>
-          </a:p>
-        </p:txBody>
-      </p:sp>
-      <p:sp>
-        <p:nvSpPr>
-          <p:cNvPr id="18" name="Rectangle 17"/>
-          <p:cNvSpPr/>
-          <p:nvPr/>
-        </p:nvSpPr>
-        <p:spPr>
-          <a:xfrm>
-            <a:off x="457200" y="2596896"/>
-            <a:ext cx="11612880" cy="411480"/>
-          </a:xfrm>
-          <a:prstGeom prst="rect">
-            <a:avLst/>
-          </a:prstGeom>
-          <a:solidFill>
-            <a:srgbClr val="F8FAFD"/>
-          </a:solidFill>
-          <a:ln w="6350">
-            <a:solidFill>
-              <a:srgbClr val="D0D8E0"/>
-            </a:solidFill>
-          </a:ln>
-        </p:spPr>
-        <p:style>
-          <a:lnRef idx="1">
-            <a:schemeClr val="accent1"/>
-          </a:lnRef>
-          <a:fillRef idx="3">
-            <a:schemeClr val="accent1"/>
-          </a:fillRef>
-          <a:effectRef idx="2">
-            <a:schemeClr val="accent1"/>
-          </a:effectRef>
-          <a:fontRef idx="minor">
-            <a:schemeClr val="lt1"/>
-          </a:fontRef>
-        </p:style>
-        <p:txBody>
-          <a:bodyPr rtlCol="0" anchor="ctr"/>
-          <a:lstStyle/>
-          <a:p>
-            <a:pPr algn="ctr"/>
-          </a:p>
-        </p:txBody>
-      </p:sp>
-      <p:sp>
-        <p:nvSpPr>
-          <p:cNvPr id="19" name="TextBox 18"/>
-          <p:cNvSpPr txBox="1"/>
-          <p:nvPr/>
-        </p:nvSpPr>
-        <p:spPr>
-          <a:xfrm>
-            <a:off x="502920" y="2642616"/>
-            <a:ext cx="365760" cy="320040"/>
-          </a:xfrm>
-          <a:prstGeom prst="rect">
-            <a:avLst/>
-          </a:prstGeom>
-          <a:noFill/>
-        </p:spPr>
-        <p:txBody>
-          <a:bodyPr wrap="square">
-            <a:spAutoFit/>
-          </a:bodyPr>
-          <a:lstStyle/>
-          <a:p>
-            <a:pPr algn="l">
-              <a:defRPr sz="1400" b="1">
-                <a:solidFill>
-                  <a:srgbClr val="1E8A4C"/>
-                </a:solidFill>
-              </a:defRPr>
-            </a:pPr>
-            <a:r>
-              <a:t>3</a:t>
-            </a:r>
-          </a:p>
-        </p:txBody>
-      </p:sp>
-      <p:sp>
-        <p:nvSpPr>
-          <p:cNvPr id="20" name="TextBox 19"/>
-          <p:cNvSpPr txBox="1"/>
-          <p:nvPr/>
-        </p:nvSpPr>
-        <p:spPr>
-          <a:xfrm>
-            <a:off x="960120" y="2642616"/>
-            <a:ext cx="5669280" cy="320040"/>
-          </a:xfrm>
-          <a:prstGeom prst="rect">
-            <a:avLst/>
-          </a:prstGeom>
-          <a:noFill/>
-        </p:spPr>
-        <p:txBody>
-          <a:bodyPr wrap="square">
-            <a:spAutoFit/>
-          </a:bodyPr>
-          <a:lstStyle/>
-          <a:p>
-            <a:pPr algn="l">
-              <a:defRPr sz="1300" b="0">
-                <a:solidFill>
-                  <a:srgbClr val="222222"/>
-                </a:solidFill>
-              </a:defRPr>
-            </a:pPr>
-            <a:r>
-              <a:t>Green's function formula + reciprocity</a:t>
-            </a:r>
-          </a:p>
-        </p:txBody>
-      </p:sp>
-      <p:sp>
-        <p:nvSpPr>
-          <p:cNvPr id="21" name="TextBox 20"/>
-          <p:cNvSpPr txBox="1"/>
-          <p:nvPr/>
-        </p:nvSpPr>
-        <p:spPr>
-          <a:xfrm>
-            <a:off x="6720840" y="2642616"/>
-            <a:ext cx="2377440" cy="320040"/>
-          </a:xfrm>
-          <a:prstGeom prst="rect">
-            <a:avLst/>
-          </a:prstGeom>
-          <a:noFill/>
-        </p:spPr>
-        <p:txBody>
-          <a:bodyPr wrap="square">
-            <a:spAutoFit/>
-          </a:bodyPr>
-          <a:lstStyle/>
-          <a:p>
-            <a:pPr algn="l">
-              <a:defRPr sz="1200" b="0">
-                <a:solidFill>
-                  <a:srgbClr val="666677"/>
-                </a:solidFill>
-              </a:defRPr>
-            </a:pPr>
-            <a:r>
-              <a:t>Green 함수 공식 + 호혜성</a:t>
-            </a:r>
-          </a:p>
-        </p:txBody>
-      </p:sp>
-      <p:sp>
-        <p:nvSpPr>
-          <p:cNvPr id="22" name="TextBox 21"/>
-          <p:cNvSpPr txBox="1"/>
-          <p:nvPr/>
-        </p:nvSpPr>
-        <p:spPr>
-          <a:xfrm>
-            <a:off x="9189720" y="2642616"/>
-            <a:ext cx="2834640" cy="320040"/>
-          </a:xfrm>
-          <a:prstGeom prst="rect">
-            <a:avLst/>
-          </a:prstGeom>
-          <a:noFill/>
-        </p:spPr>
-        <p:txBody>
-          <a:bodyPr wrap="square">
-            <a:spAutoFit/>
-          </a:bodyPr>
-          <a:lstStyle/>
-          <a:p>
-            <a:pPr algn="l">
-              <a:defRPr sz="1300" b="1">
-                <a:solidFill>
-                  <a:srgbClr val="1E8A4C"/>
-                </a:solidFill>
-              </a:defRPr>
-            </a:pPr>
-            <a:r>
-              <a:t>exact  0</a:t>
-            </a:r>
-          </a:p>
-        </p:txBody>
-      </p:sp>
-      <p:sp>
-        <p:nvSpPr>
-          <p:cNvPr id="23" name="Rectangle 22"/>
-          <p:cNvSpPr/>
-          <p:nvPr/>
-        </p:nvSpPr>
-        <p:spPr>
-          <a:xfrm>
-            <a:off x="457200" y="3026664"/>
-            <a:ext cx="11612880" cy="411480"/>
-          </a:xfrm>
-          <a:prstGeom prst="rect">
-            <a:avLst/>
-          </a:prstGeom>
-          <a:solidFill>
-            <a:srgbClr val="FFFFFF"/>
-          </a:solidFill>
-          <a:ln w="6350">
-            <a:solidFill>
-              <a:srgbClr val="D0D8E0"/>
-            </a:solidFill>
-          </a:ln>
-        </p:spPr>
-        <p:style>
-          <a:lnRef idx="1">
-            <a:schemeClr val="accent1"/>
-          </a:lnRef>
-          <a:fillRef idx="3">
-            <a:schemeClr val="accent1"/>
-          </a:fillRef>
-          <a:effectRef idx="2">
-            <a:schemeClr val="accent1"/>
-          </a:effectRef>
-          <a:fontRef idx="minor">
-            <a:schemeClr val="lt1"/>
-          </a:fontRef>
-        </p:style>
-        <p:txBody>
-          <a:bodyPr rtlCol="0" anchor="ctr"/>
-          <a:lstStyle/>
-          <a:p>
-            <a:pPr algn="ctr"/>
-          </a:p>
-        </p:txBody>
-      </p:sp>
-      <p:sp>
-        <p:nvSpPr>
-          <p:cNvPr id="24" name="TextBox 23"/>
-          <p:cNvSpPr txBox="1"/>
-          <p:nvPr/>
-        </p:nvSpPr>
-        <p:spPr>
-          <a:xfrm>
-            <a:off x="502920" y="3072384"/>
-            <a:ext cx="365760" cy="320040"/>
-          </a:xfrm>
-          <a:prstGeom prst="rect">
-            <a:avLst/>
-          </a:prstGeom>
-          <a:noFill/>
-        </p:spPr>
-        <p:txBody>
-          <a:bodyPr wrap="square">
-            <a:spAutoFit/>
-          </a:bodyPr>
-          <a:lstStyle/>
-          <a:p>
-            <a:pPr algn="l">
-              <a:defRPr sz="1400" b="1">
-                <a:solidFill>
-                  <a:srgbClr val="1E8A4C"/>
-                </a:solidFill>
-              </a:defRPr>
-            </a:pPr>
-            <a:r>
-              <a:t>4</a:t>
-            </a:r>
-          </a:p>
-        </p:txBody>
-      </p:sp>
-      <p:sp>
-        <p:nvSpPr>
-          <p:cNvPr id="25" name="TextBox 24"/>
-          <p:cNvSpPr txBox="1"/>
-          <p:nvPr/>
-        </p:nvSpPr>
-        <p:spPr>
-          <a:xfrm>
-            <a:off x="960120" y="3072384"/>
-            <a:ext cx="5669280" cy="320040"/>
-          </a:xfrm>
-          <a:prstGeom prst="rect">
-            <a:avLst/>
-          </a:prstGeom>
-          <a:noFill/>
-        </p:spPr>
-        <p:txBody>
-          <a:bodyPr wrap="square">
-            <a:spAutoFit/>
-          </a:bodyPr>
-          <a:lstStyle/>
-          <a:p>
-            <a:pPr algn="l">
-              <a:defRPr sz="1300" b="0">
-                <a:solidFill>
-                  <a:srgbClr val="222222"/>
-                </a:solidFill>
-              </a:defRPr>
-            </a:pPr>
-            <a:r>
-              <a:t>Linear system residual  ‖Ap − E‖/‖E‖</a:t>
-            </a:r>
-          </a:p>
-        </p:txBody>
-      </p:sp>
-      <p:sp>
-        <p:nvSpPr>
-          <p:cNvPr id="26" name="TextBox 25"/>
-          <p:cNvSpPr txBox="1"/>
-          <p:nvPr/>
-        </p:nvSpPr>
-        <p:spPr>
-          <a:xfrm>
-            <a:off x="6720840" y="3072384"/>
-            <a:ext cx="2377440" cy="320040"/>
-          </a:xfrm>
-          <a:prstGeom prst="rect">
-            <a:avLst/>
-          </a:prstGeom>
-          <a:noFill/>
-        </p:spPr>
-        <p:txBody>
-          <a:bodyPr wrap="square">
-            <a:spAutoFit/>
-          </a:bodyPr>
-          <a:lstStyle/>
-          <a:p>
-            <a:pPr algn="l">
-              <a:defRPr sz="1200" b="0">
-                <a:solidFill>
-                  <a:srgbClr val="666677"/>
-                </a:solidFill>
-              </a:defRPr>
-            </a:pPr>
-            <a:r>
-              <a:t>선형 시스템 잔차</a:t>
-            </a:r>
-          </a:p>
-        </p:txBody>
-      </p:sp>
-      <p:sp>
-        <p:nvSpPr>
-          <p:cNvPr id="27" name="TextBox 26"/>
-          <p:cNvSpPr txBox="1"/>
-          <p:nvPr/>
-        </p:nvSpPr>
-        <p:spPr>
-          <a:xfrm>
-            <a:off x="9189720" y="3072384"/>
-            <a:ext cx="2834640" cy="320040"/>
-          </a:xfrm>
-          <a:prstGeom prst="rect">
-            <a:avLst/>
-          </a:prstGeom>
-          <a:noFill/>
-        </p:spPr>
-        <p:txBody>
-          <a:bodyPr wrap="square">
-            <a:spAutoFit/>
-          </a:bodyPr>
-          <a:lstStyle/>
-          <a:p>
-            <a:pPr algn="l">
-              <a:defRPr sz="1300" b="1">
-                <a:solidFill>
-                  <a:srgbClr val="1E8A4C"/>
-                </a:solidFill>
-              </a:defRPr>
-            </a:pPr>
-            <a:r>
-              <a:t>5.4×10⁻¹⁶</a:t>
-            </a:r>
-          </a:p>
-        </p:txBody>
-      </p:sp>
-      <p:sp>
-        <p:nvSpPr>
-          <p:cNvPr id="28" name="Rectangle 27"/>
-          <p:cNvSpPr/>
-          <p:nvPr/>
-        </p:nvSpPr>
-        <p:spPr>
-          <a:xfrm>
-            <a:off x="457200" y="3456432"/>
-            <a:ext cx="11612880" cy="411480"/>
-          </a:xfrm>
-          <a:prstGeom prst="rect">
-            <a:avLst/>
-          </a:prstGeom>
-          <a:solidFill>
-            <a:srgbClr val="F8FAFD"/>
-          </a:solidFill>
-          <a:ln w="6350">
-            <a:solidFill>
-              <a:srgbClr val="D0D8E0"/>
-            </a:solidFill>
-          </a:ln>
-        </p:spPr>
-        <p:style>
-          <a:lnRef idx="1">
-            <a:schemeClr val="accent1"/>
-          </a:lnRef>
-          <a:fillRef idx="3">
-            <a:schemeClr val="accent1"/>
-          </a:fillRef>
-          <a:effectRef idx="2">
-            <a:schemeClr val="accent1"/>
-          </a:effectRef>
-          <a:fontRef idx="minor">
-            <a:schemeClr val="lt1"/>
-          </a:fontRef>
-        </p:style>
-        <p:txBody>
-          <a:bodyPr rtlCol="0" anchor="ctr"/>
-          <a:lstStyle/>
-          <a:p>
-            <a:pPr algn="ctr"/>
-          </a:p>
-        </p:txBody>
-      </p:sp>
-      <p:sp>
-        <p:nvSpPr>
-          <p:cNvPr id="29" name="TextBox 28"/>
-          <p:cNvSpPr txBox="1"/>
-          <p:nvPr/>
-        </p:nvSpPr>
-        <p:spPr>
-          <a:xfrm>
-            <a:off x="502920" y="3502152"/>
-            <a:ext cx="365760" cy="320040"/>
-          </a:xfrm>
-          <a:prstGeom prst="rect">
-            <a:avLst/>
-          </a:prstGeom>
-          <a:noFill/>
-        </p:spPr>
-        <p:txBody>
-          <a:bodyPr wrap="square">
-            <a:spAutoFit/>
-          </a:bodyPr>
-          <a:lstStyle/>
-          <a:p>
-            <a:pPr algn="l">
-              <a:defRPr sz="1400" b="1">
-                <a:solidFill>
-                  <a:srgbClr val="1E8A4C"/>
-                </a:solidFill>
-              </a:defRPr>
-            </a:pPr>
-            <a:r>
-              <a:t>5</a:t>
-            </a:r>
-          </a:p>
-        </p:txBody>
-      </p:sp>
-      <p:sp>
-        <p:nvSpPr>
-          <p:cNvPr id="30" name="TextBox 29"/>
-          <p:cNvSpPr txBox="1"/>
-          <p:nvPr/>
-        </p:nvSpPr>
-        <p:spPr>
-          <a:xfrm>
-            <a:off x="960120" y="3502152"/>
-            <a:ext cx="5669280" cy="320040"/>
-          </a:xfrm>
-          <a:prstGeom prst="rect">
-            <a:avLst/>
-          </a:prstGeom>
-          <a:noFill/>
-        </p:spPr>
-        <p:txBody>
-          <a:bodyPr wrap="square">
-            <a:spAutoFit/>
-          </a:bodyPr>
-          <a:lstStyle/>
-          <a:p>
-            <a:pPr algn="l">
-              <a:defRPr sz="1300" b="0">
-                <a:solidFill>
-                  <a:srgbClr val="222222"/>
-                </a:solidFill>
-              </a:defRPr>
-            </a:pPr>
-            <a:r>
-              <a:t>Mirror symmetry of centered array</a:t>
-            </a:r>
-          </a:p>
-        </p:txBody>
-      </p:sp>
-      <p:sp>
-        <p:nvSpPr>
-          <p:cNvPr id="31" name="TextBox 30"/>
-          <p:cNvSpPr txBox="1"/>
-          <p:nvPr/>
-        </p:nvSpPr>
-        <p:spPr>
-          <a:xfrm>
-            <a:off x="6720840" y="3502152"/>
-            <a:ext cx="2377440" cy="320040"/>
-          </a:xfrm>
-          <a:prstGeom prst="rect">
-            <a:avLst/>
-          </a:prstGeom>
-          <a:noFill/>
-        </p:spPr>
-        <p:txBody>
-          <a:bodyPr wrap="square">
-            <a:spAutoFit/>
-          </a:bodyPr>
-          <a:lstStyle/>
-          <a:p>
-            <a:pPr algn="l">
-              <a:defRPr sz="1200" b="0">
-                <a:solidFill>
-                  <a:srgbClr val="666677"/>
-                </a:solidFill>
-              </a:defRPr>
-            </a:pPr>
-            <a:r>
-              <a:t>거울 대칭성</a:t>
-            </a:r>
-          </a:p>
-        </p:txBody>
-      </p:sp>
-      <p:sp>
-        <p:nvSpPr>
-          <p:cNvPr id="32" name="TextBox 31"/>
-          <p:cNvSpPr txBox="1"/>
-          <p:nvPr/>
-        </p:nvSpPr>
-        <p:spPr>
-          <a:xfrm>
-            <a:off x="9189720" y="3502152"/>
-            <a:ext cx="2834640" cy="320040"/>
-          </a:xfrm>
-          <a:prstGeom prst="rect">
-            <a:avLst/>
-          </a:prstGeom>
-          <a:noFill/>
-        </p:spPr>
-        <p:txBody>
-          <a:bodyPr wrap="square">
-            <a:spAutoFit/>
-          </a:bodyPr>
-          <a:lstStyle/>
-          <a:p>
-            <a:pPr algn="l">
-              <a:defRPr sz="1300" b="1">
-                <a:solidFill>
-                  <a:srgbClr val="1E8A4C"/>
-                </a:solidFill>
-              </a:defRPr>
-            </a:pPr>
-            <a:r>
-              <a:t>7×10⁻¹⁶</a:t>
-            </a:r>
-          </a:p>
-        </p:txBody>
-      </p:sp>
-      <p:sp>
-        <p:nvSpPr>
-          <p:cNvPr id="33" name="Rectangle 32"/>
-          <p:cNvSpPr/>
-          <p:nvPr/>
-        </p:nvSpPr>
-        <p:spPr>
-          <a:xfrm>
-            <a:off x="457200" y="3886200"/>
-            <a:ext cx="11612880" cy="411480"/>
-          </a:xfrm>
-          <a:prstGeom prst="rect">
-            <a:avLst/>
-          </a:prstGeom>
-          <a:solidFill>
-            <a:srgbClr val="FFFFFF"/>
-          </a:solidFill>
-          <a:ln w="6350">
-            <a:solidFill>
-              <a:srgbClr val="D0D8E0"/>
-            </a:solidFill>
-          </a:ln>
-        </p:spPr>
-        <p:style>
-          <a:lnRef idx="1">
-            <a:schemeClr val="accent1"/>
-          </a:lnRef>
-          <a:fillRef idx="3">
-            <a:schemeClr val="accent1"/>
-          </a:fillRef>
-          <a:effectRef idx="2">
-            <a:schemeClr val="accent1"/>
-          </a:effectRef>
-          <a:fontRef idx="minor">
-            <a:schemeClr val="lt1"/>
-          </a:fontRef>
-        </p:style>
-        <p:txBody>
-          <a:bodyPr rtlCol="0" anchor="ctr"/>
-          <a:lstStyle/>
-          <a:p>
-            <a:pPr algn="ctr"/>
-          </a:p>
-        </p:txBody>
-      </p:sp>
-      <p:sp>
-        <p:nvSpPr>
-          <p:cNvPr id="34" name="TextBox 33"/>
-          <p:cNvSpPr txBox="1"/>
-          <p:nvPr/>
-        </p:nvSpPr>
-        <p:spPr>
-          <a:xfrm>
-            <a:off x="502920" y="3931920"/>
-            <a:ext cx="365760" cy="320040"/>
-          </a:xfrm>
-          <a:prstGeom prst="rect">
-            <a:avLst/>
-          </a:prstGeom>
-          <a:noFill/>
-        </p:spPr>
-        <p:txBody>
-          <a:bodyPr wrap="square">
-            <a:spAutoFit/>
-          </a:bodyPr>
-          <a:lstStyle/>
-          <a:p>
-            <a:pPr algn="l">
-              <a:defRPr sz="1400" b="1">
-                <a:solidFill>
-                  <a:srgbClr val="1E8A4C"/>
-                </a:solidFill>
-              </a:defRPr>
-            </a:pPr>
-            <a:r>
-              <a:t>6</a:t>
-            </a:r>
-          </a:p>
-        </p:txBody>
-      </p:sp>
-      <p:sp>
-        <p:nvSpPr>
-          <p:cNvPr id="35" name="TextBox 34"/>
-          <p:cNvSpPr txBox="1"/>
-          <p:nvPr/>
-        </p:nvSpPr>
-        <p:spPr>
-          <a:xfrm>
-            <a:off x="960120" y="3931920"/>
-            <a:ext cx="5669280" cy="320040"/>
-          </a:xfrm>
-          <a:prstGeom prst="rect">
-            <a:avLst/>
-          </a:prstGeom>
-          <a:noFill/>
-        </p:spPr>
-        <p:txBody>
-          <a:bodyPr wrap="square">
-            <a:spAutoFit/>
-          </a:bodyPr>
-          <a:lstStyle/>
-          <a:p>
-            <a:pPr algn="l">
-              <a:defRPr sz="1300" b="0">
-                <a:solidFill>
-                  <a:srgbClr val="222222"/>
-                </a:solidFill>
-              </a:defRPr>
-            </a:pPr>
-            <a:r>
-              <a:t>Matrix reciprocity  A_ij = A_ji</a:t>
-            </a:r>
-          </a:p>
-        </p:txBody>
-      </p:sp>
-      <p:sp>
-        <p:nvSpPr>
-          <p:cNvPr id="36" name="TextBox 35"/>
-          <p:cNvSpPr txBox="1"/>
-          <p:nvPr/>
-        </p:nvSpPr>
-        <p:spPr>
-          <a:xfrm>
-            <a:off x="6720840" y="3931920"/>
-            <a:ext cx="2377440" cy="320040"/>
-          </a:xfrm>
-          <a:prstGeom prst="rect">
-            <a:avLst/>
-          </a:prstGeom>
-          <a:noFill/>
-        </p:spPr>
-        <p:txBody>
-          <a:bodyPr wrap="square">
-            <a:spAutoFit/>
-          </a:bodyPr>
-          <a:lstStyle/>
-          <a:p>
-            <a:pPr algn="l">
-              <a:defRPr sz="1200" b="0">
-                <a:solidFill>
-                  <a:srgbClr val="666677"/>
-                </a:solidFill>
-              </a:defRPr>
-            </a:pPr>
-            <a:r>
-              <a:t>행렬 호혜성</a:t>
-            </a:r>
-          </a:p>
-        </p:txBody>
-      </p:sp>
-      <p:sp>
-        <p:nvSpPr>
-          <p:cNvPr id="37" name="TextBox 36"/>
-          <p:cNvSpPr txBox="1"/>
-          <p:nvPr/>
-        </p:nvSpPr>
-        <p:spPr>
-          <a:xfrm>
-            <a:off x="9189720" y="3931920"/>
-            <a:ext cx="2834640" cy="320040"/>
-          </a:xfrm>
-          <a:prstGeom prst="rect">
-            <a:avLst/>
-          </a:prstGeom>
-          <a:noFill/>
-        </p:spPr>
-        <p:txBody>
-          <a:bodyPr wrap="square">
-            <a:spAutoFit/>
-          </a:bodyPr>
-          <a:lstStyle/>
-          <a:p>
-            <a:pPr algn="l">
-              <a:defRPr sz="1300" b="1">
-                <a:solidFill>
-                  <a:srgbClr val="1E8A4C"/>
-                </a:solidFill>
-              </a:defRPr>
-            </a:pPr>
-            <a:r>
-              <a:t>exact  0</a:t>
-            </a:r>
-          </a:p>
-        </p:txBody>
-      </p:sp>
-      <p:sp>
-        <p:nvSpPr>
-          <p:cNvPr id="38" name="Rectangle 37"/>
-          <p:cNvSpPr/>
-          <p:nvPr/>
-        </p:nvSpPr>
-        <p:spPr>
-          <a:xfrm>
-            <a:off x="457200" y="4315968"/>
-            <a:ext cx="11612880" cy="411480"/>
-          </a:xfrm>
-          <a:prstGeom prst="rect">
-            <a:avLst/>
-          </a:prstGeom>
-          <a:solidFill>
-            <a:srgbClr val="F8FAFD"/>
-          </a:solidFill>
-          <a:ln w="6350">
-            <a:solidFill>
-              <a:srgbClr val="D0D8E0"/>
-            </a:solidFill>
-          </a:ln>
-        </p:spPr>
-        <p:style>
-          <a:lnRef idx="1">
-            <a:schemeClr val="accent1"/>
-          </a:lnRef>
-          <a:fillRef idx="3">
-            <a:schemeClr val="accent1"/>
-          </a:fillRef>
-          <a:effectRef idx="2">
-            <a:schemeClr val="accent1"/>
-          </a:effectRef>
-          <a:fontRef idx="minor">
-            <a:schemeClr val="lt1"/>
-          </a:fontRef>
-        </p:style>
-        <p:txBody>
-          <a:bodyPr rtlCol="0" anchor="ctr"/>
-          <a:lstStyle/>
-          <a:p>
-            <a:pPr algn="ctr"/>
-          </a:p>
-        </p:txBody>
-      </p:sp>
-      <p:sp>
-        <p:nvSpPr>
-          <p:cNvPr id="39" name="TextBox 38"/>
-          <p:cNvSpPr txBox="1"/>
-          <p:nvPr/>
-        </p:nvSpPr>
-        <p:spPr>
-          <a:xfrm>
-            <a:off x="502920" y="4361688"/>
-            <a:ext cx="365760" cy="320040"/>
-          </a:xfrm>
-          <a:prstGeom prst="rect">
-            <a:avLst/>
-          </a:prstGeom>
-          <a:noFill/>
-        </p:spPr>
-        <p:txBody>
-          <a:bodyPr wrap="square">
-            <a:spAutoFit/>
-          </a:bodyPr>
-          <a:lstStyle/>
-          <a:p>
-            <a:pPr algn="l">
-              <a:defRPr sz="1400" b="1">
-                <a:solidFill>
-                  <a:srgbClr val="1E8A4C"/>
-                </a:solidFill>
-              </a:defRPr>
-            </a:pPr>
-            <a:r>
-              <a:t>7</a:t>
-            </a:r>
-          </a:p>
-        </p:txBody>
-      </p:sp>
-      <p:sp>
-        <p:nvSpPr>
-          <p:cNvPr id="40" name="TextBox 39"/>
-          <p:cNvSpPr txBox="1"/>
-          <p:nvPr/>
-        </p:nvSpPr>
-        <p:spPr>
-          <a:xfrm>
-            <a:off x="960120" y="4361688"/>
-            <a:ext cx="5669280" cy="320040"/>
-          </a:xfrm>
-          <a:prstGeom prst="rect">
-            <a:avLst/>
-          </a:prstGeom>
-          <a:noFill/>
-        </p:spPr>
-        <p:txBody>
-          <a:bodyPr wrap="square">
-            <a:spAutoFit/>
-          </a:bodyPr>
-          <a:lstStyle/>
-          <a:p>
-            <a:pPr algn="l">
-              <a:defRPr sz="1300" b="0">
-                <a:solidFill>
-                  <a:srgbClr val="222222"/>
-                </a:solidFill>
-              </a:defRPr>
-            </a:pPr>
-            <a:r>
-              <a:t>Array-size convergence (2D lattice sum)</a:t>
-            </a:r>
-          </a:p>
-        </p:txBody>
-      </p:sp>
-      <p:sp>
-        <p:nvSpPr>
-          <p:cNvPr id="41" name="TextBox 40"/>
-          <p:cNvSpPr txBox="1"/>
-          <p:nvPr/>
-        </p:nvSpPr>
-        <p:spPr>
-          <a:xfrm>
-            <a:off x="6720840" y="4361688"/>
-            <a:ext cx="2377440" cy="320040"/>
-          </a:xfrm>
-          <a:prstGeom prst="rect">
-            <a:avLst/>
-          </a:prstGeom>
-          <a:noFill/>
-        </p:spPr>
-        <p:txBody>
-          <a:bodyPr wrap="square">
-            <a:spAutoFit/>
-          </a:bodyPr>
-          <a:lstStyle/>
-          <a:p>
-            <a:pPr algn="l">
-              <a:defRPr sz="1200" b="0">
-                <a:solidFill>
-                  <a:srgbClr val="666677"/>
-                </a:solidFill>
-              </a:defRPr>
-            </a:pPr>
-            <a:r>
-              <a:t>배열 크기 수렴성</a:t>
-            </a:r>
-          </a:p>
-        </p:txBody>
-      </p:sp>
-      <p:sp>
-        <p:nvSpPr>
-          <p:cNvPr id="42" name="TextBox 41"/>
-          <p:cNvSpPr txBox="1"/>
-          <p:nvPr/>
-        </p:nvSpPr>
-        <p:spPr>
-          <a:xfrm>
-            <a:off x="9189720" y="4361688"/>
-            <a:ext cx="2834640" cy="320040"/>
-          </a:xfrm>
-          <a:prstGeom prst="rect">
-            <a:avLst/>
-          </a:prstGeom>
-          <a:noFill/>
-        </p:spPr>
-        <p:txBody>
-          <a:bodyPr wrap="square">
-            <a:spAutoFit/>
-          </a:bodyPr>
-          <a:lstStyle/>
-          <a:p>
-            <a:pPr algn="l">
-              <a:defRPr sz="1300" b="1">
-                <a:solidFill>
-                  <a:srgbClr val="1E8A4C"/>
-                </a:solidFill>
-              </a:defRPr>
-            </a:pPr>
-            <a:r>
-              <a:t>slope ≈ −0.26 ★</a:t>
-            </a:r>
-          </a:p>
-        </p:txBody>
-      </p:sp>
-      <p:sp>
-        <p:nvSpPr>
-          <p:cNvPr id="43" name="Rectangle 42"/>
-          <p:cNvSpPr/>
-          <p:nvPr/>
-        </p:nvSpPr>
-        <p:spPr>
-          <a:xfrm>
-            <a:off x="457200" y="4745736"/>
-            <a:ext cx="11612880" cy="411480"/>
-          </a:xfrm>
-          <a:prstGeom prst="rect">
-            <a:avLst/>
-          </a:prstGeom>
-          <a:solidFill>
-            <a:srgbClr val="FFFFFF"/>
-          </a:solidFill>
-          <a:ln w="6350">
-            <a:solidFill>
-              <a:srgbClr val="D0D8E0"/>
-            </a:solidFill>
-          </a:ln>
-        </p:spPr>
-        <p:style>
-          <a:lnRef idx="1">
-            <a:schemeClr val="accent1"/>
-          </a:lnRef>
-          <a:fillRef idx="3">
-            <a:schemeClr val="accent1"/>
-          </a:fillRef>
-          <a:effectRef idx="2">
-            <a:schemeClr val="accent1"/>
-          </a:effectRef>
-          <a:fontRef idx="minor">
-            <a:schemeClr val="lt1"/>
-          </a:fontRef>
-        </p:style>
-        <p:txBody>
-          <a:bodyPr rtlCol="0" anchor="ctr"/>
-          <a:lstStyle/>
-          <a:p>
-            <a:pPr algn="ctr"/>
-          </a:p>
-        </p:txBody>
-      </p:sp>
-      <p:sp>
-        <p:nvSpPr>
-          <p:cNvPr id="44" name="TextBox 43"/>
-          <p:cNvSpPr txBox="1"/>
-          <p:nvPr/>
-        </p:nvSpPr>
-        <p:spPr>
-          <a:xfrm>
-            <a:off x="502920" y="4791456"/>
-            <a:ext cx="365760" cy="320040"/>
-          </a:xfrm>
-          <a:prstGeom prst="rect">
-            <a:avLst/>
-          </a:prstGeom>
-          <a:noFill/>
-        </p:spPr>
-        <p:txBody>
-          <a:bodyPr wrap="square">
-            <a:spAutoFit/>
-          </a:bodyPr>
-          <a:lstStyle/>
-          <a:p>
-            <a:pPr algn="l">
-              <a:defRPr sz="1400" b="1">
-                <a:solidFill>
-                  <a:srgbClr val="1E8A4C"/>
-                </a:solidFill>
-              </a:defRPr>
-            </a:pPr>
-            <a:r>
-              <a:t>8</a:t>
-            </a:r>
-          </a:p>
-        </p:txBody>
-      </p:sp>
-      <p:sp>
-        <p:nvSpPr>
-          <p:cNvPr id="45" name="TextBox 44"/>
-          <p:cNvSpPr txBox="1"/>
-          <p:nvPr/>
-        </p:nvSpPr>
-        <p:spPr>
-          <a:xfrm>
-            <a:off x="960120" y="4791456"/>
-            <a:ext cx="5669280" cy="320040"/>
-          </a:xfrm>
-          <a:prstGeom prst="rect">
-            <a:avLst/>
-          </a:prstGeom>
-          <a:noFill/>
-        </p:spPr>
-        <p:txBody>
-          <a:bodyPr wrap="square">
-            <a:spAutoFit/>
-          </a:bodyPr>
-          <a:lstStyle/>
-          <a:p>
-            <a:pPr algn="l">
-              <a:defRPr sz="1300" b="0">
-                <a:solidFill>
-                  <a:srgbClr val="222222"/>
-                </a:solidFill>
-              </a:defRPr>
-            </a:pPr>
-            <a:r>
-              <a:t>Wavelength-scaling invariance</a:t>
-            </a:r>
-          </a:p>
-        </p:txBody>
-      </p:sp>
-      <p:sp>
-        <p:nvSpPr>
-          <p:cNvPr id="46" name="TextBox 45"/>
-          <p:cNvSpPr txBox="1"/>
-          <p:nvPr/>
-        </p:nvSpPr>
-        <p:spPr>
-          <a:xfrm>
-            <a:off x="6720840" y="4791456"/>
-            <a:ext cx="2377440" cy="320040"/>
-          </a:xfrm>
-          <a:prstGeom prst="rect">
-            <a:avLst/>
-          </a:prstGeom>
-          <a:noFill/>
-        </p:spPr>
-        <p:txBody>
-          <a:bodyPr wrap="square">
-            <a:spAutoFit/>
-          </a:bodyPr>
-          <a:lstStyle/>
-          <a:p>
-            <a:pPr algn="l">
-              <a:defRPr sz="1200" b="0">
-                <a:solidFill>
-                  <a:srgbClr val="666677"/>
-                </a:solidFill>
-              </a:defRPr>
-            </a:pPr>
-            <a:r>
-              <a:t>파장 스케일링 불변성</a:t>
-            </a:r>
-          </a:p>
-        </p:txBody>
-      </p:sp>
-      <p:sp>
-        <p:nvSpPr>
-          <p:cNvPr id="47" name="TextBox 46"/>
-          <p:cNvSpPr txBox="1"/>
-          <p:nvPr/>
-        </p:nvSpPr>
-        <p:spPr>
-          <a:xfrm>
-            <a:off x="9189720" y="4791456"/>
-            <a:ext cx="2834640" cy="320040"/>
-          </a:xfrm>
-          <a:prstGeom prst="rect">
-            <a:avLst/>
-          </a:prstGeom>
-          <a:noFill/>
-        </p:spPr>
-        <p:txBody>
-          <a:bodyPr wrap="square">
-            <a:spAutoFit/>
-          </a:bodyPr>
-          <a:lstStyle/>
-          <a:p>
-            <a:pPr algn="l">
-              <a:defRPr sz="1300" b="1">
-                <a:solidFill>
-                  <a:srgbClr val="1E8A4C"/>
-                </a:solidFill>
-              </a:defRPr>
-            </a:pPr>
-            <a:r>
-              <a:t>exact  0</a:t>
-            </a:r>
-          </a:p>
-        </p:txBody>
-      </p:sp>
-      <p:sp>
-        <p:nvSpPr>
-          <p:cNvPr id="48" name="Rectangle 47"/>
-          <p:cNvSpPr/>
-          <p:nvPr/>
-        </p:nvSpPr>
-        <p:spPr>
-          <a:xfrm>
-            <a:off x="457200" y="5175504"/>
-            <a:ext cx="11612880" cy="411480"/>
-          </a:xfrm>
-          <a:prstGeom prst="rect">
-            <a:avLst/>
-          </a:prstGeom>
-          <a:solidFill>
-            <a:srgbClr val="F8FAFD"/>
-          </a:solidFill>
-          <a:ln w="6350">
-            <a:solidFill>
-              <a:srgbClr val="D0D8E0"/>
-            </a:solidFill>
-          </a:ln>
-        </p:spPr>
-        <p:style>
-          <a:lnRef idx="1">
-            <a:schemeClr val="accent1"/>
-          </a:lnRef>
-          <a:fillRef idx="3">
-            <a:schemeClr val="accent1"/>
-          </a:fillRef>
-          <a:effectRef idx="2">
-            <a:schemeClr val="accent1"/>
-          </a:effectRef>
-          <a:fontRef idx="minor">
-            <a:schemeClr val="lt1"/>
-          </a:fontRef>
-        </p:style>
-        <p:txBody>
-          <a:bodyPr rtlCol="0" anchor="ctr"/>
-          <a:lstStyle/>
-          <a:p>
-            <a:pPr algn="ctr"/>
-          </a:p>
-        </p:txBody>
-      </p:sp>
-      <p:sp>
-        <p:nvSpPr>
-          <p:cNvPr id="49" name="TextBox 48"/>
-          <p:cNvSpPr txBox="1"/>
-          <p:nvPr/>
-        </p:nvSpPr>
-        <p:spPr>
-          <a:xfrm>
-            <a:off x="502920" y="5221224"/>
-            <a:ext cx="365760" cy="320040"/>
-          </a:xfrm>
-          <a:prstGeom prst="rect">
-            <a:avLst/>
-          </a:prstGeom>
-          <a:noFill/>
-        </p:spPr>
-        <p:txBody>
-          <a:bodyPr wrap="square">
-            <a:spAutoFit/>
-          </a:bodyPr>
-          <a:lstStyle/>
-          <a:p>
-            <a:pPr algn="l">
-              <a:defRPr sz="1400" b="1">
-                <a:solidFill>
-                  <a:srgbClr val="1E8A4C"/>
-                </a:solidFill>
-              </a:defRPr>
-            </a:pPr>
-            <a:r>
-              <a:t>9</a:t>
-            </a:r>
-          </a:p>
-        </p:txBody>
-      </p:sp>
-      <p:sp>
-        <p:nvSpPr>
-          <p:cNvPr id="50" name="TextBox 49"/>
-          <p:cNvSpPr txBox="1"/>
-          <p:nvPr/>
-        </p:nvSpPr>
-        <p:spPr>
-          <a:xfrm>
-            <a:off x="960120" y="5221224"/>
-            <a:ext cx="5669280" cy="320040"/>
-          </a:xfrm>
-          <a:prstGeom prst="rect">
-            <a:avLst/>
-          </a:prstGeom>
-          <a:noFill/>
-        </p:spPr>
-        <p:txBody>
-          <a:bodyPr wrap="square">
-            <a:spAutoFit/>
-          </a:bodyPr>
-          <a:lstStyle/>
-          <a:p>
-            <a:pPr algn="l">
-              <a:defRPr sz="1300" b="0">
-                <a:solidFill>
-                  <a:srgbClr val="222222"/>
-                </a:solidFill>
-              </a:defRPr>
-            </a:pPr>
-            <a:r>
-              <a:t>Extinction power positivity (optical theorem)</a:t>
-            </a:r>
-          </a:p>
-        </p:txBody>
-      </p:sp>
-      <p:sp>
-        <p:nvSpPr>
-          <p:cNvPr id="51" name="TextBox 50"/>
-          <p:cNvSpPr txBox="1"/>
-          <p:nvPr/>
-        </p:nvSpPr>
-        <p:spPr>
-          <a:xfrm>
-            <a:off x="6720840" y="5221224"/>
-            <a:ext cx="2377440" cy="320040"/>
-          </a:xfrm>
-          <a:prstGeom prst="rect">
-            <a:avLst/>
-          </a:prstGeom>
-          <a:noFill/>
-        </p:spPr>
-        <p:txBody>
-          <a:bodyPr wrap="square">
-            <a:spAutoFit/>
-          </a:bodyPr>
-          <a:lstStyle/>
-          <a:p>
-            <a:pPr algn="l">
-              <a:defRPr sz="1200" b="0">
-                <a:solidFill>
-                  <a:srgbClr val="666677"/>
-                </a:solidFill>
-              </a:defRPr>
-            </a:pPr>
-            <a:r>
-              <a:t>소광 전력 양성</a:t>
-            </a:r>
-          </a:p>
-        </p:txBody>
-      </p:sp>
-      <p:sp>
-        <p:nvSpPr>
-          <p:cNvPr id="52" name="TextBox 51"/>
-          <p:cNvSpPr txBox="1"/>
-          <p:nvPr/>
-        </p:nvSpPr>
-        <p:spPr>
-          <a:xfrm>
-            <a:off x="9189720" y="5221224"/>
-            <a:ext cx="2834640" cy="320040"/>
-          </a:xfrm>
-          <a:prstGeom prst="rect">
-            <a:avLst/>
-          </a:prstGeom>
-          <a:noFill/>
-        </p:spPr>
-        <p:txBody>
-          <a:bodyPr wrap="square">
-            <a:spAutoFit/>
-          </a:bodyPr>
-          <a:lstStyle/>
-          <a:p>
-            <a:pPr algn="l">
-              <a:defRPr sz="1300" b="1">
-                <a:solidFill>
-                  <a:srgbClr val="1E8A4C"/>
-                </a:solidFill>
-              </a:defRPr>
-            </a:pPr>
-            <a:r>
-              <a:t>all  P_ext &gt; 0</a:t>
-            </a:r>
-          </a:p>
-        </p:txBody>
-      </p:sp>
-      <p:sp>
-        <p:nvSpPr>
-          <p:cNvPr id="53" name="Rectangle 52"/>
-          <p:cNvSpPr/>
-          <p:nvPr/>
-        </p:nvSpPr>
-        <p:spPr>
-          <a:xfrm>
-            <a:off x="457200" y="5605272"/>
-            <a:ext cx="11612880" cy="411480"/>
-          </a:xfrm>
-          <a:prstGeom prst="rect">
-            <a:avLst/>
-          </a:prstGeom>
-          <a:solidFill>
-            <a:srgbClr val="FFFFFF"/>
-          </a:solidFill>
-          <a:ln w="6350">
-            <a:solidFill>
-              <a:srgbClr val="D0D8E0"/>
-            </a:solidFill>
-          </a:ln>
-        </p:spPr>
-        <p:style>
-          <a:lnRef idx="1">
-            <a:schemeClr val="accent1"/>
-          </a:lnRef>
-          <a:fillRef idx="3">
-            <a:schemeClr val="accent1"/>
-          </a:fillRef>
-          <a:effectRef idx="2">
-            <a:schemeClr val="accent1"/>
-          </a:effectRef>
-          <a:fontRef idx="minor">
-            <a:schemeClr val="lt1"/>
-          </a:fontRef>
-        </p:style>
-        <p:txBody>
-          <a:bodyPr rtlCol="0" anchor="ctr"/>
-          <a:lstStyle/>
-          <a:p>
-            <a:pPr algn="ctr"/>
-          </a:p>
-        </p:txBody>
-      </p:sp>
-      <p:sp>
-        <p:nvSpPr>
-          <p:cNvPr id="54" name="TextBox 53"/>
-          <p:cNvSpPr txBox="1"/>
-          <p:nvPr/>
-        </p:nvSpPr>
-        <p:spPr>
-          <a:xfrm>
-            <a:off x="502920" y="5650992"/>
-            <a:ext cx="365760" cy="320040"/>
-          </a:xfrm>
-          <a:prstGeom prst="rect">
-            <a:avLst/>
-          </a:prstGeom>
-          <a:noFill/>
-        </p:spPr>
-        <p:txBody>
-          <a:bodyPr wrap="square">
-            <a:spAutoFit/>
-          </a:bodyPr>
-          <a:lstStyle/>
-          <a:p>
-            <a:pPr algn="l">
-              <a:defRPr sz="1400" b="1">
-                <a:solidFill>
-                  <a:srgbClr val="1E8A4C"/>
-                </a:solidFill>
-              </a:defRPr>
-            </a:pPr>
-            <a:r>
-              <a:t>10</a:t>
-            </a:r>
-          </a:p>
-        </p:txBody>
-      </p:sp>
-      <p:sp>
-        <p:nvSpPr>
-          <p:cNvPr id="55" name="TextBox 54"/>
-          <p:cNvSpPr txBox="1"/>
-          <p:nvPr/>
-        </p:nvSpPr>
-        <p:spPr>
-          <a:xfrm>
-            <a:off x="960120" y="5650992"/>
-            <a:ext cx="5669280" cy="320040"/>
-          </a:xfrm>
-          <a:prstGeom prst="rect">
-            <a:avLst/>
-          </a:prstGeom>
-          <a:noFill/>
-        </p:spPr>
-        <p:txBody>
-          <a:bodyPr wrap="square">
-            <a:spAutoFit/>
-          </a:bodyPr>
-          <a:lstStyle/>
-          <a:p>
-            <a:pPr algn="l">
-              <a:defRPr sz="1300" b="0">
-                <a:solidFill>
-                  <a:srgbClr val="222222"/>
-                </a:solidFill>
-              </a:defRPr>
-            </a:pPr>
-            <a:r>
-              <a:t>Non-uniform solver ⇒ uniform limit</a:t>
-            </a:r>
-          </a:p>
-        </p:txBody>
-      </p:sp>
-      <p:sp>
-        <p:nvSpPr>
-          <p:cNvPr id="56" name="TextBox 55"/>
-          <p:cNvSpPr txBox="1"/>
-          <p:nvPr/>
-        </p:nvSpPr>
-        <p:spPr>
-          <a:xfrm>
-            <a:off x="6720840" y="5650992"/>
-            <a:ext cx="2377440" cy="320040"/>
-          </a:xfrm>
-          <a:prstGeom prst="rect">
-            <a:avLst/>
-          </a:prstGeom>
-          <a:noFill/>
-        </p:spPr>
-        <p:txBody>
-          <a:bodyPr wrap="square">
-            <a:spAutoFit/>
-          </a:bodyPr>
-          <a:lstStyle/>
-          <a:p>
-            <a:pPr algn="l">
-              <a:defRPr sz="1200" b="0">
-                <a:solidFill>
-                  <a:srgbClr val="666677"/>
-                </a:solidFill>
-              </a:defRPr>
-            </a:pPr>
-            <a:r>
-              <a:t>비균일→균일 극한</a:t>
-            </a:r>
-          </a:p>
-        </p:txBody>
-      </p:sp>
-      <p:sp>
-        <p:nvSpPr>
-          <p:cNvPr id="57" name="TextBox 56"/>
-          <p:cNvSpPr txBox="1"/>
-          <p:nvPr/>
-        </p:nvSpPr>
-        <p:spPr>
-          <a:xfrm>
-            <a:off x="9189720" y="5650992"/>
-            <a:ext cx="2834640" cy="320040"/>
-          </a:xfrm>
-          <a:prstGeom prst="rect">
-            <a:avLst/>
-          </a:prstGeom>
-          <a:noFill/>
-        </p:spPr>
-        <p:txBody>
-          <a:bodyPr wrap="square">
-            <a:spAutoFit/>
-          </a:bodyPr>
-          <a:lstStyle/>
-          <a:p>
-            <a:pPr algn="l">
-              <a:defRPr sz="1300" b="1">
-                <a:solidFill>
-                  <a:srgbClr val="1E8A4C"/>
-                </a:solidFill>
-              </a:defRPr>
-            </a:pPr>
-            <a:r>
-              <a:t>exact  0</a:t>
-            </a:r>
-          </a:p>
-        </p:txBody>
-      </p:sp>
+              <a:defRPr sz="1600" b="1">
+                <a:solidFill>
+                  <a:srgbClr val="C0392B"/>
+                </a:solidFill>
+              </a:defRPr>
+            </a:pPr>
+            <a:r>
+              <a:t>(d) Lorentzian polarizability | 분극률</a:t>
+            </a:r>
+          </a:p>
+        </p:txBody>
+      </p:sp>
+      <p:pic>
+        <p:nvPicPr>
+          <p:cNvPr id="13" name="Picture 12" descr="w2_code_6880c91c.png"/>
+          <p:cNvPicPr>
+            <a:picLocks noChangeAspect="1"/>
+          </p:cNvPicPr>
+          <p:nvPr/>
+        </p:nvPicPr>
+        <p:blipFill>
+          <a:blip r:embed="rId6"/>
+          <a:stretch>
+            <a:fillRect/>
+          </a:stretch>
+        </p:blipFill>
+        <p:spPr>
+          <a:xfrm>
+            <a:off x="6309360" y="4160520"/>
+            <a:ext cx="5669280" cy="1933594"/>
+          </a:xfrm>
+          <a:prstGeom prst="rect">
+            <a:avLst/>
+          </a:prstGeom>
+        </p:spPr>
+      </p:pic>
     </p:spTree>
   </p:cSld>
   <p:clrMapOvr>
@@ -6261,7 +5112,7 @@
               </a:defRPr>
             </a:pPr>
             <a:r>
-              <a:t>4. Key Physical Finding — Test 7</a:t>
+              <a:t>4. Verification Results  —  10 / 10 PASS</a:t>
             </a:r>
           </a:p>
         </p:txBody>
@@ -6296,7 +5147,7 @@
               </a:defRPr>
             </a:pPr>
             <a:r>
-              <a:t>주목할 물리 — Test 7</a:t>
+              <a:t>검증 결과 — 10/10 통과</a:t>
             </a:r>
           </a:p>
         </p:txBody>
@@ -6309,8 +5160,8 @@
         </p:nvSpPr>
         <p:spPr>
           <a:xfrm>
-            <a:off x="548640" y="1417320"/>
-            <a:ext cx="5303520" cy="5029200"/>
+            <a:off x="457200" y="1371600"/>
+            <a:ext cx="457200" cy="320040"/>
           </a:xfrm>
           <a:prstGeom prst="rect">
             <a:avLst/>
@@ -6324,363 +5175,1973 @@
           <a:lstStyle/>
           <a:p>
             <a:pPr algn="l">
-              <a:defRPr sz="2000" b="1">
-                <a:solidFill>
-                  <a:srgbClr val="C0392B"/>
-                </a:solidFill>
-              </a:defRPr>
-            </a:pPr>
-            <a:r>
-              <a:t>Observation</a:t>
-            </a:r>
-          </a:p>
-          <a:p>
-            <a:pPr algn="l">
-              <a:spcBef>
-                <a:spcPts val="0"/>
-              </a:spcBef>
-              <a:spcAft>
-                <a:spcPts val="200"/>
-              </a:spcAft>
-              <a:defRPr sz="1400" b="0">
+              <a:defRPr sz="1400" b="1">
+                <a:solidFill>
+                  <a:srgbClr val="1A478A"/>
+                </a:solidFill>
+              </a:defRPr>
+            </a:pPr>
+            <a:r>
+              <a:t>#</a:t>
+            </a:r>
+          </a:p>
+        </p:txBody>
+      </p:sp>
+      <p:sp>
+        <p:nvSpPr>
+          <p:cNvPr id="5" name="TextBox 4"/>
+          <p:cNvSpPr txBox="1"/>
+          <p:nvPr/>
+        </p:nvSpPr>
+        <p:spPr>
+          <a:xfrm>
+            <a:off x="914400" y="1371600"/>
+            <a:ext cx="5760720" cy="320040"/>
+          </a:xfrm>
+          <a:prstGeom prst="rect">
+            <a:avLst/>
+          </a:prstGeom>
+          <a:noFill/>
+        </p:spPr>
+        <p:txBody>
+          <a:bodyPr wrap="square">
+            <a:spAutoFit/>
+          </a:bodyPr>
+          <a:lstStyle/>
+          <a:p>
+            <a:pPr algn="l">
+              <a:defRPr sz="1400" b="1">
+                <a:solidFill>
+                  <a:srgbClr val="1A478A"/>
+                </a:solidFill>
+              </a:defRPr>
+            </a:pPr>
+            <a:r>
+              <a:t>Test</a:t>
+            </a:r>
+          </a:p>
+        </p:txBody>
+      </p:sp>
+      <p:sp>
+        <p:nvSpPr>
+          <p:cNvPr id="6" name="TextBox 5"/>
+          <p:cNvSpPr txBox="1"/>
+          <p:nvPr/>
+        </p:nvSpPr>
+        <p:spPr>
+          <a:xfrm>
+            <a:off x="6675120" y="1371600"/>
+            <a:ext cx="2468880" cy="320040"/>
+          </a:xfrm>
+          <a:prstGeom prst="rect">
+            <a:avLst/>
+          </a:prstGeom>
+          <a:noFill/>
+        </p:spPr>
+        <p:txBody>
+          <a:bodyPr wrap="square">
+            <a:spAutoFit/>
+          </a:bodyPr>
+          <a:lstStyle/>
+          <a:p>
+            <a:pPr algn="l">
+              <a:defRPr sz="1400" b="1">
+                <a:solidFill>
+                  <a:srgbClr val="1A478A"/>
+                </a:solidFill>
+              </a:defRPr>
+            </a:pPr>
+            <a:r>
+              <a:t>한국어</a:t>
+            </a:r>
+          </a:p>
+        </p:txBody>
+      </p:sp>
+      <p:sp>
+        <p:nvSpPr>
+          <p:cNvPr id="7" name="TextBox 6"/>
+          <p:cNvSpPr txBox="1"/>
+          <p:nvPr/>
+        </p:nvSpPr>
+        <p:spPr>
+          <a:xfrm>
+            <a:off x="9144000" y="1371600"/>
+            <a:ext cx="2926080" cy="320040"/>
+          </a:xfrm>
+          <a:prstGeom prst="rect">
+            <a:avLst/>
+          </a:prstGeom>
+          <a:noFill/>
+        </p:spPr>
+        <p:txBody>
+          <a:bodyPr wrap="square">
+            <a:spAutoFit/>
+          </a:bodyPr>
+          <a:lstStyle/>
+          <a:p>
+            <a:pPr algn="l">
+              <a:defRPr sz="1400" b="1">
+                <a:solidFill>
+                  <a:srgbClr val="1A478A"/>
+                </a:solidFill>
+              </a:defRPr>
+            </a:pPr>
+            <a:r>
+              <a:t>Result</a:t>
+            </a:r>
+          </a:p>
+        </p:txBody>
+      </p:sp>
+      <p:sp>
+        <p:nvSpPr>
+          <p:cNvPr id="8" name="Rectangle 7"/>
+          <p:cNvSpPr/>
+          <p:nvPr/>
+        </p:nvSpPr>
+        <p:spPr>
+          <a:xfrm>
+            <a:off x="457200" y="1737360"/>
+            <a:ext cx="11612880" cy="411480"/>
+          </a:xfrm>
+          <a:prstGeom prst="rect">
+            <a:avLst/>
+          </a:prstGeom>
+          <a:solidFill>
+            <a:srgbClr val="F8FAFD"/>
+          </a:solidFill>
+          <a:ln w="6350">
+            <a:solidFill>
+              <a:srgbClr val="D0D8E0"/>
+            </a:solidFill>
+          </a:ln>
+        </p:spPr>
+        <p:style>
+          <a:lnRef idx="1">
+            <a:schemeClr val="accent1"/>
+          </a:lnRef>
+          <a:fillRef idx="3">
+            <a:schemeClr val="accent1"/>
+          </a:fillRef>
+          <a:effectRef idx="2">
+            <a:schemeClr val="accent1"/>
+          </a:effectRef>
+          <a:fontRef idx="minor">
+            <a:schemeClr val="lt1"/>
+          </a:fontRef>
+        </p:style>
+        <p:txBody>
+          <a:bodyPr rtlCol="0" anchor="ctr"/>
+          <a:lstStyle/>
+          <a:p>
+            <a:pPr algn="ctr"/>
+          </a:p>
+        </p:txBody>
+      </p:sp>
+      <p:sp>
+        <p:nvSpPr>
+          <p:cNvPr id="9" name="TextBox 8"/>
+          <p:cNvSpPr txBox="1"/>
+          <p:nvPr/>
+        </p:nvSpPr>
+        <p:spPr>
+          <a:xfrm>
+            <a:off x="502920" y="1783080"/>
+            <a:ext cx="365760" cy="320040"/>
+          </a:xfrm>
+          <a:prstGeom prst="rect">
+            <a:avLst/>
+          </a:prstGeom>
+          <a:noFill/>
+        </p:spPr>
+        <p:txBody>
+          <a:bodyPr wrap="square">
+            <a:spAutoFit/>
+          </a:bodyPr>
+          <a:lstStyle/>
+          <a:p>
+            <a:pPr algn="l">
+              <a:defRPr sz="1400" b="1">
+                <a:solidFill>
+                  <a:srgbClr val="1E8A4C"/>
+                </a:solidFill>
+              </a:defRPr>
+            </a:pPr>
+            <a:r>
+              <a:t>1</a:t>
+            </a:r>
+          </a:p>
+        </p:txBody>
+      </p:sp>
+      <p:sp>
+        <p:nvSpPr>
+          <p:cNvPr id="10" name="TextBox 9"/>
+          <p:cNvSpPr txBox="1"/>
+          <p:nvPr/>
+        </p:nvSpPr>
+        <p:spPr>
+          <a:xfrm>
+            <a:off x="960120" y="1783080"/>
+            <a:ext cx="5669280" cy="320040"/>
+          </a:xfrm>
+          <a:prstGeom prst="rect">
+            <a:avLst/>
+          </a:prstGeom>
+          <a:noFill/>
+        </p:spPr>
+        <p:txBody>
+          <a:bodyPr wrap="square">
+            <a:spAutoFit/>
+          </a:bodyPr>
+          <a:lstStyle/>
+          <a:p>
+            <a:pPr algn="l">
+              <a:defRPr sz="1300" b="0">
+                <a:solidFill>
+                  <a:srgbClr val="222222"/>
+                </a:solidFill>
+              </a:defRPr>
+            </a:pPr>
+            <a:r>
+              <a:t>Single dipole  =  α · E_inc</a:t>
+            </a:r>
+          </a:p>
+        </p:txBody>
+      </p:sp>
+      <p:sp>
+        <p:nvSpPr>
+          <p:cNvPr id="11" name="TextBox 10"/>
+          <p:cNvSpPr txBox="1"/>
+          <p:nvPr/>
+        </p:nvSpPr>
+        <p:spPr>
+          <a:xfrm>
+            <a:off x="6720840" y="1783080"/>
+            <a:ext cx="2377440" cy="320040"/>
+          </a:xfrm>
+          <a:prstGeom prst="rect">
+            <a:avLst/>
+          </a:prstGeom>
+          <a:noFill/>
+        </p:spPr>
+        <p:txBody>
+          <a:bodyPr wrap="square">
+            <a:spAutoFit/>
+          </a:bodyPr>
+          <a:lstStyle/>
+          <a:p>
+            <a:pPr algn="l">
+              <a:defRPr sz="1200" b="0">
                 <a:solidFill>
                   <a:srgbClr val="666677"/>
                 </a:solidFill>
               </a:defRPr>
             </a:pPr>
             <a:r>
-              <a:t>관측 결과</a:t>
-            </a:r>
-          </a:p>
-          <a:p>
-            <a:pPr algn="l">
-              <a:spcBef>
-                <a:spcPts val="400"/>
-              </a:spcBef>
-              <a:spcAft>
-                <a:spcPts val="200"/>
-              </a:spcAft>
-              <a:defRPr sz="1500" b="0">
+              <a:t>1개 쌍극자 해석해</a:t>
+            </a:r>
+          </a:p>
+        </p:txBody>
+      </p:sp>
+      <p:sp>
+        <p:nvSpPr>
+          <p:cNvPr id="12" name="TextBox 11"/>
+          <p:cNvSpPr txBox="1"/>
+          <p:nvPr/>
+        </p:nvSpPr>
+        <p:spPr>
+          <a:xfrm>
+            <a:off x="9189720" y="1783080"/>
+            <a:ext cx="2834640" cy="320040"/>
+          </a:xfrm>
+          <a:prstGeom prst="rect">
+            <a:avLst/>
+          </a:prstGeom>
+          <a:noFill/>
+        </p:spPr>
+        <p:txBody>
+          <a:bodyPr wrap="square">
+            <a:spAutoFit/>
+          </a:bodyPr>
+          <a:lstStyle/>
+          <a:p>
+            <a:pPr algn="l">
+              <a:defRPr sz="1300" b="1">
+                <a:solidFill>
+                  <a:srgbClr val="1E8A4C"/>
+                </a:solidFill>
+              </a:defRPr>
+            </a:pPr>
+            <a:r>
+              <a:t>rel. err  1.5×10⁻¹⁶</a:t>
+            </a:r>
+          </a:p>
+        </p:txBody>
+      </p:sp>
+      <p:sp>
+        <p:nvSpPr>
+          <p:cNvPr id="13" name="Rectangle 12"/>
+          <p:cNvSpPr/>
+          <p:nvPr/>
+        </p:nvSpPr>
+        <p:spPr>
+          <a:xfrm>
+            <a:off x="457200" y="2167128"/>
+            <a:ext cx="11612880" cy="411480"/>
+          </a:xfrm>
+          <a:prstGeom prst="rect">
+            <a:avLst/>
+          </a:prstGeom>
+          <a:solidFill>
+            <a:srgbClr val="FFFFFF"/>
+          </a:solidFill>
+          <a:ln w="6350">
+            <a:solidFill>
+              <a:srgbClr val="D0D8E0"/>
+            </a:solidFill>
+          </a:ln>
+        </p:spPr>
+        <p:style>
+          <a:lnRef idx="1">
+            <a:schemeClr val="accent1"/>
+          </a:lnRef>
+          <a:fillRef idx="3">
+            <a:schemeClr val="accent1"/>
+          </a:fillRef>
+          <a:effectRef idx="2">
+            <a:schemeClr val="accent1"/>
+          </a:effectRef>
+          <a:fontRef idx="minor">
+            <a:schemeClr val="lt1"/>
+          </a:fontRef>
+        </p:style>
+        <p:txBody>
+          <a:bodyPr rtlCol="0" anchor="ctr"/>
+          <a:lstStyle/>
+          <a:p>
+            <a:pPr algn="ctr"/>
+          </a:p>
+        </p:txBody>
+      </p:sp>
+      <p:sp>
+        <p:nvSpPr>
+          <p:cNvPr id="14" name="TextBox 13"/>
+          <p:cNvSpPr txBox="1"/>
+          <p:nvPr/>
+        </p:nvSpPr>
+        <p:spPr>
+          <a:xfrm>
+            <a:off x="502920" y="2212848"/>
+            <a:ext cx="365760" cy="320040"/>
+          </a:xfrm>
+          <a:prstGeom prst="rect">
+            <a:avLst/>
+          </a:prstGeom>
+          <a:noFill/>
+        </p:spPr>
+        <p:txBody>
+          <a:bodyPr wrap="square">
+            <a:spAutoFit/>
+          </a:bodyPr>
+          <a:lstStyle/>
+          <a:p>
+            <a:pPr algn="l">
+              <a:defRPr sz="1400" b="1">
+                <a:solidFill>
+                  <a:srgbClr val="1E8A4C"/>
+                </a:solidFill>
+              </a:defRPr>
+            </a:pPr>
+            <a:r>
+              <a:t>2</a:t>
+            </a:r>
+          </a:p>
+        </p:txBody>
+      </p:sp>
+      <p:sp>
+        <p:nvSpPr>
+          <p:cNvPr id="15" name="TextBox 14"/>
+          <p:cNvSpPr txBox="1"/>
+          <p:nvPr/>
+        </p:nvSpPr>
+        <p:spPr>
+          <a:xfrm>
+            <a:off x="960120" y="2212848"/>
+            <a:ext cx="5669280" cy="320040"/>
+          </a:xfrm>
+          <a:prstGeom prst="rect">
+            <a:avLst/>
+          </a:prstGeom>
+          <a:noFill/>
+        </p:spPr>
+        <p:txBody>
+          <a:bodyPr wrap="square">
+            <a:spAutoFit/>
+          </a:bodyPr>
+          <a:lstStyle/>
+          <a:p>
+            <a:pPr algn="l">
+              <a:defRPr sz="1300" b="0">
                 <a:solidFill>
                   <a:srgbClr val="222222"/>
                 </a:solidFill>
               </a:defRPr>
             </a:pPr>
             <a:r>
-              <a:t>• Convergence rate of central-atom Δφ vs N</a:t>
-            </a:r>
-          </a:p>
-          <a:p>
-            <a:pPr algn="l">
-              <a:spcBef>
-                <a:spcPts val="0"/>
-              </a:spcBef>
-              <a:spcAft>
-                <a:spcPts val="200"/>
-              </a:spcAft>
+              <a:t>Two-dipole analytical  p = α/(1 − αG)</a:t>
+            </a:r>
+          </a:p>
+        </p:txBody>
+      </p:sp>
+      <p:sp>
+        <p:nvSpPr>
+          <p:cNvPr id="16" name="TextBox 15"/>
+          <p:cNvSpPr txBox="1"/>
+          <p:nvPr/>
+        </p:nvSpPr>
+        <p:spPr>
+          <a:xfrm>
+            <a:off x="6720840" y="2212848"/>
+            <a:ext cx="2377440" cy="320040"/>
+          </a:xfrm>
+          <a:prstGeom prst="rect">
+            <a:avLst/>
+          </a:prstGeom>
+          <a:noFill/>
+        </p:spPr>
+        <p:txBody>
+          <a:bodyPr wrap="square">
+            <a:spAutoFit/>
+          </a:bodyPr>
+          <a:lstStyle/>
+          <a:p>
+            <a:pPr algn="l">
+              <a:defRPr sz="1200" b="0">
+                <a:solidFill>
+                  <a:srgbClr val="666677"/>
+                </a:solidFill>
+              </a:defRPr>
+            </a:pPr>
+            <a:r>
+              <a:t>2개 쌍극자 해석해</a:t>
+            </a:r>
+          </a:p>
+        </p:txBody>
+      </p:sp>
+      <p:sp>
+        <p:nvSpPr>
+          <p:cNvPr id="17" name="TextBox 16"/>
+          <p:cNvSpPr txBox="1"/>
+          <p:nvPr/>
+        </p:nvSpPr>
+        <p:spPr>
+          <a:xfrm>
+            <a:off x="9189720" y="2212848"/>
+            <a:ext cx="2834640" cy="320040"/>
+          </a:xfrm>
+          <a:prstGeom prst="rect">
+            <a:avLst/>
+          </a:prstGeom>
+          <a:noFill/>
+        </p:spPr>
+        <p:txBody>
+          <a:bodyPr wrap="square">
+            <a:spAutoFit/>
+          </a:bodyPr>
+          <a:lstStyle/>
+          <a:p>
+            <a:pPr algn="l">
+              <a:defRPr sz="1300" b="1">
+                <a:solidFill>
+                  <a:srgbClr val="1E8A4C"/>
+                </a:solidFill>
+              </a:defRPr>
+            </a:pPr>
+            <a:r>
+              <a:t>rel. err  2.5×10⁻¹⁶</a:t>
+            </a:r>
+          </a:p>
+        </p:txBody>
+      </p:sp>
+      <p:sp>
+        <p:nvSpPr>
+          <p:cNvPr id="18" name="Rectangle 17"/>
+          <p:cNvSpPr/>
+          <p:nvPr/>
+        </p:nvSpPr>
+        <p:spPr>
+          <a:xfrm>
+            <a:off x="457200" y="2596896"/>
+            <a:ext cx="11612880" cy="411480"/>
+          </a:xfrm>
+          <a:prstGeom prst="rect">
+            <a:avLst/>
+          </a:prstGeom>
+          <a:solidFill>
+            <a:srgbClr val="F8FAFD"/>
+          </a:solidFill>
+          <a:ln w="6350">
+            <a:solidFill>
+              <a:srgbClr val="D0D8E0"/>
+            </a:solidFill>
+          </a:ln>
+        </p:spPr>
+        <p:style>
+          <a:lnRef idx="1">
+            <a:schemeClr val="accent1"/>
+          </a:lnRef>
+          <a:fillRef idx="3">
+            <a:schemeClr val="accent1"/>
+          </a:fillRef>
+          <a:effectRef idx="2">
+            <a:schemeClr val="accent1"/>
+          </a:effectRef>
+          <a:fontRef idx="minor">
+            <a:schemeClr val="lt1"/>
+          </a:fontRef>
+        </p:style>
+        <p:txBody>
+          <a:bodyPr rtlCol="0" anchor="ctr"/>
+          <a:lstStyle/>
+          <a:p>
+            <a:pPr algn="ctr"/>
+          </a:p>
+        </p:txBody>
+      </p:sp>
+      <p:sp>
+        <p:nvSpPr>
+          <p:cNvPr id="19" name="TextBox 18"/>
+          <p:cNvSpPr txBox="1"/>
+          <p:nvPr/>
+        </p:nvSpPr>
+        <p:spPr>
+          <a:xfrm>
+            <a:off x="502920" y="2642616"/>
+            <a:ext cx="365760" cy="320040"/>
+          </a:xfrm>
+          <a:prstGeom prst="rect">
+            <a:avLst/>
+          </a:prstGeom>
+          <a:noFill/>
+        </p:spPr>
+        <p:txBody>
+          <a:bodyPr wrap="square">
+            <a:spAutoFit/>
+          </a:bodyPr>
+          <a:lstStyle/>
+          <a:p>
+            <a:pPr algn="l">
+              <a:defRPr sz="1400" b="1">
+                <a:solidFill>
+                  <a:srgbClr val="1E8A4C"/>
+                </a:solidFill>
+              </a:defRPr>
+            </a:pPr>
+            <a:r>
+              <a:t>3</a:t>
+            </a:r>
+          </a:p>
+        </p:txBody>
+      </p:sp>
+      <p:sp>
+        <p:nvSpPr>
+          <p:cNvPr id="20" name="TextBox 19"/>
+          <p:cNvSpPr txBox="1"/>
+          <p:nvPr/>
+        </p:nvSpPr>
+        <p:spPr>
+          <a:xfrm>
+            <a:off x="960120" y="2642616"/>
+            <a:ext cx="5669280" cy="320040"/>
+          </a:xfrm>
+          <a:prstGeom prst="rect">
+            <a:avLst/>
+          </a:prstGeom>
+          <a:noFill/>
+        </p:spPr>
+        <p:txBody>
+          <a:bodyPr wrap="square">
+            <a:spAutoFit/>
+          </a:bodyPr>
+          <a:lstStyle/>
+          <a:p>
+            <a:pPr algn="l">
               <a:defRPr sz="1300" b="0">
                 <a:solidFill>
+                  <a:srgbClr val="222222"/>
+                </a:solidFill>
+              </a:defRPr>
+            </a:pPr>
+            <a:r>
+              <a:t>Green's function formula + reciprocity</a:t>
+            </a:r>
+          </a:p>
+        </p:txBody>
+      </p:sp>
+      <p:sp>
+        <p:nvSpPr>
+          <p:cNvPr id="21" name="TextBox 20"/>
+          <p:cNvSpPr txBox="1"/>
+          <p:nvPr/>
+        </p:nvSpPr>
+        <p:spPr>
+          <a:xfrm>
+            <a:off x="6720840" y="2642616"/>
+            <a:ext cx="2377440" cy="320040"/>
+          </a:xfrm>
+          <a:prstGeom prst="rect">
+            <a:avLst/>
+          </a:prstGeom>
+          <a:noFill/>
+        </p:spPr>
+        <p:txBody>
+          <a:bodyPr wrap="square">
+            <a:spAutoFit/>
+          </a:bodyPr>
+          <a:lstStyle/>
+          <a:p>
+            <a:pPr algn="l">
+              <a:defRPr sz="1200" b="0">
+                <a:solidFill>
                   <a:srgbClr val="666677"/>
                 </a:solidFill>
               </a:defRPr>
             </a:pPr>
             <a:r>
-              <a:t>  중심 원자 Δφ의 N에 따른 수렴 속도</a:t>
-            </a:r>
-          </a:p>
-          <a:p>
-            <a:pPr algn="l">
-              <a:spcBef>
-                <a:spcPts val="400"/>
-              </a:spcBef>
-              <a:spcAft>
-                <a:spcPts val="200"/>
-              </a:spcAft>
-              <a:defRPr sz="1500" b="0">
+              <a:t>Green 함수 공식 + 호혜성</a:t>
+            </a:r>
+          </a:p>
+        </p:txBody>
+      </p:sp>
+      <p:sp>
+        <p:nvSpPr>
+          <p:cNvPr id="22" name="TextBox 21"/>
+          <p:cNvSpPr txBox="1"/>
+          <p:nvPr/>
+        </p:nvSpPr>
+        <p:spPr>
+          <a:xfrm>
+            <a:off x="9189720" y="2642616"/>
+            <a:ext cx="2834640" cy="320040"/>
+          </a:xfrm>
+          <a:prstGeom prst="rect">
+            <a:avLst/>
+          </a:prstGeom>
+          <a:noFill/>
+        </p:spPr>
+        <p:txBody>
+          <a:bodyPr wrap="square">
+            <a:spAutoFit/>
+          </a:bodyPr>
+          <a:lstStyle/>
+          <a:p>
+            <a:pPr algn="l">
+              <a:defRPr sz="1300" b="1">
+                <a:solidFill>
+                  <a:srgbClr val="1E8A4C"/>
+                </a:solidFill>
+              </a:defRPr>
+            </a:pPr>
+            <a:r>
+              <a:t>exact  0</a:t>
+            </a:r>
+          </a:p>
+        </p:txBody>
+      </p:sp>
+      <p:sp>
+        <p:nvSpPr>
+          <p:cNvPr id="23" name="Rectangle 22"/>
+          <p:cNvSpPr/>
+          <p:nvPr/>
+        </p:nvSpPr>
+        <p:spPr>
+          <a:xfrm>
+            <a:off x="457200" y="3026664"/>
+            <a:ext cx="11612880" cy="411480"/>
+          </a:xfrm>
+          <a:prstGeom prst="rect">
+            <a:avLst/>
+          </a:prstGeom>
+          <a:solidFill>
+            <a:srgbClr val="FFFFFF"/>
+          </a:solidFill>
+          <a:ln w="6350">
+            <a:solidFill>
+              <a:srgbClr val="D0D8E0"/>
+            </a:solidFill>
+          </a:ln>
+        </p:spPr>
+        <p:style>
+          <a:lnRef idx="1">
+            <a:schemeClr val="accent1"/>
+          </a:lnRef>
+          <a:fillRef idx="3">
+            <a:schemeClr val="accent1"/>
+          </a:fillRef>
+          <a:effectRef idx="2">
+            <a:schemeClr val="accent1"/>
+          </a:effectRef>
+          <a:fontRef idx="minor">
+            <a:schemeClr val="lt1"/>
+          </a:fontRef>
+        </p:style>
+        <p:txBody>
+          <a:bodyPr rtlCol="0" anchor="ctr"/>
+          <a:lstStyle/>
+          <a:p>
+            <a:pPr algn="ctr"/>
+          </a:p>
+        </p:txBody>
+      </p:sp>
+      <p:sp>
+        <p:nvSpPr>
+          <p:cNvPr id="24" name="TextBox 23"/>
+          <p:cNvSpPr txBox="1"/>
+          <p:nvPr/>
+        </p:nvSpPr>
+        <p:spPr>
+          <a:xfrm>
+            <a:off x="502920" y="3072384"/>
+            <a:ext cx="365760" cy="320040"/>
+          </a:xfrm>
+          <a:prstGeom prst="rect">
+            <a:avLst/>
+          </a:prstGeom>
+          <a:noFill/>
+        </p:spPr>
+        <p:txBody>
+          <a:bodyPr wrap="square">
+            <a:spAutoFit/>
+          </a:bodyPr>
+          <a:lstStyle/>
+          <a:p>
+            <a:pPr algn="l">
+              <a:defRPr sz="1400" b="1">
+                <a:solidFill>
+                  <a:srgbClr val="1E8A4C"/>
+                </a:solidFill>
+              </a:defRPr>
+            </a:pPr>
+            <a:r>
+              <a:t>4</a:t>
+            </a:r>
+          </a:p>
+        </p:txBody>
+      </p:sp>
+      <p:sp>
+        <p:nvSpPr>
+          <p:cNvPr id="25" name="TextBox 24"/>
+          <p:cNvSpPr txBox="1"/>
+          <p:nvPr/>
+        </p:nvSpPr>
+        <p:spPr>
+          <a:xfrm>
+            <a:off x="960120" y="3072384"/>
+            <a:ext cx="5669280" cy="320040"/>
+          </a:xfrm>
+          <a:prstGeom prst="rect">
+            <a:avLst/>
+          </a:prstGeom>
+          <a:noFill/>
+        </p:spPr>
+        <p:txBody>
+          <a:bodyPr wrap="square">
+            <a:spAutoFit/>
+          </a:bodyPr>
+          <a:lstStyle/>
+          <a:p>
+            <a:pPr algn="l">
+              <a:defRPr sz="1300" b="0">
                 <a:solidFill>
                   <a:srgbClr val="222222"/>
                 </a:solidFill>
               </a:defRPr>
             </a:pPr>
             <a:r>
-              <a:t>• Observed slope: -0.26</a:t>
-            </a:r>
-          </a:p>
-          <a:p>
-            <a:pPr algn="l">
-              <a:spcBef>
-                <a:spcPts val="0"/>
-              </a:spcBef>
-              <a:spcAft>
-                <a:spcPts val="200"/>
-              </a:spcAft>
+              <a:t>Linear system residual  ‖Ap − E‖/‖E‖</a:t>
+            </a:r>
+          </a:p>
+        </p:txBody>
+      </p:sp>
+      <p:sp>
+        <p:nvSpPr>
+          <p:cNvPr id="26" name="TextBox 25"/>
+          <p:cNvSpPr txBox="1"/>
+          <p:nvPr/>
+        </p:nvSpPr>
+        <p:spPr>
+          <a:xfrm>
+            <a:off x="6720840" y="3072384"/>
+            <a:ext cx="2377440" cy="320040"/>
+          </a:xfrm>
+          <a:prstGeom prst="rect">
+            <a:avLst/>
+          </a:prstGeom>
+          <a:noFill/>
+        </p:spPr>
+        <p:txBody>
+          <a:bodyPr wrap="square">
+            <a:spAutoFit/>
+          </a:bodyPr>
+          <a:lstStyle/>
+          <a:p>
+            <a:pPr algn="l">
+              <a:defRPr sz="1200" b="0">
+                <a:solidFill>
+                  <a:srgbClr val="666677"/>
+                </a:solidFill>
+              </a:defRPr>
+            </a:pPr>
+            <a:r>
+              <a:t>선형 시스템 잔차</a:t>
+            </a:r>
+          </a:p>
+        </p:txBody>
+      </p:sp>
+      <p:sp>
+        <p:nvSpPr>
+          <p:cNvPr id="27" name="TextBox 26"/>
+          <p:cNvSpPr txBox="1"/>
+          <p:nvPr/>
+        </p:nvSpPr>
+        <p:spPr>
+          <a:xfrm>
+            <a:off x="9189720" y="3072384"/>
+            <a:ext cx="2834640" cy="320040"/>
+          </a:xfrm>
+          <a:prstGeom prst="rect">
+            <a:avLst/>
+          </a:prstGeom>
+          <a:noFill/>
+        </p:spPr>
+        <p:txBody>
+          <a:bodyPr wrap="square">
+            <a:spAutoFit/>
+          </a:bodyPr>
+          <a:lstStyle/>
+          <a:p>
+            <a:pPr algn="l">
+              <a:defRPr sz="1300" b="1">
+                <a:solidFill>
+                  <a:srgbClr val="1E8A4C"/>
+                </a:solidFill>
+              </a:defRPr>
+            </a:pPr>
+            <a:r>
+              <a:t>5.4×10⁻¹⁶</a:t>
+            </a:r>
+          </a:p>
+        </p:txBody>
+      </p:sp>
+      <p:sp>
+        <p:nvSpPr>
+          <p:cNvPr id="28" name="Rectangle 27"/>
+          <p:cNvSpPr/>
+          <p:nvPr/>
+        </p:nvSpPr>
+        <p:spPr>
+          <a:xfrm>
+            <a:off x="457200" y="3456432"/>
+            <a:ext cx="11612880" cy="411480"/>
+          </a:xfrm>
+          <a:prstGeom prst="rect">
+            <a:avLst/>
+          </a:prstGeom>
+          <a:solidFill>
+            <a:srgbClr val="F8FAFD"/>
+          </a:solidFill>
+          <a:ln w="6350">
+            <a:solidFill>
+              <a:srgbClr val="D0D8E0"/>
+            </a:solidFill>
+          </a:ln>
+        </p:spPr>
+        <p:style>
+          <a:lnRef idx="1">
+            <a:schemeClr val="accent1"/>
+          </a:lnRef>
+          <a:fillRef idx="3">
+            <a:schemeClr val="accent1"/>
+          </a:fillRef>
+          <a:effectRef idx="2">
+            <a:schemeClr val="accent1"/>
+          </a:effectRef>
+          <a:fontRef idx="minor">
+            <a:schemeClr val="lt1"/>
+          </a:fontRef>
+        </p:style>
+        <p:txBody>
+          <a:bodyPr rtlCol="0" anchor="ctr"/>
+          <a:lstStyle/>
+          <a:p>
+            <a:pPr algn="ctr"/>
+          </a:p>
+        </p:txBody>
+      </p:sp>
+      <p:sp>
+        <p:nvSpPr>
+          <p:cNvPr id="29" name="TextBox 28"/>
+          <p:cNvSpPr txBox="1"/>
+          <p:nvPr/>
+        </p:nvSpPr>
+        <p:spPr>
+          <a:xfrm>
+            <a:off x="502920" y="3502152"/>
+            <a:ext cx="365760" cy="320040"/>
+          </a:xfrm>
+          <a:prstGeom prst="rect">
+            <a:avLst/>
+          </a:prstGeom>
+          <a:noFill/>
+        </p:spPr>
+        <p:txBody>
+          <a:bodyPr wrap="square">
+            <a:spAutoFit/>
+          </a:bodyPr>
+          <a:lstStyle/>
+          <a:p>
+            <a:pPr algn="l">
+              <a:defRPr sz="1400" b="1">
+                <a:solidFill>
+                  <a:srgbClr val="1E8A4C"/>
+                </a:solidFill>
+              </a:defRPr>
+            </a:pPr>
+            <a:r>
+              <a:t>5</a:t>
+            </a:r>
+          </a:p>
+        </p:txBody>
+      </p:sp>
+      <p:sp>
+        <p:nvSpPr>
+          <p:cNvPr id="30" name="TextBox 29"/>
+          <p:cNvSpPr txBox="1"/>
+          <p:nvPr/>
+        </p:nvSpPr>
+        <p:spPr>
+          <a:xfrm>
+            <a:off x="960120" y="3502152"/>
+            <a:ext cx="5669280" cy="320040"/>
+          </a:xfrm>
+          <a:prstGeom prst="rect">
+            <a:avLst/>
+          </a:prstGeom>
+          <a:noFill/>
+        </p:spPr>
+        <p:txBody>
+          <a:bodyPr wrap="square">
+            <a:spAutoFit/>
+          </a:bodyPr>
+          <a:lstStyle/>
+          <a:p>
+            <a:pPr algn="l">
               <a:defRPr sz="1300" b="0">
                 <a:solidFill>
+                  <a:srgbClr val="222222"/>
+                </a:solidFill>
+              </a:defRPr>
+            </a:pPr>
+            <a:r>
+              <a:t>Mirror symmetry of centered array</a:t>
+            </a:r>
+          </a:p>
+        </p:txBody>
+      </p:sp>
+      <p:sp>
+        <p:nvSpPr>
+          <p:cNvPr id="31" name="TextBox 30"/>
+          <p:cNvSpPr txBox="1"/>
+          <p:nvPr/>
+        </p:nvSpPr>
+        <p:spPr>
+          <a:xfrm>
+            <a:off x="6720840" y="3502152"/>
+            <a:ext cx="2377440" cy="320040"/>
+          </a:xfrm>
+          <a:prstGeom prst="rect">
+            <a:avLst/>
+          </a:prstGeom>
+          <a:noFill/>
+        </p:spPr>
+        <p:txBody>
+          <a:bodyPr wrap="square">
+            <a:spAutoFit/>
+          </a:bodyPr>
+          <a:lstStyle/>
+          <a:p>
+            <a:pPr algn="l">
+              <a:defRPr sz="1200" b="0">
+                <a:solidFill>
                   <a:srgbClr val="666677"/>
                 </a:solidFill>
               </a:defRPr>
             </a:pPr>
             <a:r>
-              <a:t>  관측 기울기: -0.26</a:t>
-            </a:r>
-          </a:p>
-          <a:p>
-            <a:pPr algn="l">
-              <a:spcBef>
-                <a:spcPts val="400"/>
-              </a:spcBef>
-              <a:spcAft>
-                <a:spcPts val="200"/>
-              </a:spcAft>
-              <a:defRPr sz="1500" b="0">
+              <a:t>거울 대칭성</a:t>
+            </a:r>
+          </a:p>
+        </p:txBody>
+      </p:sp>
+      <p:sp>
+        <p:nvSpPr>
+          <p:cNvPr id="32" name="TextBox 31"/>
+          <p:cNvSpPr txBox="1"/>
+          <p:nvPr/>
+        </p:nvSpPr>
+        <p:spPr>
+          <a:xfrm>
+            <a:off x="9189720" y="3502152"/>
+            <a:ext cx="2834640" cy="320040"/>
+          </a:xfrm>
+          <a:prstGeom prst="rect">
+            <a:avLst/>
+          </a:prstGeom>
+          <a:noFill/>
+        </p:spPr>
+        <p:txBody>
+          <a:bodyPr wrap="square">
+            <a:spAutoFit/>
+          </a:bodyPr>
+          <a:lstStyle/>
+          <a:p>
+            <a:pPr algn="l">
+              <a:defRPr sz="1300" b="1">
+                <a:solidFill>
+                  <a:srgbClr val="1E8A4C"/>
+                </a:solidFill>
+              </a:defRPr>
+            </a:pPr>
+            <a:r>
+              <a:t>7×10⁻¹⁶</a:t>
+            </a:r>
+          </a:p>
+        </p:txBody>
+      </p:sp>
+      <p:sp>
+        <p:nvSpPr>
+          <p:cNvPr id="33" name="Rectangle 32"/>
+          <p:cNvSpPr/>
+          <p:nvPr/>
+        </p:nvSpPr>
+        <p:spPr>
+          <a:xfrm>
+            <a:off x="457200" y="3886200"/>
+            <a:ext cx="11612880" cy="411480"/>
+          </a:xfrm>
+          <a:prstGeom prst="rect">
+            <a:avLst/>
+          </a:prstGeom>
+          <a:solidFill>
+            <a:srgbClr val="FFFFFF"/>
+          </a:solidFill>
+          <a:ln w="6350">
+            <a:solidFill>
+              <a:srgbClr val="D0D8E0"/>
+            </a:solidFill>
+          </a:ln>
+        </p:spPr>
+        <p:style>
+          <a:lnRef idx="1">
+            <a:schemeClr val="accent1"/>
+          </a:lnRef>
+          <a:fillRef idx="3">
+            <a:schemeClr val="accent1"/>
+          </a:fillRef>
+          <a:effectRef idx="2">
+            <a:schemeClr val="accent1"/>
+          </a:effectRef>
+          <a:fontRef idx="minor">
+            <a:schemeClr val="lt1"/>
+          </a:fontRef>
+        </p:style>
+        <p:txBody>
+          <a:bodyPr rtlCol="0" anchor="ctr"/>
+          <a:lstStyle/>
+          <a:p>
+            <a:pPr algn="ctr"/>
+          </a:p>
+        </p:txBody>
+      </p:sp>
+      <p:sp>
+        <p:nvSpPr>
+          <p:cNvPr id="34" name="TextBox 33"/>
+          <p:cNvSpPr txBox="1"/>
+          <p:nvPr/>
+        </p:nvSpPr>
+        <p:spPr>
+          <a:xfrm>
+            <a:off x="502920" y="3931920"/>
+            <a:ext cx="365760" cy="320040"/>
+          </a:xfrm>
+          <a:prstGeom prst="rect">
+            <a:avLst/>
+          </a:prstGeom>
+          <a:noFill/>
+        </p:spPr>
+        <p:txBody>
+          <a:bodyPr wrap="square">
+            <a:spAutoFit/>
+          </a:bodyPr>
+          <a:lstStyle/>
+          <a:p>
+            <a:pPr algn="l">
+              <a:defRPr sz="1400" b="1">
+                <a:solidFill>
+                  <a:srgbClr val="1E8A4C"/>
+                </a:solidFill>
+              </a:defRPr>
+            </a:pPr>
+            <a:r>
+              <a:t>6</a:t>
+            </a:r>
+          </a:p>
+        </p:txBody>
+      </p:sp>
+      <p:sp>
+        <p:nvSpPr>
+          <p:cNvPr id="35" name="TextBox 34"/>
+          <p:cNvSpPr txBox="1"/>
+          <p:nvPr/>
+        </p:nvSpPr>
+        <p:spPr>
+          <a:xfrm>
+            <a:off x="960120" y="3931920"/>
+            <a:ext cx="5669280" cy="320040"/>
+          </a:xfrm>
+          <a:prstGeom prst="rect">
+            <a:avLst/>
+          </a:prstGeom>
+          <a:noFill/>
+        </p:spPr>
+        <p:txBody>
+          <a:bodyPr wrap="square">
+            <a:spAutoFit/>
+          </a:bodyPr>
+          <a:lstStyle/>
+          <a:p>
+            <a:pPr algn="l">
+              <a:defRPr sz="1300" b="0">
                 <a:solidFill>
                   <a:srgbClr val="222222"/>
                 </a:solidFill>
               </a:defRPr>
             </a:pPr>
             <a:r>
-              <a:t>• Theoretical (2D free-space Green): -0.5</a:t>
-            </a:r>
-          </a:p>
-          <a:p>
-            <a:pPr algn="l">
-              <a:spcBef>
-                <a:spcPts val="0"/>
-              </a:spcBef>
-              <a:spcAft>
-                <a:spcPts val="200"/>
-              </a:spcAft>
+              <a:t>Matrix reciprocity  A_ij = A_ji</a:t>
+            </a:r>
+          </a:p>
+        </p:txBody>
+      </p:sp>
+      <p:sp>
+        <p:nvSpPr>
+          <p:cNvPr id="36" name="TextBox 35"/>
+          <p:cNvSpPr txBox="1"/>
+          <p:nvPr/>
+        </p:nvSpPr>
+        <p:spPr>
+          <a:xfrm>
+            <a:off x="6720840" y="3931920"/>
+            <a:ext cx="2377440" cy="320040"/>
+          </a:xfrm>
+          <a:prstGeom prst="rect">
+            <a:avLst/>
+          </a:prstGeom>
+          <a:noFill/>
+        </p:spPr>
+        <p:txBody>
+          <a:bodyPr wrap="square">
+            <a:spAutoFit/>
+          </a:bodyPr>
+          <a:lstStyle/>
+          <a:p>
+            <a:pPr algn="l">
+              <a:defRPr sz="1200" b="0">
+                <a:solidFill>
+                  <a:srgbClr val="666677"/>
+                </a:solidFill>
+              </a:defRPr>
+            </a:pPr>
+            <a:r>
+              <a:t>행렬 호혜성</a:t>
+            </a:r>
+          </a:p>
+        </p:txBody>
+      </p:sp>
+      <p:sp>
+        <p:nvSpPr>
+          <p:cNvPr id="37" name="TextBox 36"/>
+          <p:cNvSpPr txBox="1"/>
+          <p:nvPr/>
+        </p:nvSpPr>
+        <p:spPr>
+          <a:xfrm>
+            <a:off x="9189720" y="3931920"/>
+            <a:ext cx="2834640" cy="320040"/>
+          </a:xfrm>
+          <a:prstGeom prst="rect">
+            <a:avLst/>
+          </a:prstGeom>
+          <a:noFill/>
+        </p:spPr>
+        <p:txBody>
+          <a:bodyPr wrap="square">
+            <a:spAutoFit/>
+          </a:bodyPr>
+          <a:lstStyle/>
+          <a:p>
+            <a:pPr algn="l">
+              <a:defRPr sz="1300" b="1">
+                <a:solidFill>
+                  <a:srgbClr val="1E8A4C"/>
+                </a:solidFill>
+              </a:defRPr>
+            </a:pPr>
+            <a:r>
+              <a:t>exact  0</a:t>
+            </a:r>
+          </a:p>
+        </p:txBody>
+      </p:sp>
+      <p:sp>
+        <p:nvSpPr>
+          <p:cNvPr id="38" name="Rectangle 37"/>
+          <p:cNvSpPr/>
+          <p:nvPr/>
+        </p:nvSpPr>
+        <p:spPr>
+          <a:xfrm>
+            <a:off x="457200" y="4315968"/>
+            <a:ext cx="11612880" cy="411480"/>
+          </a:xfrm>
+          <a:prstGeom prst="rect">
+            <a:avLst/>
+          </a:prstGeom>
+          <a:solidFill>
+            <a:srgbClr val="F8FAFD"/>
+          </a:solidFill>
+          <a:ln w="6350">
+            <a:solidFill>
+              <a:srgbClr val="D0D8E0"/>
+            </a:solidFill>
+          </a:ln>
+        </p:spPr>
+        <p:style>
+          <a:lnRef idx="1">
+            <a:schemeClr val="accent1"/>
+          </a:lnRef>
+          <a:fillRef idx="3">
+            <a:schemeClr val="accent1"/>
+          </a:fillRef>
+          <a:effectRef idx="2">
+            <a:schemeClr val="accent1"/>
+          </a:effectRef>
+          <a:fontRef idx="minor">
+            <a:schemeClr val="lt1"/>
+          </a:fontRef>
+        </p:style>
+        <p:txBody>
+          <a:bodyPr rtlCol="0" anchor="ctr"/>
+          <a:lstStyle/>
+          <a:p>
+            <a:pPr algn="ctr"/>
+          </a:p>
+        </p:txBody>
+      </p:sp>
+      <p:sp>
+        <p:nvSpPr>
+          <p:cNvPr id="39" name="TextBox 38"/>
+          <p:cNvSpPr txBox="1"/>
+          <p:nvPr/>
+        </p:nvSpPr>
+        <p:spPr>
+          <a:xfrm>
+            <a:off x="502920" y="4361688"/>
+            <a:ext cx="365760" cy="320040"/>
+          </a:xfrm>
+          <a:prstGeom prst="rect">
+            <a:avLst/>
+          </a:prstGeom>
+          <a:noFill/>
+        </p:spPr>
+        <p:txBody>
+          <a:bodyPr wrap="square">
+            <a:spAutoFit/>
+          </a:bodyPr>
+          <a:lstStyle/>
+          <a:p>
+            <a:pPr algn="l">
+              <a:defRPr sz="1400" b="1">
+                <a:solidFill>
+                  <a:srgbClr val="1E8A4C"/>
+                </a:solidFill>
+              </a:defRPr>
+            </a:pPr>
+            <a:r>
+              <a:t>7</a:t>
+            </a:r>
+          </a:p>
+        </p:txBody>
+      </p:sp>
+      <p:sp>
+        <p:nvSpPr>
+          <p:cNvPr id="40" name="TextBox 39"/>
+          <p:cNvSpPr txBox="1"/>
+          <p:nvPr/>
+        </p:nvSpPr>
+        <p:spPr>
+          <a:xfrm>
+            <a:off x="960120" y="4361688"/>
+            <a:ext cx="5669280" cy="320040"/>
+          </a:xfrm>
+          <a:prstGeom prst="rect">
+            <a:avLst/>
+          </a:prstGeom>
+          <a:noFill/>
+        </p:spPr>
+        <p:txBody>
+          <a:bodyPr wrap="square">
+            <a:spAutoFit/>
+          </a:bodyPr>
+          <a:lstStyle/>
+          <a:p>
+            <a:pPr algn="l">
               <a:defRPr sz="1300" b="0">
                 <a:solidFill>
+                  <a:srgbClr val="222222"/>
+                </a:solidFill>
+              </a:defRPr>
+            </a:pPr>
+            <a:r>
+              <a:t>Array-size convergence (2D lattice sum)</a:t>
+            </a:r>
+          </a:p>
+        </p:txBody>
+      </p:sp>
+      <p:sp>
+        <p:nvSpPr>
+          <p:cNvPr id="41" name="TextBox 40"/>
+          <p:cNvSpPr txBox="1"/>
+          <p:nvPr/>
+        </p:nvSpPr>
+        <p:spPr>
+          <a:xfrm>
+            <a:off x="6720840" y="4361688"/>
+            <a:ext cx="2377440" cy="320040"/>
+          </a:xfrm>
+          <a:prstGeom prst="rect">
+            <a:avLst/>
+          </a:prstGeom>
+          <a:noFill/>
+        </p:spPr>
+        <p:txBody>
+          <a:bodyPr wrap="square">
+            <a:spAutoFit/>
+          </a:bodyPr>
+          <a:lstStyle/>
+          <a:p>
+            <a:pPr algn="l">
+              <a:defRPr sz="1200" b="0">
+                <a:solidFill>
                   <a:srgbClr val="666677"/>
                 </a:solidFill>
               </a:defRPr>
             </a:pPr>
             <a:r>
-              <a:t>  이론값 (2D Green): -0.5</a:t>
-            </a:r>
-          </a:p>
-          <a:p>
-            <a:pPr algn="l">
-              <a:spcBef>
-                <a:spcPts val="400"/>
-              </a:spcBef>
-              <a:spcAft>
-                <a:spcPts val="200"/>
-              </a:spcAft>
-              <a:defRPr sz="600" b="0">
+              <a:t>배열 크기 수렴성</a:t>
+            </a:r>
+          </a:p>
+        </p:txBody>
+      </p:sp>
+      <p:sp>
+        <p:nvSpPr>
+          <p:cNvPr id="42" name="TextBox 41"/>
+          <p:cNvSpPr txBox="1"/>
+          <p:nvPr/>
+        </p:nvSpPr>
+        <p:spPr>
+          <a:xfrm>
+            <a:off x="9189720" y="4361688"/>
+            <a:ext cx="2834640" cy="320040"/>
+          </a:xfrm>
+          <a:prstGeom prst="rect">
+            <a:avLst/>
+          </a:prstGeom>
+          <a:noFill/>
+        </p:spPr>
+        <p:txBody>
+          <a:bodyPr wrap="square">
+            <a:spAutoFit/>
+          </a:bodyPr>
+          <a:lstStyle/>
+          <a:p>
+            <a:pPr algn="l">
+              <a:defRPr sz="1300" b="1">
+                <a:solidFill>
+                  <a:srgbClr val="1E8A4C"/>
+                </a:solidFill>
+              </a:defRPr>
+            </a:pPr>
+            <a:r>
+              <a:t>slope ≈ −0.26 ★</a:t>
+            </a:r>
+          </a:p>
+        </p:txBody>
+      </p:sp>
+      <p:sp>
+        <p:nvSpPr>
+          <p:cNvPr id="43" name="Rectangle 42"/>
+          <p:cNvSpPr/>
+          <p:nvPr/>
+        </p:nvSpPr>
+        <p:spPr>
+          <a:xfrm>
+            <a:off x="457200" y="4745736"/>
+            <a:ext cx="11612880" cy="411480"/>
+          </a:xfrm>
+          <a:prstGeom prst="rect">
+            <a:avLst/>
+          </a:prstGeom>
+          <a:solidFill>
+            <a:srgbClr val="FFFFFF"/>
+          </a:solidFill>
+          <a:ln w="6350">
+            <a:solidFill>
+              <a:srgbClr val="D0D8E0"/>
+            </a:solidFill>
+          </a:ln>
+        </p:spPr>
+        <p:style>
+          <a:lnRef idx="1">
+            <a:schemeClr val="accent1"/>
+          </a:lnRef>
+          <a:fillRef idx="3">
+            <a:schemeClr val="accent1"/>
+          </a:fillRef>
+          <a:effectRef idx="2">
+            <a:schemeClr val="accent1"/>
+          </a:effectRef>
+          <a:fontRef idx="minor">
+            <a:schemeClr val="lt1"/>
+          </a:fontRef>
+        </p:style>
+        <p:txBody>
+          <a:bodyPr rtlCol="0" anchor="ctr"/>
+          <a:lstStyle/>
+          <a:p>
+            <a:pPr algn="ctr"/>
+          </a:p>
+        </p:txBody>
+      </p:sp>
+      <p:sp>
+        <p:nvSpPr>
+          <p:cNvPr id="44" name="TextBox 43"/>
+          <p:cNvSpPr txBox="1"/>
+          <p:nvPr/>
+        </p:nvSpPr>
+        <p:spPr>
+          <a:xfrm>
+            <a:off x="502920" y="4791456"/>
+            <a:ext cx="365760" cy="320040"/>
+          </a:xfrm>
+          <a:prstGeom prst="rect">
+            <a:avLst/>
+          </a:prstGeom>
+          <a:noFill/>
+        </p:spPr>
+        <p:txBody>
+          <a:bodyPr wrap="square">
+            <a:spAutoFit/>
+          </a:bodyPr>
+          <a:lstStyle/>
+          <a:p>
+            <a:pPr algn="l">
+              <a:defRPr sz="1400" b="1">
+                <a:solidFill>
+                  <a:srgbClr val="1E8A4C"/>
+                </a:solidFill>
+              </a:defRPr>
+            </a:pPr>
+            <a:r>
+              <a:t>8</a:t>
+            </a:r>
+          </a:p>
+        </p:txBody>
+      </p:sp>
+      <p:sp>
+        <p:nvSpPr>
+          <p:cNvPr id="45" name="TextBox 44"/>
+          <p:cNvSpPr txBox="1"/>
+          <p:nvPr/>
+        </p:nvSpPr>
+        <p:spPr>
+          <a:xfrm>
+            <a:off x="960120" y="4791456"/>
+            <a:ext cx="5669280" cy="320040"/>
+          </a:xfrm>
+          <a:prstGeom prst="rect">
+            <a:avLst/>
+          </a:prstGeom>
+          <a:noFill/>
+        </p:spPr>
+        <p:txBody>
+          <a:bodyPr wrap="square">
+            <a:spAutoFit/>
+          </a:bodyPr>
+          <a:lstStyle/>
+          <a:p>
+            <a:pPr algn="l">
+              <a:defRPr sz="1300" b="0">
                 <a:solidFill>
                   <a:srgbClr val="222222"/>
                 </a:solidFill>
               </a:defRPr>
             </a:pPr>
-          </a:p>
-          <a:p>
-            <a:pPr algn="l">
-              <a:spcBef>
-                <a:spcPts val="1000"/>
-              </a:spcBef>
-              <a:spcAft>
-                <a:spcPts val="200"/>
-              </a:spcAft>
-              <a:defRPr sz="2000" b="1">
-                <a:solidFill>
-                  <a:srgbClr val="C0392B"/>
-                </a:solidFill>
-              </a:defRPr>
-            </a:pPr>
-            <a:r>
-              <a:t>Interpretation</a:t>
-            </a:r>
-          </a:p>
-          <a:p>
-            <a:pPr algn="l">
-              <a:spcBef>
-                <a:spcPts val="0"/>
-              </a:spcBef>
-              <a:spcAft>
-                <a:spcPts val="200"/>
-              </a:spcAft>
-              <a:defRPr sz="1400" b="0">
+            <a:r>
+              <a:t>Wavelength-scaling invariance</a:t>
+            </a:r>
+          </a:p>
+        </p:txBody>
+      </p:sp>
+      <p:sp>
+        <p:nvSpPr>
+          <p:cNvPr id="46" name="TextBox 45"/>
+          <p:cNvSpPr txBox="1"/>
+          <p:nvPr/>
+        </p:nvSpPr>
+        <p:spPr>
+          <a:xfrm>
+            <a:off x="6720840" y="4791456"/>
+            <a:ext cx="2377440" cy="320040"/>
+          </a:xfrm>
+          <a:prstGeom prst="rect">
+            <a:avLst/>
+          </a:prstGeom>
+          <a:noFill/>
+        </p:spPr>
+        <p:txBody>
+          <a:bodyPr wrap="square">
+            <a:spAutoFit/>
+          </a:bodyPr>
+          <a:lstStyle/>
+          <a:p>
+            <a:pPr algn="l">
+              <a:defRPr sz="1200" b="0">
                 <a:solidFill>
                   <a:srgbClr val="666677"/>
                 </a:solidFill>
               </a:defRPr>
             </a:pPr>
             <a:r>
-              <a:t>해석</a:t>
-            </a:r>
-          </a:p>
-          <a:p>
-            <a:pPr algn="l">
-              <a:spcBef>
-                <a:spcPts val="400"/>
-              </a:spcBef>
-              <a:spcAft>
-                <a:spcPts val="200"/>
-              </a:spcAft>
-              <a:defRPr sz="1500" b="0">
+              <a:t>파장 스케일링 불변성</a:t>
+            </a:r>
+          </a:p>
+        </p:txBody>
+      </p:sp>
+      <p:sp>
+        <p:nvSpPr>
+          <p:cNvPr id="47" name="TextBox 46"/>
+          <p:cNvSpPr txBox="1"/>
+          <p:nvPr/>
+        </p:nvSpPr>
+        <p:spPr>
+          <a:xfrm>
+            <a:off x="9189720" y="4791456"/>
+            <a:ext cx="2834640" cy="320040"/>
+          </a:xfrm>
+          <a:prstGeom prst="rect">
+            <a:avLst/>
+          </a:prstGeom>
+          <a:noFill/>
+        </p:spPr>
+        <p:txBody>
+          <a:bodyPr wrap="square">
+            <a:spAutoFit/>
+          </a:bodyPr>
+          <a:lstStyle/>
+          <a:p>
+            <a:pPr algn="l">
+              <a:defRPr sz="1300" b="1">
+                <a:solidFill>
+                  <a:srgbClr val="1E8A4C"/>
+                </a:solidFill>
+              </a:defRPr>
+            </a:pPr>
+            <a:r>
+              <a:t>exact  0</a:t>
+            </a:r>
+          </a:p>
+        </p:txBody>
+      </p:sp>
+      <p:sp>
+        <p:nvSpPr>
+          <p:cNvPr id="48" name="Rectangle 47"/>
+          <p:cNvSpPr/>
+          <p:nvPr/>
+        </p:nvSpPr>
+        <p:spPr>
+          <a:xfrm>
+            <a:off x="457200" y="5175504"/>
+            <a:ext cx="11612880" cy="411480"/>
+          </a:xfrm>
+          <a:prstGeom prst="rect">
+            <a:avLst/>
+          </a:prstGeom>
+          <a:solidFill>
+            <a:srgbClr val="F8FAFD"/>
+          </a:solidFill>
+          <a:ln w="6350">
+            <a:solidFill>
+              <a:srgbClr val="D0D8E0"/>
+            </a:solidFill>
+          </a:ln>
+        </p:spPr>
+        <p:style>
+          <a:lnRef idx="1">
+            <a:schemeClr val="accent1"/>
+          </a:lnRef>
+          <a:fillRef idx="3">
+            <a:schemeClr val="accent1"/>
+          </a:fillRef>
+          <a:effectRef idx="2">
+            <a:schemeClr val="accent1"/>
+          </a:effectRef>
+          <a:fontRef idx="minor">
+            <a:schemeClr val="lt1"/>
+          </a:fontRef>
+        </p:style>
+        <p:txBody>
+          <a:bodyPr rtlCol="0" anchor="ctr"/>
+          <a:lstStyle/>
+          <a:p>
+            <a:pPr algn="ctr"/>
+          </a:p>
+        </p:txBody>
+      </p:sp>
+      <p:sp>
+        <p:nvSpPr>
+          <p:cNvPr id="49" name="TextBox 48"/>
+          <p:cNvSpPr txBox="1"/>
+          <p:nvPr/>
+        </p:nvSpPr>
+        <p:spPr>
+          <a:xfrm>
+            <a:off x="502920" y="5221224"/>
+            <a:ext cx="365760" cy="320040"/>
+          </a:xfrm>
+          <a:prstGeom prst="rect">
+            <a:avLst/>
+          </a:prstGeom>
+          <a:noFill/>
+        </p:spPr>
+        <p:txBody>
+          <a:bodyPr wrap="square">
+            <a:spAutoFit/>
+          </a:bodyPr>
+          <a:lstStyle/>
+          <a:p>
+            <a:pPr algn="l">
+              <a:defRPr sz="1400" b="1">
+                <a:solidFill>
+                  <a:srgbClr val="1E8A4C"/>
+                </a:solidFill>
+              </a:defRPr>
+            </a:pPr>
+            <a:r>
+              <a:t>9</a:t>
+            </a:r>
+          </a:p>
+        </p:txBody>
+      </p:sp>
+      <p:sp>
+        <p:nvSpPr>
+          <p:cNvPr id="50" name="TextBox 49"/>
+          <p:cNvSpPr txBox="1"/>
+          <p:nvPr/>
+        </p:nvSpPr>
+        <p:spPr>
+          <a:xfrm>
+            <a:off x="960120" y="5221224"/>
+            <a:ext cx="5669280" cy="320040"/>
+          </a:xfrm>
+          <a:prstGeom prst="rect">
+            <a:avLst/>
+          </a:prstGeom>
+          <a:noFill/>
+        </p:spPr>
+        <p:txBody>
+          <a:bodyPr wrap="square">
+            <a:spAutoFit/>
+          </a:bodyPr>
+          <a:lstStyle/>
+          <a:p>
+            <a:pPr algn="l">
+              <a:defRPr sz="1300" b="0">
                 <a:solidFill>
                   <a:srgbClr val="222222"/>
                 </a:solidFill>
               </a:defRPr>
             </a:pPr>
             <a:r>
-              <a:t>• 2D free-space Green's function decays as 1/sqrt(r)</a:t>
-            </a:r>
-          </a:p>
-          <a:p>
-            <a:pPr algn="l">
-              <a:spcBef>
-                <a:spcPts val="0"/>
-              </a:spcBef>
-              <a:spcAft>
-                <a:spcPts val="200"/>
-              </a:spcAft>
+              <a:t>Extinction power positivity (optical theorem)</a:t>
+            </a:r>
+          </a:p>
+        </p:txBody>
+      </p:sp>
+      <p:sp>
+        <p:nvSpPr>
+          <p:cNvPr id="51" name="TextBox 50"/>
+          <p:cNvSpPr txBox="1"/>
+          <p:nvPr/>
+        </p:nvSpPr>
+        <p:spPr>
+          <a:xfrm>
+            <a:off x="6720840" y="5221224"/>
+            <a:ext cx="2377440" cy="320040"/>
+          </a:xfrm>
+          <a:prstGeom prst="rect">
+            <a:avLst/>
+          </a:prstGeom>
+          <a:noFill/>
+        </p:spPr>
+        <p:txBody>
+          <a:bodyPr wrap="square">
+            <a:spAutoFit/>
+          </a:bodyPr>
+          <a:lstStyle/>
+          <a:p>
+            <a:pPr algn="l">
+              <a:defRPr sz="1200" b="0">
+                <a:solidFill>
+                  <a:srgbClr val="666677"/>
+                </a:solidFill>
+              </a:defRPr>
+            </a:pPr>
+            <a:r>
+              <a:t>소광 전력 양성</a:t>
+            </a:r>
+          </a:p>
+        </p:txBody>
+      </p:sp>
+      <p:sp>
+        <p:nvSpPr>
+          <p:cNvPr id="52" name="TextBox 51"/>
+          <p:cNvSpPr txBox="1"/>
+          <p:nvPr/>
+        </p:nvSpPr>
+        <p:spPr>
+          <a:xfrm>
+            <a:off x="9189720" y="5221224"/>
+            <a:ext cx="2834640" cy="320040"/>
+          </a:xfrm>
+          <a:prstGeom prst="rect">
+            <a:avLst/>
+          </a:prstGeom>
+          <a:noFill/>
+        </p:spPr>
+        <p:txBody>
+          <a:bodyPr wrap="square">
+            <a:spAutoFit/>
+          </a:bodyPr>
+          <a:lstStyle/>
+          <a:p>
+            <a:pPr algn="l">
+              <a:defRPr sz="1300" b="1">
+                <a:solidFill>
+                  <a:srgbClr val="1E8A4C"/>
+                </a:solidFill>
+              </a:defRPr>
+            </a:pPr>
+            <a:r>
+              <a:t>all  P_ext &gt; 0</a:t>
+            </a:r>
+          </a:p>
+        </p:txBody>
+      </p:sp>
+      <p:sp>
+        <p:nvSpPr>
+          <p:cNvPr id="53" name="Rectangle 52"/>
+          <p:cNvSpPr/>
+          <p:nvPr/>
+        </p:nvSpPr>
+        <p:spPr>
+          <a:xfrm>
+            <a:off x="457200" y="5605272"/>
+            <a:ext cx="11612880" cy="411480"/>
+          </a:xfrm>
+          <a:prstGeom prst="rect">
+            <a:avLst/>
+          </a:prstGeom>
+          <a:solidFill>
+            <a:srgbClr val="FFFFFF"/>
+          </a:solidFill>
+          <a:ln w="6350">
+            <a:solidFill>
+              <a:srgbClr val="D0D8E0"/>
+            </a:solidFill>
+          </a:ln>
+        </p:spPr>
+        <p:style>
+          <a:lnRef idx="1">
+            <a:schemeClr val="accent1"/>
+          </a:lnRef>
+          <a:fillRef idx="3">
+            <a:schemeClr val="accent1"/>
+          </a:fillRef>
+          <a:effectRef idx="2">
+            <a:schemeClr val="accent1"/>
+          </a:effectRef>
+          <a:fontRef idx="minor">
+            <a:schemeClr val="lt1"/>
+          </a:fontRef>
+        </p:style>
+        <p:txBody>
+          <a:bodyPr rtlCol="0" anchor="ctr"/>
+          <a:lstStyle/>
+          <a:p>
+            <a:pPr algn="ctr"/>
+          </a:p>
+        </p:txBody>
+      </p:sp>
+      <p:sp>
+        <p:nvSpPr>
+          <p:cNvPr id="54" name="TextBox 53"/>
+          <p:cNvSpPr txBox="1"/>
+          <p:nvPr/>
+        </p:nvSpPr>
+        <p:spPr>
+          <a:xfrm>
+            <a:off x="502920" y="5650992"/>
+            <a:ext cx="365760" cy="320040"/>
+          </a:xfrm>
+          <a:prstGeom prst="rect">
+            <a:avLst/>
+          </a:prstGeom>
+          <a:noFill/>
+        </p:spPr>
+        <p:txBody>
+          <a:bodyPr wrap="square">
+            <a:spAutoFit/>
+          </a:bodyPr>
+          <a:lstStyle/>
+          <a:p>
+            <a:pPr algn="l">
+              <a:defRPr sz="1400" b="1">
+                <a:solidFill>
+                  <a:srgbClr val="1E8A4C"/>
+                </a:solidFill>
+              </a:defRPr>
+            </a:pPr>
+            <a:r>
+              <a:t>10</a:t>
+            </a:r>
+          </a:p>
+        </p:txBody>
+      </p:sp>
+      <p:sp>
+        <p:nvSpPr>
+          <p:cNvPr id="55" name="TextBox 54"/>
+          <p:cNvSpPr txBox="1"/>
+          <p:nvPr/>
+        </p:nvSpPr>
+        <p:spPr>
+          <a:xfrm>
+            <a:off x="960120" y="5650992"/>
+            <a:ext cx="5669280" cy="320040"/>
+          </a:xfrm>
+          <a:prstGeom prst="rect">
+            <a:avLst/>
+          </a:prstGeom>
+          <a:noFill/>
+        </p:spPr>
+        <p:txBody>
+          <a:bodyPr wrap="square">
+            <a:spAutoFit/>
+          </a:bodyPr>
+          <a:lstStyle/>
+          <a:p>
+            <a:pPr algn="l">
               <a:defRPr sz="1300" b="0">
                 <a:solidFill>
+                  <a:srgbClr val="222222"/>
+                </a:solidFill>
+              </a:defRPr>
+            </a:pPr>
+            <a:r>
+              <a:t>Non-uniform solver ⇒ uniform limit</a:t>
+            </a:r>
+          </a:p>
+        </p:txBody>
+      </p:sp>
+      <p:sp>
+        <p:nvSpPr>
+          <p:cNvPr id="56" name="TextBox 55"/>
+          <p:cNvSpPr txBox="1"/>
+          <p:nvPr/>
+        </p:nvSpPr>
+        <p:spPr>
+          <a:xfrm>
+            <a:off x="6720840" y="5650992"/>
+            <a:ext cx="2377440" cy="320040"/>
+          </a:xfrm>
+          <a:prstGeom prst="rect">
+            <a:avLst/>
+          </a:prstGeom>
+          <a:noFill/>
+        </p:spPr>
+        <p:txBody>
+          <a:bodyPr wrap="square">
+            <a:spAutoFit/>
+          </a:bodyPr>
+          <a:lstStyle/>
+          <a:p>
+            <a:pPr algn="l">
+              <a:defRPr sz="1200" b="0">
+                <a:solidFill>
                   <a:srgbClr val="666677"/>
                 </a:solidFill>
               </a:defRPr>
             </a:pPr>
             <a:r>
-              <a:t>  2D Green 함수는 1/√r로 감쇠</a:t>
-            </a:r>
-          </a:p>
-          <a:p>
-            <a:pPr algn="l">
-              <a:spcBef>
-                <a:spcPts val="400"/>
-              </a:spcBef>
-              <a:spcAft>
-                <a:spcPts val="200"/>
-              </a:spcAft>
-              <a:defRPr sz="1500" b="0">
-                <a:solidFill>
-                  <a:srgbClr val="222222"/>
-                </a:solidFill>
-              </a:defRPr>
-            </a:pPr>
-            <a:r>
-              <a:t>• 1D lattice sum is conditionally convergent, slow O(1/sqrt(N))</a:t>
-            </a:r>
-          </a:p>
-          <a:p>
-            <a:pPr algn="l">
-              <a:spcBef>
-                <a:spcPts val="0"/>
-              </a:spcBef>
-              <a:spcAft>
-                <a:spcPts val="200"/>
-              </a:spcAft>
-              <a:defRPr sz="1300" b="0">
-                <a:solidFill>
-                  <a:srgbClr val="666677"/>
-                </a:solidFill>
-              </a:defRPr>
-            </a:pPr>
-            <a:r>
-              <a:t>  1D 격자합은 조건부 수렴, O(1/√N)</a:t>
-            </a:r>
-          </a:p>
-          <a:p>
-            <a:pPr algn="l">
-              <a:spcBef>
-                <a:spcPts val="400"/>
-              </a:spcBef>
-              <a:spcAft>
-                <a:spcPts val="200"/>
-              </a:spcAft>
-              <a:defRPr sz="1500" b="0">
-                <a:solidFill>
-                  <a:srgbClr val="222222"/>
-                </a:solidFill>
-              </a:defRPr>
-            </a:pPr>
-            <a:r>
-              <a:t>• 3D would converge much faster (Green ~ 1/r)</a:t>
-            </a:r>
-          </a:p>
-          <a:p>
-            <a:pPr algn="l">
-              <a:spcBef>
-                <a:spcPts val="0"/>
-              </a:spcBef>
-              <a:spcAft>
-                <a:spcPts val="200"/>
-              </a:spcAft>
-              <a:defRPr sz="1300" b="0">
-                <a:solidFill>
-                  <a:srgbClr val="666677"/>
-                </a:solidFill>
-              </a:defRPr>
-            </a:pPr>
-            <a:r>
-              <a:t>  3D였다면 1/r로 훨씬 빠름</a:t>
-            </a:r>
-          </a:p>
-          <a:p>
-            <a:pPr algn="l">
-              <a:spcBef>
-                <a:spcPts val="400"/>
-              </a:spcBef>
-              <a:spcAft>
-                <a:spcPts val="200"/>
-              </a:spcAft>
-              <a:defRPr sz="1500" b="0">
-                <a:solidFill>
-                  <a:srgbClr val="222222"/>
-                </a:solidFill>
-              </a:defRPr>
-            </a:pPr>
-            <a:r>
-              <a:t>• Not a numerical error — it reflects genuine 2D physics</a:t>
-            </a:r>
-          </a:p>
-          <a:p>
-            <a:pPr algn="l">
-              <a:spcBef>
-                <a:spcPts val="0"/>
-              </a:spcBef>
-              <a:spcAft>
-                <a:spcPts val="200"/>
-              </a:spcAft>
-              <a:defRPr sz="1300" b="0">
-                <a:solidFill>
-                  <a:srgbClr val="666677"/>
-                </a:solidFill>
-              </a:defRPr>
-            </a:pPr>
-            <a:r>
-              <a:t>  수치 오류가 아니라 2D 물리의 본질</a:t>
-            </a:r>
-          </a:p>
-        </p:txBody>
-      </p:sp>
-      <p:pic>
-        <p:nvPicPr>
-          <p:cNvPr id="5" name="Picture 4" descr="verification_convergence.png"/>
-          <p:cNvPicPr>
-            <a:picLocks noChangeAspect="1"/>
-          </p:cNvPicPr>
-          <p:nvPr/>
-        </p:nvPicPr>
-        <p:blipFill>
-          <a:blip r:embed="rId2"/>
-          <a:stretch>
-            <a:fillRect/>
-          </a:stretch>
-        </p:blipFill>
-        <p:spPr>
-          <a:xfrm>
-            <a:off x="6126480" y="1371600"/>
-            <a:ext cx="5760720" cy="2016252"/>
-          </a:xfrm>
-          <a:prstGeom prst="rect">
-            <a:avLst/>
-          </a:prstGeom>
-        </p:spPr>
-      </p:pic>
+              <a:t>비균일→균일 극한</a:t>
+            </a:r>
+          </a:p>
+        </p:txBody>
+      </p:sp>
+      <p:sp>
+        <p:nvSpPr>
+          <p:cNvPr id="57" name="TextBox 56"/>
+          <p:cNvSpPr txBox="1"/>
+          <p:nvPr/>
+        </p:nvSpPr>
+        <p:spPr>
+          <a:xfrm>
+            <a:off x="9189720" y="5650992"/>
+            <a:ext cx="2834640" cy="320040"/>
+          </a:xfrm>
+          <a:prstGeom prst="rect">
+            <a:avLst/>
+          </a:prstGeom>
+          <a:noFill/>
+        </p:spPr>
+        <p:txBody>
+          <a:bodyPr wrap="square">
+            <a:spAutoFit/>
+          </a:bodyPr>
+          <a:lstStyle/>
+          <a:p>
+            <a:pPr algn="l">
+              <a:defRPr sz="1300" b="1">
+                <a:solidFill>
+                  <a:srgbClr val="1E8A4C"/>
+                </a:solidFill>
+              </a:defRPr>
+            </a:pPr>
+            <a:r>
+              <a:t>exact  0</a:t>
+            </a:r>
+          </a:p>
+        </p:txBody>
+      </p:sp>
     </p:spTree>
   </p:cSld>
   <p:clrMapOvr>
@@ -6737,7 +7198,7 @@
               </a:defRPr>
             </a:pPr>
             <a:r>
-              <a:t>5. Baseline Result</a:t>
+              <a:t>5. Key Physical Finding — Test 7</a:t>
             </a:r>
           </a:p>
         </p:txBody>
@@ -6772,7 +7233,7 @@
               </a:defRPr>
             </a:pPr>
             <a:r>
-              <a:t>베이스라인 결과</a:t>
+              <a:t>주목할 물리 — Test 7</a:t>
             </a:r>
           </a:p>
         </p:txBody>
@@ -6807,7 +7268,7 @@
               </a:defRPr>
             </a:pPr>
             <a:r>
-              <a:t>Setup</a:t>
+              <a:t>Observation</a:t>
             </a:r>
           </a:p>
           <a:p>
@@ -6825,7 +7286,7 @@
               </a:defRPr>
             </a:pPr>
             <a:r>
-              <a:t>설정</a:t>
+              <a:t>관측 결과</a:t>
             </a:r>
           </a:p>
           <a:p>
@@ -6836,14 +7297,14 @@
               <a:spcAft>
                 <a:spcPts val="200"/>
               </a:spcAft>
-              <a:defRPr sz="1600" b="0">
+              <a:defRPr sz="1500" b="0">
                 <a:solidFill>
                   <a:srgbClr val="222222"/>
                 </a:solidFill>
               </a:defRPr>
             </a:pPr>
             <a:r>
-              <a:t>• Uniform 1D array, N = 31</a:t>
+              <a:t>• Convergence rate of central-atom Δφ vs N</a:t>
             </a:r>
           </a:p>
           <a:p>
@@ -6854,6 +7315,129 @@
               <a:spcAft>
                 <a:spcPts val="200"/>
               </a:spcAft>
+              <a:defRPr sz="1300" b="0">
+                <a:solidFill>
+                  <a:srgbClr val="666677"/>
+                </a:solidFill>
+              </a:defRPr>
+            </a:pPr>
+            <a:r>
+              <a:t>  중심 원자 Δφ의 N에 따른 수렴 속도</a:t>
+            </a:r>
+          </a:p>
+          <a:p>
+            <a:pPr algn="l">
+              <a:spcBef>
+                <a:spcPts val="400"/>
+              </a:spcBef>
+              <a:spcAft>
+                <a:spcPts val="200"/>
+              </a:spcAft>
+              <a:defRPr sz="1500" b="0">
+                <a:solidFill>
+                  <a:srgbClr val="222222"/>
+                </a:solidFill>
+              </a:defRPr>
+            </a:pPr>
+            <a:r>
+              <a:t>• Observed slope: -0.26</a:t>
+            </a:r>
+          </a:p>
+          <a:p>
+            <a:pPr algn="l">
+              <a:spcBef>
+                <a:spcPts val="0"/>
+              </a:spcBef>
+              <a:spcAft>
+                <a:spcPts val="200"/>
+              </a:spcAft>
+              <a:defRPr sz="1300" b="0">
+                <a:solidFill>
+                  <a:srgbClr val="666677"/>
+                </a:solidFill>
+              </a:defRPr>
+            </a:pPr>
+            <a:r>
+              <a:t>  관측 기울기: -0.26</a:t>
+            </a:r>
+          </a:p>
+          <a:p>
+            <a:pPr algn="l">
+              <a:spcBef>
+                <a:spcPts val="400"/>
+              </a:spcBef>
+              <a:spcAft>
+                <a:spcPts val="200"/>
+              </a:spcAft>
+              <a:defRPr sz="1500" b="0">
+                <a:solidFill>
+                  <a:srgbClr val="222222"/>
+                </a:solidFill>
+              </a:defRPr>
+            </a:pPr>
+            <a:r>
+              <a:t>• Theoretical (2D free-space Green): -0.5</a:t>
+            </a:r>
+          </a:p>
+          <a:p>
+            <a:pPr algn="l">
+              <a:spcBef>
+                <a:spcPts val="0"/>
+              </a:spcBef>
+              <a:spcAft>
+                <a:spcPts val="200"/>
+              </a:spcAft>
+              <a:defRPr sz="1300" b="0">
+                <a:solidFill>
+                  <a:srgbClr val="666677"/>
+                </a:solidFill>
+              </a:defRPr>
+            </a:pPr>
+            <a:r>
+              <a:t>  이론값 (2D Green): -0.5</a:t>
+            </a:r>
+          </a:p>
+          <a:p>
+            <a:pPr algn="l">
+              <a:spcBef>
+                <a:spcPts val="400"/>
+              </a:spcBef>
+              <a:spcAft>
+                <a:spcPts val="200"/>
+              </a:spcAft>
+              <a:defRPr sz="600" b="0">
+                <a:solidFill>
+                  <a:srgbClr val="222222"/>
+                </a:solidFill>
+              </a:defRPr>
+            </a:pPr>
+          </a:p>
+          <a:p>
+            <a:pPr algn="l">
+              <a:spcBef>
+                <a:spcPts val="1000"/>
+              </a:spcBef>
+              <a:spcAft>
+                <a:spcPts val="200"/>
+              </a:spcAft>
+              <a:defRPr sz="2000" b="1">
+                <a:solidFill>
+                  <a:srgbClr val="C0392B"/>
+                </a:solidFill>
+              </a:defRPr>
+            </a:pPr>
+            <a:r>
+              <a:t>Interpretation</a:t>
+            </a:r>
+          </a:p>
+          <a:p>
+            <a:pPr algn="l">
+              <a:spcBef>
+                <a:spcPts val="0"/>
+              </a:spcBef>
+              <a:spcAft>
+                <a:spcPts val="200"/>
+              </a:spcAft>
               <a:defRPr sz="1400" b="0">
                 <a:solidFill>
                   <a:srgbClr val="666677"/>
@@ -6861,7 +7445,7 @@
               </a:defRPr>
             </a:pPr>
             <a:r>
-              <a:t>  1D 균일 배열, N = 31</a:t>
+              <a:t>해석</a:t>
             </a:r>
           </a:p>
           <a:p>
@@ -6872,14 +7456,14 @@
               <a:spcAft>
                 <a:spcPts val="200"/>
               </a:spcAft>
-              <a:defRPr sz="1600" b="0">
+              <a:defRPr sz="1500" b="0">
                 <a:solidFill>
                   <a:srgbClr val="222222"/>
                 </a:solidFill>
               </a:defRPr>
             </a:pPr>
             <a:r>
-              <a:t>• Period P = 0.6 λ (sub-wavelength)</a:t>
+              <a:t>• 2D free-space Green's function decays as 1/sqrt(r)</a:t>
             </a:r>
           </a:p>
           <a:p>
@@ -6890,14 +7474,14 @@
               <a:spcAft>
                 <a:spcPts val="200"/>
               </a:spcAft>
-              <a:defRPr sz="1400" b="0">
+              <a:defRPr sz="1300" b="0">
                 <a:solidFill>
                   <a:srgbClr val="666677"/>
                 </a:solidFill>
               </a:defRPr>
             </a:pPr>
             <a:r>
-              <a:t>  주기 P = 0.6 λ (서브파장)</a:t>
+              <a:t>  2D Green 함수는 1/√r로 감쇠</a:t>
             </a:r>
           </a:p>
           <a:p>
@@ -6908,14 +7492,14 @@
               <a:spcAft>
                 <a:spcPts val="200"/>
               </a:spcAft>
-              <a:defRPr sz="1600" b="0">
+              <a:defRPr sz="1500" b="0">
                 <a:solidFill>
                   <a:srgbClr val="222222"/>
                 </a:solidFill>
               </a:defRPr>
             </a:pPr>
             <a:r>
-              <a:t>• Normal-incidence plane wave</a:t>
+              <a:t>• 1D lattice sum is conditionally convergent, slow O(1/sqrt(N))</a:t>
             </a:r>
           </a:p>
           <a:p>
@@ -6926,14 +7510,14 @@
               <a:spcAft>
                 <a:spcPts val="200"/>
               </a:spcAft>
-              <a:defRPr sz="1400" b="0">
+              <a:defRPr sz="1300" b="0">
                 <a:solidFill>
                   <a:srgbClr val="666677"/>
                 </a:solidFill>
               </a:defRPr>
             </a:pPr>
             <a:r>
-              <a:t>  정상 입사 평면파</a:t>
+              <a:t>  1D 격자합은 조건부 수렴, O(1/√N)</a:t>
             </a:r>
           </a:p>
           <a:p>
@@ -6944,29 +7528,14 @@
               <a:spcAft>
                 <a:spcPts val="200"/>
               </a:spcAft>
-              <a:defRPr sz="600" b="0">
+              <a:defRPr sz="1500" b="0">
                 <a:solidFill>
                   <a:srgbClr val="222222"/>
                 </a:solidFill>
               </a:defRPr>
             </a:pPr>
-          </a:p>
-          <a:p>
-            <a:pPr algn="l">
-              <a:spcBef>
-                <a:spcPts val="1000"/>
-              </a:spcBef>
-              <a:spcAft>
-                <a:spcPts val="200"/>
-              </a:spcAft>
-              <a:defRPr sz="2000" b="1">
-                <a:solidFill>
-                  <a:srgbClr val="C0392B"/>
-                </a:solidFill>
-              </a:defRPr>
-            </a:pPr>
-            <a:r>
-              <a:t>Measured</a:t>
+            <a:r>
+              <a:t>• 3D would converge much faster (Green ~ 1/r)</a:t>
             </a:r>
           </a:p>
           <a:p>
@@ -6977,14 +7546,14 @@
               <a:spcAft>
                 <a:spcPts val="200"/>
               </a:spcAft>
-              <a:defRPr sz="1400" b="0">
+              <a:defRPr sz="1300" b="0">
                 <a:solidFill>
                   <a:srgbClr val="666677"/>
                 </a:solidFill>
               </a:defRPr>
             </a:pPr>
             <a:r>
-              <a:t>측정 결과</a:t>
+              <a:t>  3D였다면 1/r로 훨씬 빠름</a:t>
             </a:r>
           </a:p>
           <a:p>
@@ -6995,14 +7564,14 @@
               <a:spcAft>
                 <a:spcPts val="200"/>
               </a:spcAft>
-              <a:defRPr sz="1600" b="0">
+              <a:defRPr sz="1500" b="0">
                 <a:solidFill>
                   <a:srgbClr val="222222"/>
                 </a:solidFill>
               </a:defRPr>
             </a:pPr>
             <a:r>
-              <a:t>• Mean |Δφ| = 6.09°</a:t>
+              <a:t>• Not a numerical error — it reflects genuine 2D physics</a:t>
             </a:r>
           </a:p>
           <a:p>
@@ -7013,162 +7582,21 @@
               <a:spcAft>
                 <a:spcPts val="200"/>
               </a:spcAft>
-              <a:defRPr sz="1400" b="0">
+              <a:defRPr sz="1300" b="0">
                 <a:solidFill>
                   <a:srgbClr val="666677"/>
                 </a:solidFill>
               </a:defRPr>
             </a:pPr>
             <a:r>
-              <a:t>  평균 위상 편차 6.09°</a:t>
-            </a:r>
-          </a:p>
-          <a:p>
-            <a:pPr algn="l">
-              <a:spcBef>
-                <a:spcPts val="400"/>
-              </a:spcBef>
-              <a:spcAft>
-                <a:spcPts val="200"/>
-              </a:spcAft>
-              <a:defRPr sz="1600" b="0">
-                <a:solidFill>
-                  <a:srgbClr val="222222"/>
-                </a:solidFill>
-              </a:defRPr>
-            </a:pPr>
-            <a:r>
-              <a:t>• Max |Δφ| = 7.89°</a:t>
-            </a:r>
-          </a:p>
-          <a:p>
-            <a:pPr algn="l">
-              <a:spcBef>
-                <a:spcPts val="0"/>
-              </a:spcBef>
-              <a:spcAft>
-                <a:spcPts val="200"/>
-              </a:spcAft>
-              <a:defRPr sz="1400" b="0">
-                <a:solidFill>
-                  <a:srgbClr val="666677"/>
-                </a:solidFill>
-              </a:defRPr>
-            </a:pPr>
-            <a:r>
-              <a:t>  최대 편차 7.89°</a:t>
-            </a:r>
-          </a:p>
-          <a:p>
-            <a:pPr algn="l">
-              <a:spcBef>
-                <a:spcPts val="400"/>
-              </a:spcBef>
-              <a:spcAft>
-                <a:spcPts val="200"/>
-              </a:spcAft>
-              <a:defRPr sz="1600" b="0">
-                <a:solidFill>
-                  <a:srgbClr val="222222"/>
-                </a:solidFill>
-              </a:defRPr>
-            </a:pPr>
-            <a:r>
-              <a:t>• ADR range [0.979, 1.041]</a:t>
-            </a:r>
-          </a:p>
-          <a:p>
-            <a:pPr algn="l">
-              <a:spcBef>
-                <a:spcPts val="0"/>
-              </a:spcBef>
-              <a:spcAft>
-                <a:spcPts val="200"/>
-              </a:spcAft>
-              <a:defRPr sz="1400" b="0">
-                <a:solidFill>
-                  <a:srgbClr val="666677"/>
-                </a:solidFill>
-              </a:defRPr>
-            </a:pPr>
-            <a:r>
-              <a:t>  진폭 왜곡 비 [0.979, 1.041]</a:t>
-            </a:r>
-          </a:p>
-          <a:p>
-            <a:pPr algn="l">
-              <a:spcBef>
-                <a:spcPts val="400"/>
-              </a:spcBef>
-              <a:spcAft>
-                <a:spcPts val="200"/>
-              </a:spcAft>
-              <a:defRPr sz="600" b="0">
-                <a:solidFill>
-                  <a:srgbClr val="222222"/>
-                </a:solidFill>
-              </a:defRPr>
-            </a:pPr>
-          </a:p>
-          <a:p>
-            <a:pPr algn="l">
-              <a:spcBef>
-                <a:spcPts val="1000"/>
-              </a:spcBef>
-              <a:spcAft>
-                <a:spcPts val="200"/>
-              </a:spcAft>
-              <a:defRPr sz="2000" b="1">
-                <a:solidFill>
-                  <a:srgbClr val="1E8A4C"/>
-                </a:solidFill>
-              </a:defRPr>
-            </a:pPr>
-            <a:r>
-              <a:t>Conclusion</a:t>
-            </a:r>
-          </a:p>
-          <a:p>
-            <a:pPr algn="l">
-              <a:spcBef>
-                <a:spcPts val="400"/>
-              </a:spcBef>
-              <a:spcAft>
-                <a:spcPts val="200"/>
-              </a:spcAft>
-              <a:defRPr sz="1600" b="0">
-                <a:solidFill>
-                  <a:srgbClr val="222222"/>
-                </a:solidFill>
-              </a:defRPr>
-            </a:pPr>
-            <a:r>
-              <a:t>• Coupling is real, measurable, non-negligible</a:t>
-            </a:r>
-          </a:p>
-          <a:p>
-            <a:pPr algn="l">
-              <a:spcBef>
-                <a:spcPts val="0"/>
-              </a:spcBef>
-              <a:spcAft>
-                <a:spcPts val="200"/>
-              </a:spcAft>
-              <a:defRPr sz="1400" b="0">
-                <a:solidFill>
-                  <a:srgbClr val="666677"/>
-                </a:solidFill>
-              </a:defRPr>
-            </a:pPr>
-            <a:r>
-              <a:t>  커플링은 실제로 측정 가능한 수준</a:t>
+              <a:t>  수치 오류가 아니라 2D 물리의 본질</a:t>
             </a:r>
           </a:p>
         </p:txBody>
       </p:sp>
       <p:pic>
         <p:nvPicPr>
-          <p:cNvPr id="5" name="Picture 4" descr="baseline_uniform_array.png"/>
+          <p:cNvPr id="5" name="Picture 4" descr="verification_convergence.png"/>
           <p:cNvPicPr>
             <a:picLocks noChangeAspect="1"/>
           </p:cNvPicPr>
@@ -7246,7 +7674,7 @@
               </a:defRPr>
             </a:pPr>
             <a:r>
-              <a:t>6. First Scan — Period Sweep</a:t>
+              <a:t>6. Baseline Result</a:t>
             </a:r>
           </a:p>
         </p:txBody>
@@ -7281,7 +7709,7 @@
               </a:defRPr>
             </a:pPr>
             <a:r>
-              <a:t>첫 스윕 결과 — 주기 스윕</a:t>
+              <a:t>베이스라인 결과</a:t>
             </a:r>
           </a:p>
         </p:txBody>
@@ -7316,7 +7744,7 @@
               </a:defRPr>
             </a:pPr>
             <a:r>
-              <a:t>Uniform vs non-uniform</a:t>
+              <a:t>Setup</a:t>
             </a:r>
           </a:p>
           <a:p>
@@ -7334,7 +7762,7 @@
               </a:defRPr>
             </a:pPr>
             <a:r>
-              <a:t>균일 vs 비균일</a:t>
+              <a:t>설정</a:t>
             </a:r>
           </a:p>
           <a:p>
@@ -7345,14 +7773,32 @@
               <a:spcAft>
                 <a:spcPts val="200"/>
               </a:spcAft>
-              <a:defRPr sz="1500" b="1">
-                <a:solidFill>
-                  <a:srgbClr val="2E6BB0"/>
-                </a:solidFill>
-              </a:defRPr>
-            </a:pPr>
-            <a:r>
-              <a:t>       P/λ      Uniform      Non-uniform</a:t>
+              <a:defRPr sz="1600" b="0">
+                <a:solidFill>
+                  <a:srgbClr val="222222"/>
+                </a:solidFill>
+              </a:defRPr>
+            </a:pPr>
+            <a:r>
+              <a:t>• Uniform 1D array, N = 31</a:t>
+            </a:r>
+          </a:p>
+          <a:p>
+            <a:pPr algn="l">
+              <a:spcBef>
+                <a:spcPts val="0"/>
+              </a:spcBef>
+              <a:spcAft>
+                <a:spcPts val="200"/>
+              </a:spcAft>
+              <a:defRPr sz="1400" b="0">
+                <a:solidFill>
+                  <a:srgbClr val="666677"/>
+                </a:solidFill>
+              </a:defRPr>
+            </a:pPr>
+            <a:r>
+              <a:t>  1D 균일 배열, N = 31</a:t>
             </a:r>
           </a:p>
           <a:p>
@@ -7363,14 +7809,32 @@
               <a:spcAft>
                 <a:spcPts val="200"/>
               </a:spcAft>
-              <a:defRPr sz="1500" b="0">
+              <a:defRPr sz="1600" b="0">
                 <a:solidFill>
                   <a:srgbClr val="222222"/>
                 </a:solidFill>
               </a:defRPr>
             </a:pPr>
             <a:r>
-              <a:t>       0.5         5.8°             6.6°</a:t>
+              <a:t>• Period P = 0.6 λ (sub-wavelength)</a:t>
+            </a:r>
+          </a:p>
+          <a:p>
+            <a:pPr algn="l">
+              <a:spcBef>
+                <a:spcPts val="0"/>
+              </a:spcBef>
+              <a:spcAft>
+                <a:spcPts val="200"/>
+              </a:spcAft>
+              <a:defRPr sz="1400" b="0">
+                <a:solidFill>
+                  <a:srgbClr val="666677"/>
+                </a:solidFill>
+              </a:defRPr>
+            </a:pPr>
+            <a:r>
+              <a:t>  주기 P = 0.6 λ (서브파장)</a:t>
             </a:r>
           </a:p>
           <a:p>
@@ -7381,14 +7845,32 @@
               <a:spcAft>
                 <a:spcPts val="200"/>
               </a:spcAft>
-              <a:defRPr sz="1500" b="1">
+              <a:defRPr sz="1600" b="0">
                 <a:solidFill>
                   <a:srgbClr val="222222"/>
                 </a:solidFill>
               </a:defRPr>
             </a:pPr>
             <a:r>
-              <a:t>       1.0        27.0°            22.4°</a:t>
+              <a:t>• Normal-incidence plane wave</a:t>
+            </a:r>
+          </a:p>
+          <a:p>
+            <a:pPr algn="l">
+              <a:spcBef>
+                <a:spcPts val="0"/>
+              </a:spcBef>
+              <a:spcAft>
+                <a:spcPts val="200"/>
+              </a:spcAft>
+              <a:defRPr sz="1400" b="0">
+                <a:solidFill>
+                  <a:srgbClr val="666677"/>
+                </a:solidFill>
+              </a:defRPr>
+            </a:pPr>
+            <a:r>
+              <a:t>  정상 입사 평면파</a:t>
             </a:r>
           </a:p>
           <a:p>
@@ -7399,14 +7881,47 @@
               <a:spcAft>
                 <a:spcPts val="200"/>
               </a:spcAft>
-              <a:defRPr sz="1500" b="0">
+              <a:defRPr sz="600" b="0">
                 <a:solidFill>
                   <a:srgbClr val="222222"/>
                 </a:solidFill>
               </a:defRPr>
             </a:pPr>
-            <a:r>
-              <a:t>       1.5         3.4°             3.8°</a:t>
+          </a:p>
+          <a:p>
+            <a:pPr algn="l">
+              <a:spcBef>
+                <a:spcPts val="1000"/>
+              </a:spcBef>
+              <a:spcAft>
+                <a:spcPts val="200"/>
+              </a:spcAft>
+              <a:defRPr sz="2000" b="1">
+                <a:solidFill>
+                  <a:srgbClr val="C0392B"/>
+                </a:solidFill>
+              </a:defRPr>
+            </a:pPr>
+            <a:r>
+              <a:t>Measured</a:t>
+            </a:r>
+          </a:p>
+          <a:p>
+            <a:pPr algn="l">
+              <a:spcBef>
+                <a:spcPts val="0"/>
+              </a:spcBef>
+              <a:spcAft>
+                <a:spcPts val="200"/>
+              </a:spcAft>
+              <a:defRPr sz="1400" b="0">
+                <a:solidFill>
+                  <a:srgbClr val="666677"/>
+                </a:solidFill>
+              </a:defRPr>
+            </a:pPr>
+            <a:r>
+              <a:t>측정 결과</a:t>
             </a:r>
           </a:p>
           <a:p>
@@ -7417,14 +7932,32 @@
               <a:spcAft>
                 <a:spcPts val="200"/>
               </a:spcAft>
-              <a:defRPr sz="1500" b="1">
+              <a:defRPr sz="1600" b="0">
                 <a:solidFill>
                   <a:srgbClr val="222222"/>
                 </a:solidFill>
               </a:defRPr>
             </a:pPr>
             <a:r>
-              <a:t>       2.0        14.1°            18.3°</a:t>
+              <a:t>• Mean |Δφ| = 6.09°</a:t>
+            </a:r>
+          </a:p>
+          <a:p>
+            <a:pPr algn="l">
+              <a:spcBef>
+                <a:spcPts val="0"/>
+              </a:spcBef>
+              <a:spcAft>
+                <a:spcPts val="200"/>
+              </a:spcAft>
+              <a:defRPr sz="1400" b="0">
+                <a:solidFill>
+                  <a:srgbClr val="666677"/>
+                </a:solidFill>
+              </a:defRPr>
+            </a:pPr>
+            <a:r>
+              <a:t>  평균 위상 편차 6.09°</a:t>
             </a:r>
           </a:p>
           <a:p>
@@ -7435,14 +7968,32 @@
               <a:spcAft>
                 <a:spcPts val="200"/>
               </a:spcAft>
-              <a:defRPr sz="1500" b="1">
+              <a:defRPr sz="1600" b="0">
                 <a:solidFill>
                   <a:srgbClr val="222222"/>
                 </a:solidFill>
               </a:defRPr>
             </a:pPr>
             <a:r>
-              <a:t>       3.0        20.9°            19.8°</a:t>
+              <a:t>• Max |Δφ| = 7.89°</a:t>
+            </a:r>
+          </a:p>
+          <a:p>
+            <a:pPr algn="l">
+              <a:spcBef>
+                <a:spcPts val="0"/>
+              </a:spcBef>
+              <a:spcAft>
+                <a:spcPts val="200"/>
+              </a:spcAft>
+              <a:defRPr sz="1400" b="0">
+                <a:solidFill>
+                  <a:srgbClr val="666677"/>
+                </a:solidFill>
+              </a:defRPr>
+            </a:pPr>
+            <a:r>
+              <a:t>  최대 편차 7.89°</a:t>
             </a:r>
           </a:p>
           <a:p>
@@ -7453,6 +8004,42 @@
               <a:spcAft>
                 <a:spcPts val="200"/>
               </a:spcAft>
+              <a:defRPr sz="1600" b="0">
+                <a:solidFill>
+                  <a:srgbClr val="222222"/>
+                </a:solidFill>
+              </a:defRPr>
+            </a:pPr>
+            <a:r>
+              <a:t>• ADR range [0.979, 1.041]</a:t>
+            </a:r>
+          </a:p>
+          <a:p>
+            <a:pPr algn="l">
+              <a:spcBef>
+                <a:spcPts val="0"/>
+              </a:spcBef>
+              <a:spcAft>
+                <a:spcPts val="200"/>
+              </a:spcAft>
+              <a:defRPr sz="1400" b="0">
+                <a:solidFill>
+                  <a:srgbClr val="666677"/>
+                </a:solidFill>
+              </a:defRPr>
+            </a:pPr>
+            <a:r>
+              <a:t>  진폭 왜곡 비 [0.979, 1.041]</a:t>
+            </a:r>
+          </a:p>
+          <a:p>
+            <a:pPr algn="l">
+              <a:spcBef>
+                <a:spcPts val="400"/>
+              </a:spcBef>
+              <a:spcAft>
+                <a:spcPts val="200"/>
+              </a:spcAft>
               <a:defRPr sz="600" b="0">
                 <a:solidFill>
                   <a:srgbClr val="222222"/>
@@ -7470,12 +8057,30 @@
               </a:spcAft>
               <a:defRPr sz="2000" b="1">
                 <a:solidFill>
-                  <a:srgbClr val="C0392B"/>
-                </a:solidFill>
-              </a:defRPr>
-            </a:pPr>
-            <a:r>
-              <a:t>Key observation</a:t>
+                  <a:srgbClr val="1E8A4C"/>
+                </a:solidFill>
+              </a:defRPr>
+            </a:pPr>
+            <a:r>
+              <a:t>Conclusion</a:t>
+            </a:r>
+          </a:p>
+          <a:p>
+            <a:pPr algn="l">
+              <a:spcBef>
+                <a:spcPts val="400"/>
+              </a:spcBef>
+              <a:spcAft>
+                <a:spcPts val="200"/>
+              </a:spcAft>
+              <a:defRPr sz="1600" b="0">
+                <a:solidFill>
+                  <a:srgbClr val="222222"/>
+                </a:solidFill>
+              </a:defRPr>
+            </a:pPr>
+            <a:r>
+              <a:t>• Coupling is real, measurable, non-negligible</a:t>
             </a:r>
           </a:p>
           <a:p>
@@ -7493,122 +8098,14 @@
               </a:defRPr>
             </a:pPr>
             <a:r>
-              <a:t>핵심 관찰</a:t>
-            </a:r>
-          </a:p>
-          <a:p>
-            <a:pPr algn="l">
-              <a:spcBef>
-                <a:spcPts val="400"/>
-              </a:spcBef>
-              <a:spcAft>
-                <a:spcPts val="200"/>
-              </a:spcAft>
-              <a:defRPr sz="1600" b="0">
-                <a:solidFill>
-                  <a:srgbClr val="222222"/>
-                </a:solidFill>
-              </a:defRPr>
-            </a:pPr>
-            <a:r>
-              <a:t>• Sharp peaks at P = m · λ  (m ∈ ℤ)</a:t>
-            </a:r>
-          </a:p>
-          <a:p>
-            <a:pPr algn="l">
-              <a:spcBef>
-                <a:spcPts val="0"/>
-              </a:spcBef>
-              <a:spcAft>
-                <a:spcPts val="200"/>
-              </a:spcAft>
-              <a:defRPr sz="1400" b="0">
-                <a:solidFill>
-                  <a:srgbClr val="666677"/>
-                </a:solidFill>
-              </a:defRPr>
-            </a:pPr>
-            <a:r>
-              <a:t>  파장의 정수배 주기에서 급격한 피크</a:t>
-            </a:r>
-          </a:p>
-          <a:p>
-            <a:pPr algn="l">
-              <a:spcBef>
-                <a:spcPts val="400"/>
-              </a:spcBef>
-              <a:spcAft>
-                <a:spcPts val="200"/>
-              </a:spcAft>
-              <a:defRPr sz="1600" b="0">
-                <a:solidFill>
-                  <a:srgbClr val="222222"/>
-                </a:solidFill>
-              </a:defRPr>
-            </a:pPr>
-            <a:r>
-              <a:t>• Wood anomaly / lattice resonance</a:t>
-            </a:r>
-          </a:p>
-          <a:p>
-            <a:pPr algn="l">
-              <a:spcBef>
-                <a:spcPts val="0"/>
-              </a:spcBef>
-              <a:spcAft>
-                <a:spcPts val="200"/>
-              </a:spcAft>
-              <a:defRPr sz="1400" b="0">
-                <a:solidFill>
-                  <a:srgbClr val="666677"/>
-                </a:solidFill>
-              </a:defRPr>
-            </a:pPr>
-            <a:r>
-              <a:t>  Wood anomaly, 격자 공명</a:t>
-            </a:r>
-          </a:p>
-          <a:p>
-            <a:pPr algn="l">
-              <a:spcBef>
-                <a:spcPts val="400"/>
-              </a:spcBef>
-              <a:spcAft>
-                <a:spcPts val="200"/>
-              </a:spcAft>
-              <a:defRPr sz="1600" b="0">
-                <a:solidFill>
-                  <a:srgbClr val="222222"/>
-                </a:solidFill>
-              </a:defRPr>
-            </a:pPr>
-            <a:r>
-              <a:t>• Coincides with diffraction-order onset</a:t>
-            </a:r>
-          </a:p>
-          <a:p>
-            <a:pPr algn="l">
-              <a:spcBef>
-                <a:spcPts val="0"/>
-              </a:spcBef>
-              <a:spcAft>
-                <a:spcPts val="200"/>
-              </a:spcAft>
-              <a:defRPr sz="1400" b="0">
-                <a:solidFill>
-                  <a:srgbClr val="666677"/>
-                </a:solidFill>
-              </a:defRPr>
-            </a:pPr>
-            <a:r>
-              <a:t>  회절 차수 개시 조건과 일치</a:t>
+              <a:t>  커플링은 실제로 측정 가능한 수준</a:t>
             </a:r>
           </a:p>
         </p:txBody>
       </p:sp>
       <p:pic>
         <p:nvPicPr>
-          <p:cNvPr id="5" name="Picture 4" descr="period_sweep_comparison.png"/>
+          <p:cNvPr id="5" name="Picture 4" descr="baseline_uniform_array.png"/>
           <p:cNvPicPr>
             <a:picLocks noChangeAspect="1"/>
           </p:cNvPicPr>
@@ -7623,7 +8120,7 @@
         <p:spPr>
           <a:xfrm>
             <a:off x="6126480" y="1371600"/>
-            <a:ext cx="5760720" cy="3240405"/>
+            <a:ext cx="5760720" cy="2016252"/>
           </a:xfrm>
           <a:prstGeom prst="rect">
             <a:avLst/>
@@ -7686,7 +8183,7 @@
               </a:defRPr>
             </a:pPr>
             <a:r>
-              <a:t>7. Main Difficulties</a:t>
+              <a:t>7. First Scan — Period Sweep</a:t>
             </a:r>
           </a:p>
         </p:txBody>
@@ -7721,53 +8218,34 @@
               </a:defRPr>
             </a:pPr>
             <a:r>
-              <a:t>현재 주요 어려움</a:t>
-            </a:r>
-          </a:p>
-        </p:txBody>
-      </p:sp>
-      <p:sp>
-        <p:nvSpPr>
-          <p:cNvPr id="4" name="Rectangle 3"/>
-          <p:cNvSpPr/>
-          <p:nvPr/>
-        </p:nvSpPr>
-        <p:spPr>
-          <a:xfrm>
-            <a:off x="731520" y="1463040"/>
-            <a:ext cx="5120640" cy="4754880"/>
-          </a:xfrm>
-          <a:prstGeom prst="rect">
-            <a:avLst/>
-          </a:prstGeom>
-          <a:solidFill>
-            <a:srgbClr val="F0F4FA"/>
-          </a:solidFill>
-          <a:ln w="19050">
-            <a:solidFill>
-              <a:srgbClr val="C0392B"/>
-            </a:solidFill>
-          </a:ln>
-        </p:spPr>
-        <p:style>
-          <a:lnRef idx="1">
-            <a:schemeClr val="accent1"/>
-          </a:lnRef>
-          <a:fillRef idx="3">
-            <a:schemeClr val="accent1"/>
-          </a:fillRef>
-          <a:effectRef idx="2">
-            <a:schemeClr val="accent1"/>
-          </a:effectRef>
-          <a:fontRef idx="minor">
-            <a:schemeClr val="lt1"/>
-          </a:fontRef>
-        </p:style>
-        <p:txBody>
-          <a:bodyPr rtlCol="0" anchor="ctr" wrap="square"/>
-          <a:lstStyle/>
-          <a:p>
-            <a:pPr algn="ctr">
+              <a:t>첫 스윕 결과 — 주기 스윕</a:t>
+            </a:r>
+          </a:p>
+        </p:txBody>
+      </p:sp>
+      <p:sp>
+        <p:nvSpPr>
+          <p:cNvPr id="4" name="TextBox 3"/>
+          <p:cNvSpPr txBox="1"/>
+          <p:nvPr/>
+        </p:nvSpPr>
+        <p:spPr>
+          <a:xfrm>
+            <a:off x="548640" y="1417320"/>
+            <a:ext cx="5303520" cy="5029200"/>
+          </a:xfrm>
+          <a:prstGeom prst="rect">
+            <a:avLst/>
+          </a:prstGeom>
+          <a:noFill/>
+        </p:spPr>
+        <p:txBody>
+          <a:bodyPr wrap="square">
+            <a:spAutoFit/>
+          </a:bodyPr>
+          <a:lstStyle/>
+          <a:p>
+            <a:pPr algn="l">
               <a:defRPr sz="2000" b="1">
                 <a:solidFill>
                   <a:srgbClr val="C0392B"/>
@@ -7775,25 +8253,184 @@
               </a:defRPr>
             </a:pPr>
             <a:r>
-              <a:t>(a) Lattice-resonance divergence</a:t>
-            </a:r>
-          </a:p>
-          <a:p>
-            <a:pPr algn="ctr">
+              <a:t>Uniform vs non-uniform</a:t>
+            </a:r>
+          </a:p>
+          <a:p>
+            <a:pPr algn="l">
               <a:spcBef>
                 <a:spcPts val="0"/>
               </a:spcBef>
               <a:spcAft>
                 <a:spcPts val="200"/>
               </a:spcAft>
+              <a:defRPr sz="1400" b="0">
+                <a:solidFill>
+                  <a:srgbClr val="666677"/>
+                </a:solidFill>
+              </a:defRPr>
+            </a:pPr>
+            <a:r>
+              <a:t>균일 vs 비균일</a:t>
+            </a:r>
+          </a:p>
+          <a:p>
+            <a:pPr algn="l">
+              <a:spcBef>
+                <a:spcPts val="400"/>
+              </a:spcBef>
+              <a:spcAft>
+                <a:spcPts val="200"/>
+              </a:spcAft>
+              <a:defRPr sz="1500" b="1">
+                <a:solidFill>
+                  <a:srgbClr val="2E6BB0"/>
+                </a:solidFill>
+              </a:defRPr>
+            </a:pPr>
+            <a:r>
+              <a:t>       P/λ      Uniform      Non-uniform</a:t>
+            </a:r>
+          </a:p>
+          <a:p>
+            <a:pPr algn="l">
+              <a:spcBef>
+                <a:spcPts val="400"/>
+              </a:spcBef>
+              <a:spcAft>
+                <a:spcPts val="200"/>
+              </a:spcAft>
               <a:defRPr sz="1500" b="0">
                 <a:solidFill>
+                  <a:srgbClr val="222222"/>
+                </a:solidFill>
+              </a:defRPr>
+            </a:pPr>
+            <a:r>
+              <a:t>       0.5         5.8°             6.6°</a:t>
+            </a:r>
+          </a:p>
+          <a:p>
+            <a:pPr algn="l">
+              <a:spcBef>
+                <a:spcPts val="400"/>
+              </a:spcBef>
+              <a:spcAft>
+                <a:spcPts val="200"/>
+              </a:spcAft>
+              <a:defRPr sz="1500" b="1">
+                <a:solidFill>
+                  <a:srgbClr val="222222"/>
+                </a:solidFill>
+              </a:defRPr>
+            </a:pPr>
+            <a:r>
+              <a:t>       1.0        27.0°            22.4°</a:t>
+            </a:r>
+          </a:p>
+          <a:p>
+            <a:pPr algn="l">
+              <a:spcBef>
+                <a:spcPts val="400"/>
+              </a:spcBef>
+              <a:spcAft>
+                <a:spcPts val="200"/>
+              </a:spcAft>
+              <a:defRPr sz="1500" b="0">
+                <a:solidFill>
+                  <a:srgbClr val="222222"/>
+                </a:solidFill>
+              </a:defRPr>
+            </a:pPr>
+            <a:r>
+              <a:t>       1.5         3.4°             3.8°</a:t>
+            </a:r>
+          </a:p>
+          <a:p>
+            <a:pPr algn="l">
+              <a:spcBef>
+                <a:spcPts val="400"/>
+              </a:spcBef>
+              <a:spcAft>
+                <a:spcPts val="200"/>
+              </a:spcAft>
+              <a:defRPr sz="1500" b="1">
+                <a:solidFill>
+                  <a:srgbClr val="222222"/>
+                </a:solidFill>
+              </a:defRPr>
+            </a:pPr>
+            <a:r>
+              <a:t>       2.0        14.1°            18.3°</a:t>
+            </a:r>
+          </a:p>
+          <a:p>
+            <a:pPr algn="l">
+              <a:spcBef>
+                <a:spcPts val="400"/>
+              </a:spcBef>
+              <a:spcAft>
+                <a:spcPts val="200"/>
+              </a:spcAft>
+              <a:defRPr sz="1500" b="1">
+                <a:solidFill>
+                  <a:srgbClr val="222222"/>
+                </a:solidFill>
+              </a:defRPr>
+            </a:pPr>
+            <a:r>
+              <a:t>       3.0        20.9°            19.8°</a:t>
+            </a:r>
+          </a:p>
+          <a:p>
+            <a:pPr algn="l">
+              <a:spcBef>
+                <a:spcPts val="400"/>
+              </a:spcBef>
+              <a:spcAft>
+                <a:spcPts val="200"/>
+              </a:spcAft>
+              <a:defRPr sz="600" b="0">
+                <a:solidFill>
+                  <a:srgbClr val="222222"/>
+                </a:solidFill>
+              </a:defRPr>
+            </a:pPr>
+          </a:p>
+          <a:p>
+            <a:pPr algn="l">
+              <a:spcBef>
+                <a:spcPts val="1000"/>
+              </a:spcBef>
+              <a:spcAft>
+                <a:spcPts val="200"/>
+              </a:spcAft>
+              <a:defRPr sz="2000" b="1">
+                <a:solidFill>
+                  <a:srgbClr val="C0392B"/>
+                </a:solidFill>
+              </a:defRPr>
+            </a:pPr>
+            <a:r>
+              <a:t>Key observation</a:t>
+            </a:r>
+          </a:p>
+          <a:p>
+            <a:pPr algn="l">
+              <a:spcBef>
+                <a:spcPts val="0"/>
+              </a:spcBef>
+              <a:spcAft>
+                <a:spcPts val="200"/>
+              </a:spcAft>
+              <a:defRPr sz="1400" b="0">
+                <a:solidFill>
                   <a:srgbClr val="666677"/>
                 </a:solidFill>
               </a:defRPr>
             </a:pPr>
             <a:r>
-              <a:t>격자 공명 발산</a:t>
+              <a:t>핵심 관찰</a:t>
             </a:r>
           </a:p>
           <a:p>
@@ -7804,12 +8441,33 @@
               <a:spcAft>
                 <a:spcPts val="200"/>
               </a:spcAft>
-              <a:defRPr sz="600" b="0">
+              <a:defRPr sz="1600" b="0">
                 <a:solidFill>
                   <a:srgbClr val="222222"/>
                 </a:solidFill>
               </a:defRPr>
             </a:pPr>
+            <a:r>
+              <a:t>• Sharp peaks at P = m · λ  (m ∈ ℤ)</a:t>
+            </a:r>
+          </a:p>
+          <a:p>
+            <a:pPr algn="l">
+              <a:spcBef>
+                <a:spcPts val="0"/>
+              </a:spcBef>
+              <a:spcAft>
+                <a:spcPts val="200"/>
+              </a:spcAft>
+              <a:defRPr sz="1400" b="0">
+                <a:solidFill>
+                  <a:srgbClr val="666677"/>
+                </a:solidFill>
+              </a:defRPr>
+            </a:pPr>
+            <a:r>
+              <a:t>  파장의 정수배 주기에서 급격한 피크</a:t>
+            </a:r>
           </a:p>
           <a:p>
             <a:pPr algn="l">
@@ -7826,7 +8484,7 @@
               </a:defRPr>
             </a:pPr>
             <a:r>
-              <a:t>• Matrix nearly singular at P ≈ m · λ</a:t>
+              <a:t>• Wood anomaly / lattice resonance</a:t>
             </a:r>
           </a:p>
           <a:p>
@@ -7844,7 +8502,7 @@
               </a:defRPr>
             </a:pPr>
             <a:r>
-              <a:t>  P = mλ 근처에서 행렬이 거의 특이</a:t>
+              <a:t>  Wood anomaly, 격자 공명</a:t>
             </a:r>
           </a:p>
           <a:p>
@@ -7862,7 +8520,7 @@
               </a:defRPr>
             </a:pPr>
             <a:r>
-              <a:t>• Δφ(P) curve non-monotonic</a:t>
+              <a:t>• Coincides with diffraction-order onset</a:t>
             </a:r>
           </a:p>
           <a:p>
@@ -7880,278 +8538,35 @@
               </a:defRPr>
             </a:pPr>
             <a:r>
-              <a:t>  Δφ(P) 곡선이 단조롭지 않음</a:t>
-            </a:r>
-          </a:p>
-          <a:p>
-            <a:pPr algn="l">
-              <a:spcBef>
-                <a:spcPts val="400"/>
-              </a:spcBef>
-              <a:spcAft>
-                <a:spcPts val="200"/>
-              </a:spcAft>
-              <a:defRPr sz="1600" b="0">
-                <a:solidFill>
-                  <a:srgbClr val="222222"/>
-                </a:solidFill>
-              </a:defRPr>
-            </a:pPr>
-            <a:r>
-              <a:t>• Must isolate off-resonance behavior</a:t>
-            </a:r>
-          </a:p>
-          <a:p>
-            <a:pPr algn="l">
-              <a:spcBef>
-                <a:spcPts val="0"/>
-              </a:spcBef>
-              <a:spcAft>
-                <a:spcPts val="200"/>
-              </a:spcAft>
-              <a:defRPr sz="1400" b="0">
-                <a:solidFill>
-                  <a:srgbClr val="666677"/>
-                </a:solidFill>
-              </a:defRPr>
-            </a:pPr>
-            <a:r>
-              <a:t>  공명 영역을 피해 분석 필요</a:t>
-            </a:r>
-          </a:p>
-        </p:txBody>
-      </p:sp>
-      <p:sp>
-        <p:nvSpPr>
-          <p:cNvPr id="5" name="Rectangle 4"/>
-          <p:cNvSpPr/>
-          <p:nvPr/>
-        </p:nvSpPr>
-        <p:spPr>
-          <a:xfrm>
-            <a:off x="6309360" y="1463040"/>
-            <a:ext cx="5120640" cy="4754880"/>
-          </a:xfrm>
-          <a:prstGeom prst="rect">
-            <a:avLst/>
-          </a:prstGeom>
-          <a:solidFill>
-            <a:srgbClr val="F0F4FA"/>
-          </a:solidFill>
-          <a:ln w="19050">
-            <a:solidFill>
-              <a:srgbClr val="1A478A"/>
-            </a:solidFill>
-          </a:ln>
-        </p:spPr>
-        <p:style>
-          <a:lnRef idx="1">
-            <a:schemeClr val="accent1"/>
-          </a:lnRef>
-          <a:fillRef idx="3">
-            <a:schemeClr val="accent1"/>
-          </a:fillRef>
-          <a:effectRef idx="2">
-            <a:schemeClr val="accent1"/>
-          </a:effectRef>
-          <a:fontRef idx="minor">
-            <a:schemeClr val="lt1"/>
-          </a:fontRef>
-        </p:style>
-        <p:txBody>
-          <a:bodyPr rtlCol="0" anchor="ctr" wrap="square"/>
-          <a:lstStyle/>
-          <a:p>
-            <a:pPr algn="ctr">
-              <a:defRPr sz="2000" b="1">
-                <a:solidFill>
-                  <a:srgbClr val="1A478A"/>
-                </a:solidFill>
-              </a:defRPr>
-            </a:pPr>
-            <a:r>
-              <a:t>(b) Slow 2D convergence</a:t>
-            </a:r>
-          </a:p>
-          <a:p>
-            <a:pPr algn="ctr">
-              <a:spcBef>
-                <a:spcPts val="0"/>
-              </a:spcBef>
-              <a:spcAft>
-                <a:spcPts val="200"/>
-              </a:spcAft>
-              <a:defRPr sz="1500" b="0">
-                <a:solidFill>
-                  <a:srgbClr val="666677"/>
-                </a:solidFill>
-              </a:defRPr>
-            </a:pPr>
-            <a:r>
-              <a:t>2D 시스템의 느린 수렴</a:t>
-            </a:r>
-          </a:p>
-          <a:p>
-            <a:pPr algn="l">
-              <a:spcBef>
-                <a:spcPts val="400"/>
-              </a:spcBef>
-              <a:spcAft>
-                <a:spcPts val="200"/>
-              </a:spcAft>
-              <a:defRPr sz="600" b="0">
-                <a:solidFill>
-                  <a:srgbClr val="222222"/>
-                </a:solidFill>
-              </a:defRPr>
-            </a:pPr>
-          </a:p>
-          <a:p>
-            <a:pPr algn="l">
-              <a:spcBef>
-                <a:spcPts val="400"/>
-              </a:spcBef>
-              <a:spcAft>
-                <a:spcPts val="200"/>
-              </a:spcAft>
-              <a:defRPr sz="1600" b="0">
-                <a:solidFill>
-                  <a:srgbClr val="222222"/>
-                </a:solidFill>
-              </a:defRPr>
-            </a:pPr>
-            <a:r>
-              <a:t>• 2D Green decays as 1/sqrt(r)</a:t>
-            </a:r>
-          </a:p>
-          <a:p>
-            <a:pPr algn="l">
-              <a:spcBef>
-                <a:spcPts val="0"/>
-              </a:spcBef>
-              <a:spcAft>
-                <a:spcPts val="200"/>
-              </a:spcAft>
-              <a:defRPr sz="1400" b="0">
-                <a:solidFill>
-                  <a:srgbClr val="666677"/>
-                </a:solidFill>
-              </a:defRPr>
-            </a:pPr>
-            <a:r>
-              <a:t>  2D Green 함수 1/√r 감쇠</a:t>
-            </a:r>
-          </a:p>
-          <a:p>
-            <a:pPr algn="l">
-              <a:spcBef>
-                <a:spcPts val="400"/>
-              </a:spcBef>
-              <a:spcAft>
-                <a:spcPts val="200"/>
-              </a:spcAft>
-              <a:defRPr sz="1600" b="0">
-                <a:solidFill>
-                  <a:srgbClr val="222222"/>
-                </a:solidFill>
-              </a:defRPr>
-            </a:pPr>
-            <a:r>
-              <a:t>• Lattice sum converges conditionally</a:t>
-            </a:r>
-          </a:p>
-          <a:p>
-            <a:pPr algn="l">
-              <a:spcBef>
-                <a:spcPts val="0"/>
-              </a:spcBef>
-              <a:spcAft>
-                <a:spcPts val="200"/>
-              </a:spcAft>
-              <a:defRPr sz="1400" b="0">
-                <a:solidFill>
-                  <a:srgbClr val="666677"/>
-                </a:solidFill>
-              </a:defRPr>
-            </a:pPr>
-            <a:r>
-              <a:t>  격자합이 조건부 수렴</a:t>
-            </a:r>
-          </a:p>
-          <a:p>
-            <a:pPr algn="l">
-              <a:spcBef>
-                <a:spcPts val="400"/>
-              </a:spcBef>
-              <a:spcAft>
-                <a:spcPts val="200"/>
-              </a:spcAft>
-              <a:defRPr sz="1600" b="0">
-                <a:solidFill>
-                  <a:srgbClr val="222222"/>
-                </a:solidFill>
-              </a:defRPr>
-            </a:pPr>
-            <a:r>
-              <a:t>• Finite-array edge effect persists longer than 3D</a:t>
-            </a:r>
-          </a:p>
-          <a:p>
-            <a:pPr algn="l">
-              <a:spcBef>
-                <a:spcPts val="0"/>
-              </a:spcBef>
-              <a:spcAft>
-                <a:spcPts val="200"/>
-              </a:spcAft>
-              <a:defRPr sz="1400" b="0">
-                <a:solidFill>
-                  <a:srgbClr val="666677"/>
-                </a:solidFill>
-              </a:defRPr>
-            </a:pPr>
-            <a:r>
-              <a:t>  유한 배열 edge effect가 3D보다 오래 지속</a:t>
-            </a:r>
-          </a:p>
-          <a:p>
-            <a:pPr algn="l">
-              <a:spcBef>
-                <a:spcPts val="400"/>
-              </a:spcBef>
-              <a:spcAft>
-                <a:spcPts val="200"/>
-              </a:spcAft>
-              <a:defRPr sz="1600" b="0">
-                <a:solidFill>
-                  <a:srgbClr val="222222"/>
-                </a:solidFill>
-              </a:defRPr>
-            </a:pPr>
-            <a:r>
-              <a:t>• Future: periodic Bloch BC, Ewald summation</a:t>
-            </a:r>
-          </a:p>
-          <a:p>
-            <a:pPr algn="l">
-              <a:spcBef>
-                <a:spcPts val="0"/>
-              </a:spcBef>
-              <a:spcAft>
-                <a:spcPts val="200"/>
-              </a:spcAft>
-              <a:defRPr sz="1400" b="0">
-                <a:solidFill>
-                  <a:srgbClr val="666677"/>
-                </a:solidFill>
-              </a:defRPr>
-            </a:pPr>
-            <a:r>
-              <a:t>  향후: Bloch 경계, Ewald 합법</a:t>
-            </a:r>
-          </a:p>
-        </p:txBody>
-      </p:sp>
+              <a:t>  회절 차수 개시 조건과 일치</a:t>
+            </a:r>
+          </a:p>
+        </p:txBody>
+      </p:sp>
+      <p:pic>
+        <p:nvPicPr>
+          <p:cNvPr id="5" name="Picture 4" descr="period_sweep_comparison.png"/>
+          <p:cNvPicPr>
+            <a:picLocks noChangeAspect="1"/>
+          </p:cNvPicPr>
+          <p:nvPr/>
+        </p:nvPicPr>
+        <p:blipFill>
+          <a:blip r:embed="rId2"/>
+          <a:stretch>
+            <a:fillRect/>
+          </a:stretch>
+        </p:blipFill>
+        <p:spPr>
+          <a:xfrm>
+            <a:off x="6126480" y="1371600"/>
+            <a:ext cx="5760720" cy="3240405"/>
+          </a:xfrm>
+          <a:prstGeom prst="rect">
+            <a:avLst/>
+          </a:prstGeom>
+        </p:spPr>
+      </p:pic>
     </p:spTree>
   </p:cSld>
   <p:clrMapOvr>
@@ -8208,7 +8623,7 @@
               </a:defRPr>
             </a:pPr>
             <a:r>
-              <a:t>8. Next Week's Plan</a:t>
+              <a:t>8. Main Difficulties</a:t>
             </a:r>
           </a:p>
         </p:txBody>
@@ -8243,46 +8658,65 @@
               </a:defRPr>
             </a:pPr>
             <a:r>
-              <a:t>다음 주 계획</a:t>
-            </a:r>
-          </a:p>
-        </p:txBody>
-      </p:sp>
-      <p:sp>
-        <p:nvSpPr>
-          <p:cNvPr id="4" name="TextBox 3"/>
-          <p:cNvSpPr txBox="1"/>
-          <p:nvPr/>
-        </p:nvSpPr>
-        <p:spPr>
-          <a:xfrm>
-            <a:off x="640080" y="1463040"/>
-            <a:ext cx="5303520" cy="5029200"/>
-          </a:xfrm>
-          <a:prstGeom prst="rect">
-            <a:avLst/>
-          </a:prstGeom>
-          <a:noFill/>
-        </p:spPr>
-        <p:txBody>
-          <a:bodyPr wrap="square">
-            <a:spAutoFit/>
-          </a:bodyPr>
-          <a:lstStyle/>
-          <a:p>
-            <a:pPr algn="l">
-              <a:defRPr sz="2200" b="1">
+              <a:t>현재 주요 어려움</a:t>
+            </a:r>
+          </a:p>
+        </p:txBody>
+      </p:sp>
+      <p:sp>
+        <p:nvSpPr>
+          <p:cNvPr id="4" name="Rectangle 3"/>
+          <p:cNvSpPr/>
+          <p:nvPr/>
+        </p:nvSpPr>
+        <p:spPr>
+          <a:xfrm>
+            <a:off x="731520" y="1463040"/>
+            <a:ext cx="5120640" cy="4754880"/>
+          </a:xfrm>
+          <a:prstGeom prst="rect">
+            <a:avLst/>
+          </a:prstGeom>
+          <a:solidFill>
+            <a:srgbClr val="F0F4FA"/>
+          </a:solidFill>
+          <a:ln w="19050">
+            <a:solidFill>
+              <a:srgbClr val="C0392B"/>
+            </a:solidFill>
+          </a:ln>
+        </p:spPr>
+        <p:style>
+          <a:lnRef idx="1">
+            <a:schemeClr val="accent1"/>
+          </a:lnRef>
+          <a:fillRef idx="3">
+            <a:schemeClr val="accent1"/>
+          </a:fillRef>
+          <a:effectRef idx="2">
+            <a:schemeClr val="accent1"/>
+          </a:effectRef>
+          <a:fontRef idx="minor">
+            <a:schemeClr val="lt1"/>
+          </a:fontRef>
+        </p:style>
+        <p:txBody>
+          <a:bodyPr rtlCol="0" anchor="ctr" wrap="square"/>
+          <a:lstStyle/>
+          <a:p>
+            <a:pPr algn="ctr">
+              <a:defRPr sz="2000" b="1">
                 <a:solidFill>
                   <a:srgbClr val="C0392B"/>
                 </a:solidFill>
               </a:defRPr>
             </a:pPr>
             <a:r>
-              <a:t>Primary comparison</a:t>
-            </a:r>
-          </a:p>
-          <a:p>
-            <a:pPr algn="l">
+              <a:t>(a) Lattice-resonance divergence</a:t>
+            </a:r>
+          </a:p>
+          <a:p>
+            <a:pPr algn="ctr">
               <a:spcBef>
                 <a:spcPts val="0"/>
               </a:spcBef>
@@ -8296,7 +8730,7 @@
               </a:defRPr>
             </a:pPr>
             <a:r>
-              <a:t>메인 비교 실험</a:t>
+              <a:t>격자 공명 발산</a:t>
             </a:r>
           </a:p>
           <a:p>
@@ -8329,7 +8763,7 @@
               </a:defRPr>
             </a:pPr>
             <a:r>
-              <a:t>• Uniform vs non-uniform array — detailed analysis</a:t>
+              <a:t>• Matrix nearly singular at P ≈ m · λ</a:t>
             </a:r>
           </a:p>
           <a:p>
@@ -8347,7 +8781,7 @@
               </a:defRPr>
             </a:pPr>
             <a:r>
-              <a:t>  균일 vs 비균일 상세 분석</a:t>
+              <a:t>  P = mλ 근처에서 행렬이 거의 특이</a:t>
             </a:r>
           </a:p>
           <a:p>
@@ -8365,7 +8799,7 @@
               </a:defRPr>
             </a:pPr>
             <a:r>
-              <a:t>• Focus on off-resonance regions</a:t>
+              <a:t>• Δφ(P) curve non-monotonic</a:t>
             </a:r>
           </a:p>
           <a:p>
@@ -8383,7 +8817,7 @@
               </a:defRPr>
             </a:pPr>
             <a:r>
-              <a:t>  공명을 피한 영역에 집중</a:t>
+              <a:t>  Δφ(P) 곡선이 단조롭지 않음</a:t>
             </a:r>
           </a:p>
           <a:p>
@@ -8401,7 +8835,7 @@
               </a:defRPr>
             </a:pPr>
             <a:r>
-              <a:t>• Isolate (i) lattice coupling vs (ii) α-inhomogeneity</a:t>
+              <a:t>• Must isolate off-resonance behavior</a:t>
             </a:r>
           </a:p>
           <a:p>
@@ -8419,7 +8853,79 @@
               </a:defRPr>
             </a:pPr>
             <a:r>
-              <a:t>  (i) 격자 커플링과 (ii) α 비균일성 효과 분리</a:t>
+              <a:t>  공명 영역을 피해 분석 필요</a:t>
+            </a:r>
+          </a:p>
+        </p:txBody>
+      </p:sp>
+      <p:sp>
+        <p:nvSpPr>
+          <p:cNvPr id="5" name="Rectangle 4"/>
+          <p:cNvSpPr/>
+          <p:nvPr/>
+        </p:nvSpPr>
+        <p:spPr>
+          <a:xfrm>
+            <a:off x="6309360" y="1463040"/>
+            <a:ext cx="5120640" cy="4754880"/>
+          </a:xfrm>
+          <a:prstGeom prst="rect">
+            <a:avLst/>
+          </a:prstGeom>
+          <a:solidFill>
+            <a:srgbClr val="F0F4FA"/>
+          </a:solidFill>
+          <a:ln w="19050">
+            <a:solidFill>
+              <a:srgbClr val="1A478A"/>
+            </a:solidFill>
+          </a:ln>
+        </p:spPr>
+        <p:style>
+          <a:lnRef idx="1">
+            <a:schemeClr val="accent1"/>
+          </a:lnRef>
+          <a:fillRef idx="3">
+            <a:schemeClr val="accent1"/>
+          </a:fillRef>
+          <a:effectRef idx="2">
+            <a:schemeClr val="accent1"/>
+          </a:effectRef>
+          <a:fontRef idx="minor">
+            <a:schemeClr val="lt1"/>
+          </a:fontRef>
+        </p:style>
+        <p:txBody>
+          <a:bodyPr rtlCol="0" anchor="ctr" wrap="square"/>
+          <a:lstStyle/>
+          <a:p>
+            <a:pPr algn="ctr">
+              <a:defRPr sz="2000" b="1">
+                <a:solidFill>
+                  <a:srgbClr val="1A478A"/>
+                </a:solidFill>
+              </a:defRPr>
+            </a:pPr>
+            <a:r>
+              <a:t>(b) Slow 2D convergence</a:t>
+            </a:r>
+          </a:p>
+          <a:p>
+            <a:pPr algn="ctr">
+              <a:spcBef>
+                <a:spcPts val="0"/>
+              </a:spcBef>
+              <a:spcAft>
+                <a:spcPts val="200"/>
+              </a:spcAft>
+              <a:defRPr sz="1500" b="0">
+                <a:solidFill>
+                  <a:srgbClr val="666677"/>
+                </a:solidFill>
+              </a:defRPr>
+            </a:pPr>
+            <a:r>
+              <a:t>2D 시스템의 느린 수렴</a:t>
             </a:r>
           </a:p>
           <a:p>
@@ -8430,6 +8936,21 @@
               <a:spcAft>
                 <a:spcPts val="200"/>
               </a:spcAft>
+              <a:defRPr sz="600" b="0">
+                <a:solidFill>
+                  <a:srgbClr val="222222"/>
+                </a:solidFill>
+              </a:defRPr>
+            </a:pPr>
+          </a:p>
+          <a:p>
+            <a:pPr algn="l">
+              <a:spcBef>
+                <a:spcPts val="400"/>
+              </a:spcBef>
+              <a:spcAft>
+                <a:spcPts val="200"/>
+              </a:spcAft>
               <a:defRPr sz="1600" b="0">
                 <a:solidFill>
                   <a:srgbClr val="222222"/>
@@ -8437,7 +8958,7 @@
               </a:defRPr>
             </a:pPr>
             <a:r>
-              <a:t>• Find threshold period P* where mean |Δφ| &lt; 1°</a:t>
+              <a:t>• 2D Green decays as 1/sqrt(r)</a:t>
             </a:r>
           </a:p>
           <a:p>
@@ -8455,42 +8976,25 @@
               </a:defRPr>
             </a:pPr>
             <a:r>
-              <a:t>  평균 |Δφ| &lt; 1°가 되는 임계 주기 P* 추정</a:t>
-            </a:r>
-          </a:p>
-        </p:txBody>
-      </p:sp>
-      <p:sp>
-        <p:nvSpPr>
-          <p:cNvPr id="5" name="TextBox 4"/>
-          <p:cNvSpPr txBox="1"/>
-          <p:nvPr/>
-        </p:nvSpPr>
-        <p:spPr>
-          <a:xfrm>
-            <a:off x="6400800" y="1463040"/>
-            <a:ext cx="5303520" cy="5029200"/>
-          </a:xfrm>
-          <a:prstGeom prst="rect">
-            <a:avLst/>
-          </a:prstGeom>
-          <a:noFill/>
-        </p:spPr>
-        <p:txBody>
-          <a:bodyPr wrap="square">
-            <a:spAutoFit/>
-          </a:bodyPr>
-          <a:lstStyle/>
-          <a:p>
-            <a:pPr algn="l">
-              <a:defRPr sz="2200" b="1">
-                <a:solidFill>
-                  <a:srgbClr val="1A478A"/>
-                </a:solidFill>
-              </a:defRPr>
-            </a:pPr>
-            <a:r>
-              <a:t>Additional checks</a:t>
+              <a:t>  2D Green 함수 1/√r 감쇠</a:t>
+            </a:r>
+          </a:p>
+          <a:p>
+            <a:pPr algn="l">
+              <a:spcBef>
+                <a:spcPts val="400"/>
+              </a:spcBef>
+              <a:spcAft>
+                <a:spcPts val="200"/>
+              </a:spcAft>
+              <a:defRPr sz="1600" b="0">
+                <a:solidFill>
+                  <a:srgbClr val="222222"/>
+                </a:solidFill>
+              </a:defRPr>
+            </a:pPr>
+            <a:r>
+              <a:t>• Lattice sum converges conditionally</a:t>
             </a:r>
           </a:p>
           <a:p>
@@ -8501,14 +9005,14 @@
               <a:spcAft>
                 <a:spcPts val="200"/>
               </a:spcAft>
-              <a:defRPr sz="1500" b="0">
+              <a:defRPr sz="1400" b="0">
                 <a:solidFill>
                   <a:srgbClr val="666677"/>
                 </a:solidFill>
               </a:defRPr>
             </a:pPr>
             <a:r>
-              <a:t>추가 검증</a:t>
+              <a:t>  격자합이 조건부 수렴</a:t>
             </a:r>
           </a:p>
           <a:p>
@@ -8519,12 +9023,33 @@
               <a:spcAft>
                 <a:spcPts val="200"/>
               </a:spcAft>
-              <a:defRPr sz="600" b="0">
+              <a:defRPr sz="1600" b="0">
                 <a:solidFill>
                   <a:srgbClr val="222222"/>
                 </a:solidFill>
               </a:defRPr>
             </a:pPr>
+            <a:r>
+              <a:t>• Finite-array edge effect persists longer than 3D</a:t>
+            </a:r>
+          </a:p>
+          <a:p>
+            <a:pPr algn="l">
+              <a:spcBef>
+                <a:spcPts val="0"/>
+              </a:spcBef>
+              <a:spcAft>
+                <a:spcPts val="200"/>
+              </a:spcAft>
+              <a:defRPr sz="1400" b="0">
+                <a:solidFill>
+                  <a:srgbClr val="666677"/>
+                </a:solidFill>
+              </a:defRPr>
+            </a:pPr>
+            <a:r>
+              <a:t>  유한 배열 edge effect가 3D보다 오래 지속</a:t>
+            </a:r>
           </a:p>
           <a:p>
             <a:pPr algn="l">
@@ -8541,7 +9066,7 @@
               </a:defRPr>
             </a:pPr>
             <a:r>
-              <a:t>• Conditioning study near Wood anomalies</a:t>
+              <a:t>• Future: periodic Bloch BC, Ewald summation</a:t>
             </a:r>
           </a:p>
           <a:p>
@@ -8559,79 +9084,7 @@
               </a:defRPr>
             </a:pPr>
             <a:r>
-              <a:t>  공명 근처의 행렬 조건수 분석</a:t>
-            </a:r>
-          </a:p>
-          <a:p>
-            <a:pPr algn="l">
-              <a:spcBef>
-                <a:spcPts val="400"/>
-              </a:spcBef>
-              <a:spcAft>
-                <a:spcPts val="200"/>
-              </a:spcAft>
-              <a:defRPr sz="1600" b="0">
-                <a:solidFill>
-                  <a:srgbClr val="222222"/>
-                </a:solidFill>
-              </a:defRPr>
-            </a:pPr>
-            <a:r>
-              <a:t>• Energy budget: P_sca / P_ext ratio</a:t>
-            </a:r>
-          </a:p>
-          <a:p>
-            <a:pPr algn="l">
-              <a:spcBef>
-                <a:spcPts val="0"/>
-              </a:spcBef>
-              <a:spcAft>
-                <a:spcPts val="200"/>
-              </a:spcAft>
-              <a:defRPr sz="1400" b="0">
-                <a:solidFill>
-                  <a:srgbClr val="666677"/>
-                </a:solidFill>
-              </a:defRPr>
-            </a:pPr>
-            <a:r>
-              <a:t>  에너지 예산: P_sca / P_ext 비율</a:t>
-            </a:r>
-          </a:p>
-          <a:p>
-            <a:pPr algn="l">
-              <a:spcBef>
-                <a:spcPts val="400"/>
-              </a:spcBef>
-              <a:spcAft>
-                <a:spcPts val="200"/>
-              </a:spcAft>
-              <a:defRPr sz="1600" b="0">
-                <a:solidFill>
-                  <a:srgbClr val="222222"/>
-                </a:solidFill>
-              </a:defRPr>
-            </a:pPr>
-            <a:r>
-              <a:t>• Sensitivity to α-ordering in non-uniform cases</a:t>
-            </a:r>
-          </a:p>
-          <a:p>
-            <a:pPr algn="l">
-              <a:spcBef>
-                <a:spcPts val="0"/>
-              </a:spcBef>
-              <a:spcAft>
-                <a:spcPts val="200"/>
-              </a:spcAft>
-              <a:defRPr sz="1400" b="0">
-                <a:solidFill>
-                  <a:srgbClr val="666677"/>
-                </a:solidFill>
-              </a:defRPr>
-            </a:pPr>
-            <a:r>
-              <a:t>  비균일 배열의 α 순서 민감도</a:t>
+              <a:t>  향후: Bloch 경계, Ewald 합법</a:t>
             </a:r>
           </a:p>
         </p:txBody>

--- a/week2_progress.pptx
+++ b/week2_progress.pptx
@@ -5,18 +5,18 @@
     <p:sldMasterId id="2147483648" r:id="rId1"/>
   </p:sldMasterIdLst>
   <p:sldIdLst>
-    <p:sldId id="256" r:id="rId7"/>
-    <p:sldId id="257" r:id="rId8"/>
-    <p:sldId id="258" r:id="rId9"/>
-    <p:sldId id="259" r:id="rId10"/>
-    <p:sldId id="260" r:id="rId11"/>
-    <p:sldId id="261" r:id="rId12"/>
-    <p:sldId id="262" r:id="rId13"/>
-    <p:sldId id="263" r:id="rId14"/>
-    <p:sldId id="264" r:id="rId15"/>
-    <p:sldId id="265" r:id="rId16"/>
+    <p:sldId id="256" r:id="rId2"/>
+    <p:sldId id="257" r:id="rId3"/>
+    <p:sldId id="258" r:id="rId4"/>
+    <p:sldId id="259" r:id="rId5"/>
+    <p:sldId id="260" r:id="rId6"/>
+    <p:sldId id="261" r:id="rId7"/>
+    <p:sldId id="262" r:id="rId8"/>
+    <p:sldId id="263" r:id="rId9"/>
+    <p:sldId id="264" r:id="rId10"/>
+    <p:sldId id="265" r:id="rId11"/>
   </p:sldIdLst>
-  <p:sldSz cx="12191695" cy="6858000" type="screen4x3"/>
+  <p:sldSz cx="12192000" cy="6858000"/>
   <p:notesSz cx="6858000" cy="9144000"/>
   <p:defaultTextStyle>
     <a:defPPr>
@@ -113,6 +113,22 @@
       </a:defRPr>
     </a:lvl9pPr>
   </p:defaultTextStyle>
+  <p:extLst>
+    <p:ext uri="{EFAFB233-063F-42B5-8137-9DF3F51BA10A}">
+      <p15:sldGuideLst xmlns:p15="http://schemas.microsoft.com/office/powerpoint/2012/main">
+        <p15:guide id="1" orient="horz" pos="2160">
+          <p15:clr>
+            <a:srgbClr val="A4A3A4"/>
+          </p15:clr>
+        </p15:guide>
+        <p15:guide id="2" pos="2880">
+          <p15:clr>
+            <a:srgbClr val="A4A3A4"/>
+          </p15:clr>
+        </p15:guide>
+      </p15:sldGuideLst>
+    </p:ext>
+  </p:extLst>
 </p:presentation>
 </file>
 
@@ -154,10 +170,9 @@
           <a:lstStyle/>
           <a:p>
             <a:r>
-              <a:rPr lang="en-US" smtClean="0"/>
+              <a:rPr lang="en-US"/>
               <a:t>Click to edit Master title style</a:t>
             </a:r>
-            <a:endParaRPr lang="en-US"/>
           </a:p>
         </p:txBody>
       </p:sp>
@@ -273,10 +288,9 @@
           </a:lstStyle>
           <a:p>
             <a:r>
-              <a:rPr lang="en-US" smtClean="0"/>
+              <a:rPr lang="en-US"/>
               <a:t>Click to edit Master subtitle style</a:t>
             </a:r>
-            <a:endParaRPr lang="en-US"/>
           </a:p>
         </p:txBody>
       </p:sp>
@@ -297,7 +311,7 @@
           <a:p>
             <a:fld id="{5BCAD085-E8A6-8845-BD4E-CB4CCA059FC4}" type="datetimeFigureOut">
               <a:rPr lang="en-US" smtClean="0"/>
-              <a:t>1/27/13</a:t>
+              <a:t>4/27/2026</a:t>
             </a:fld>
             <a:endParaRPr lang="en-US"/>
           </a:p>
@@ -391,10 +405,9 @@
           <a:lstStyle/>
           <a:p>
             <a:r>
-              <a:rPr lang="en-US" smtClean="0"/>
+              <a:rPr lang="en-US"/>
               <a:t>Click to edit Master title style</a:t>
             </a:r>
-            <a:endParaRPr lang="en-US"/>
           </a:p>
         </p:txBody>
       </p:sp>
@@ -415,38 +428,37 @@
           <a:p>
             <a:pPr lvl="0"/>
             <a:r>
-              <a:rPr lang="en-US" smtClean="0"/>
+              <a:rPr lang="en-US"/>
               <a:t>Click to edit Master text styles</a:t>
             </a:r>
           </a:p>
           <a:p>
             <a:pPr lvl="1"/>
             <a:r>
-              <a:rPr lang="en-US" smtClean="0"/>
+              <a:rPr lang="en-US"/>
               <a:t>Second level</a:t>
             </a:r>
           </a:p>
           <a:p>
             <a:pPr lvl="2"/>
             <a:r>
-              <a:rPr lang="en-US" smtClean="0"/>
+              <a:rPr lang="en-US"/>
               <a:t>Third level</a:t>
             </a:r>
           </a:p>
           <a:p>
             <a:pPr lvl="3"/>
             <a:r>
-              <a:rPr lang="en-US" smtClean="0"/>
+              <a:rPr lang="en-US"/>
               <a:t>Fourth level</a:t>
             </a:r>
           </a:p>
           <a:p>
             <a:pPr lvl="4"/>
             <a:r>
-              <a:rPr lang="en-US" smtClean="0"/>
+              <a:rPr lang="en-US"/>
               <a:t>Fifth level</a:t>
             </a:r>
-            <a:endParaRPr lang="en-US"/>
           </a:p>
         </p:txBody>
       </p:sp>
@@ -467,7 +479,7 @@
           <a:p>
             <a:fld id="{5BCAD085-E8A6-8845-BD4E-CB4CCA059FC4}" type="datetimeFigureOut">
               <a:rPr lang="en-US" smtClean="0"/>
-              <a:t>1/27/13</a:t>
+              <a:t>4/27/2026</a:t>
             </a:fld>
             <a:endParaRPr lang="en-US"/>
           </a:p>
@@ -566,10 +578,9 @@
           <a:lstStyle/>
           <a:p>
             <a:r>
-              <a:rPr lang="en-US" smtClean="0"/>
+              <a:rPr lang="en-US"/>
               <a:t>Click to edit Master title style</a:t>
             </a:r>
-            <a:endParaRPr lang="en-US"/>
           </a:p>
         </p:txBody>
       </p:sp>
@@ -595,38 +606,37 @@
           <a:p>
             <a:pPr lvl="0"/>
             <a:r>
-              <a:rPr lang="en-US" smtClean="0"/>
+              <a:rPr lang="en-US"/>
               <a:t>Click to edit Master text styles</a:t>
             </a:r>
           </a:p>
           <a:p>
             <a:pPr lvl="1"/>
             <a:r>
-              <a:rPr lang="en-US" smtClean="0"/>
+              <a:rPr lang="en-US"/>
               <a:t>Second level</a:t>
             </a:r>
           </a:p>
           <a:p>
             <a:pPr lvl="2"/>
             <a:r>
-              <a:rPr lang="en-US" smtClean="0"/>
+              <a:rPr lang="en-US"/>
               <a:t>Third level</a:t>
             </a:r>
           </a:p>
           <a:p>
             <a:pPr lvl="3"/>
             <a:r>
-              <a:rPr lang="en-US" smtClean="0"/>
+              <a:rPr lang="en-US"/>
               <a:t>Fourth level</a:t>
             </a:r>
           </a:p>
           <a:p>
             <a:pPr lvl="4"/>
             <a:r>
-              <a:rPr lang="en-US" smtClean="0"/>
+              <a:rPr lang="en-US"/>
               <a:t>Fifth level</a:t>
             </a:r>
-            <a:endParaRPr lang="en-US"/>
           </a:p>
         </p:txBody>
       </p:sp>
@@ -647,7 +657,7 @@
           <a:p>
             <a:fld id="{5BCAD085-E8A6-8845-BD4E-CB4CCA059FC4}" type="datetimeFigureOut">
               <a:rPr lang="en-US" smtClean="0"/>
-              <a:t>1/27/13</a:t>
+              <a:t>4/27/2026</a:t>
             </a:fld>
             <a:endParaRPr lang="en-US"/>
           </a:p>
@@ -741,10 +751,9 @@
           <a:lstStyle/>
           <a:p>
             <a:r>
-              <a:rPr lang="en-US" smtClean="0"/>
+              <a:rPr lang="en-US"/>
               <a:t>Click to edit Master title style</a:t>
             </a:r>
-            <a:endParaRPr lang="en-US"/>
           </a:p>
         </p:txBody>
       </p:sp>
@@ -765,38 +774,37 @@
           <a:p>
             <a:pPr lvl="0"/>
             <a:r>
-              <a:rPr lang="en-US" smtClean="0"/>
+              <a:rPr lang="en-US"/>
               <a:t>Click to edit Master text styles</a:t>
             </a:r>
           </a:p>
           <a:p>
             <a:pPr lvl="1"/>
             <a:r>
-              <a:rPr lang="en-US" smtClean="0"/>
+              <a:rPr lang="en-US"/>
               <a:t>Second level</a:t>
             </a:r>
           </a:p>
           <a:p>
             <a:pPr lvl="2"/>
             <a:r>
-              <a:rPr lang="en-US" smtClean="0"/>
+              <a:rPr lang="en-US"/>
               <a:t>Third level</a:t>
             </a:r>
           </a:p>
           <a:p>
             <a:pPr lvl="3"/>
             <a:r>
-              <a:rPr lang="en-US" smtClean="0"/>
+              <a:rPr lang="en-US"/>
               <a:t>Fourth level</a:t>
             </a:r>
           </a:p>
           <a:p>
             <a:pPr lvl="4"/>
             <a:r>
-              <a:rPr lang="en-US" smtClean="0"/>
+              <a:rPr lang="en-US"/>
               <a:t>Fifth level</a:t>
             </a:r>
-            <a:endParaRPr lang="en-US"/>
           </a:p>
         </p:txBody>
       </p:sp>
@@ -817,7 +825,7 @@
           <a:p>
             <a:fld id="{5BCAD085-E8A6-8845-BD4E-CB4CCA059FC4}" type="datetimeFigureOut">
               <a:rPr lang="en-US" smtClean="0"/>
-              <a:t>1/27/13</a:t>
+              <a:t>4/27/2026</a:t>
             </a:fld>
             <a:endParaRPr lang="en-US"/>
           </a:p>
@@ -920,10 +928,9 @@
           </a:lstStyle>
           <a:p>
             <a:r>
-              <a:rPr lang="en-US" smtClean="0"/>
+              <a:rPr lang="en-US"/>
               <a:t>Click to edit Master title style</a:t>
             </a:r>
-            <a:endParaRPr lang="en-US"/>
           </a:p>
         </p:txBody>
       </p:sp>
@@ -1040,7 +1047,7 @@
           <a:p>
             <a:pPr lvl="0"/>
             <a:r>
-              <a:rPr lang="en-US" smtClean="0"/>
+              <a:rPr lang="en-US"/>
               <a:t>Click to edit Master text styles</a:t>
             </a:r>
           </a:p>
@@ -1063,7 +1070,7 @@
           <a:p>
             <a:fld id="{5BCAD085-E8A6-8845-BD4E-CB4CCA059FC4}" type="datetimeFigureOut">
               <a:rPr lang="en-US" smtClean="0"/>
-              <a:t>1/27/13</a:t>
+              <a:t>4/27/2026</a:t>
             </a:fld>
             <a:endParaRPr lang="en-US"/>
           </a:p>
@@ -1157,10 +1164,9 @@
           <a:lstStyle/>
           <a:p>
             <a:r>
-              <a:rPr lang="en-US" smtClean="0"/>
+              <a:rPr lang="en-US"/>
               <a:t>Click to edit Master title style</a:t>
             </a:r>
-            <a:endParaRPr lang="en-US"/>
           </a:p>
         </p:txBody>
       </p:sp>
@@ -1214,38 +1220,37 @@
           <a:p>
             <a:pPr lvl="0"/>
             <a:r>
-              <a:rPr lang="en-US" smtClean="0"/>
+              <a:rPr lang="en-US"/>
               <a:t>Click to edit Master text styles</a:t>
             </a:r>
           </a:p>
           <a:p>
             <a:pPr lvl="1"/>
             <a:r>
-              <a:rPr lang="en-US" smtClean="0"/>
+              <a:rPr lang="en-US"/>
               <a:t>Second level</a:t>
             </a:r>
           </a:p>
           <a:p>
             <a:pPr lvl="2"/>
             <a:r>
-              <a:rPr lang="en-US" smtClean="0"/>
+              <a:rPr lang="en-US"/>
               <a:t>Third level</a:t>
             </a:r>
           </a:p>
           <a:p>
             <a:pPr lvl="3"/>
             <a:r>
-              <a:rPr lang="en-US" smtClean="0"/>
+              <a:rPr lang="en-US"/>
               <a:t>Fourth level</a:t>
             </a:r>
           </a:p>
           <a:p>
             <a:pPr lvl="4"/>
             <a:r>
-              <a:rPr lang="en-US" smtClean="0"/>
+              <a:rPr lang="en-US"/>
               <a:t>Fifth level</a:t>
             </a:r>
-            <a:endParaRPr lang="en-US"/>
           </a:p>
         </p:txBody>
       </p:sp>
@@ -1299,38 +1304,37 @@
           <a:p>
             <a:pPr lvl="0"/>
             <a:r>
-              <a:rPr lang="en-US" smtClean="0"/>
+              <a:rPr lang="en-US"/>
               <a:t>Click to edit Master text styles</a:t>
             </a:r>
           </a:p>
           <a:p>
             <a:pPr lvl="1"/>
             <a:r>
-              <a:rPr lang="en-US" smtClean="0"/>
+              <a:rPr lang="en-US"/>
               <a:t>Second level</a:t>
             </a:r>
           </a:p>
           <a:p>
             <a:pPr lvl="2"/>
             <a:r>
-              <a:rPr lang="en-US" smtClean="0"/>
+              <a:rPr lang="en-US"/>
               <a:t>Third level</a:t>
             </a:r>
           </a:p>
           <a:p>
             <a:pPr lvl="3"/>
             <a:r>
-              <a:rPr lang="en-US" smtClean="0"/>
+              <a:rPr lang="en-US"/>
               <a:t>Fourth level</a:t>
             </a:r>
           </a:p>
           <a:p>
             <a:pPr lvl="4"/>
             <a:r>
-              <a:rPr lang="en-US" smtClean="0"/>
+              <a:rPr lang="en-US"/>
               <a:t>Fifth level</a:t>
             </a:r>
-            <a:endParaRPr lang="en-US"/>
           </a:p>
         </p:txBody>
       </p:sp>
@@ -1351,7 +1355,7 @@
           <a:p>
             <a:fld id="{5BCAD085-E8A6-8845-BD4E-CB4CCA059FC4}" type="datetimeFigureOut">
               <a:rPr lang="en-US" smtClean="0"/>
-              <a:t>1/27/13</a:t>
+              <a:t>4/27/2026</a:t>
             </a:fld>
             <a:endParaRPr lang="en-US"/>
           </a:p>
@@ -1449,10 +1453,9 @@
           </a:lstStyle>
           <a:p>
             <a:r>
-              <a:rPr lang="en-US" smtClean="0"/>
+              <a:rPr lang="en-US"/>
               <a:t>Click to edit Master title style</a:t>
             </a:r>
-            <a:endParaRPr lang="en-US"/>
           </a:p>
         </p:txBody>
       </p:sp>
@@ -1515,7 +1518,7 @@
           <a:p>
             <a:pPr lvl="0"/>
             <a:r>
-              <a:rPr lang="en-US" smtClean="0"/>
+              <a:rPr lang="en-US"/>
               <a:t>Click to edit Master text styles</a:t>
             </a:r>
           </a:p>
@@ -1571,38 +1574,37 @@
           <a:p>
             <a:pPr lvl="0"/>
             <a:r>
-              <a:rPr lang="en-US" smtClean="0"/>
+              <a:rPr lang="en-US"/>
               <a:t>Click to edit Master text styles</a:t>
             </a:r>
           </a:p>
           <a:p>
             <a:pPr lvl="1"/>
             <a:r>
-              <a:rPr lang="en-US" smtClean="0"/>
+              <a:rPr lang="en-US"/>
               <a:t>Second level</a:t>
             </a:r>
           </a:p>
           <a:p>
             <a:pPr lvl="2"/>
             <a:r>
-              <a:rPr lang="en-US" smtClean="0"/>
+              <a:rPr lang="en-US"/>
               <a:t>Third level</a:t>
             </a:r>
           </a:p>
           <a:p>
             <a:pPr lvl="3"/>
             <a:r>
-              <a:rPr lang="en-US" smtClean="0"/>
+              <a:rPr lang="en-US"/>
               <a:t>Fourth level</a:t>
             </a:r>
           </a:p>
           <a:p>
             <a:pPr lvl="4"/>
             <a:r>
-              <a:rPr lang="en-US" smtClean="0"/>
+              <a:rPr lang="en-US"/>
               <a:t>Fifth level</a:t>
             </a:r>
-            <a:endParaRPr lang="en-US"/>
           </a:p>
         </p:txBody>
       </p:sp>
@@ -1665,7 +1667,7 @@
           <a:p>
             <a:pPr lvl="0"/>
             <a:r>
-              <a:rPr lang="en-US" smtClean="0"/>
+              <a:rPr lang="en-US"/>
               <a:t>Click to edit Master text styles</a:t>
             </a:r>
           </a:p>
@@ -1721,38 +1723,37 @@
           <a:p>
             <a:pPr lvl="0"/>
             <a:r>
-              <a:rPr lang="en-US" smtClean="0"/>
+              <a:rPr lang="en-US"/>
               <a:t>Click to edit Master text styles</a:t>
             </a:r>
           </a:p>
           <a:p>
             <a:pPr lvl="1"/>
             <a:r>
-              <a:rPr lang="en-US" smtClean="0"/>
+              <a:rPr lang="en-US"/>
               <a:t>Second level</a:t>
             </a:r>
           </a:p>
           <a:p>
             <a:pPr lvl="2"/>
             <a:r>
-              <a:rPr lang="en-US" smtClean="0"/>
+              <a:rPr lang="en-US"/>
               <a:t>Third level</a:t>
             </a:r>
           </a:p>
           <a:p>
             <a:pPr lvl="3"/>
             <a:r>
-              <a:rPr lang="en-US" smtClean="0"/>
+              <a:rPr lang="en-US"/>
               <a:t>Fourth level</a:t>
             </a:r>
           </a:p>
           <a:p>
             <a:pPr lvl="4"/>
             <a:r>
-              <a:rPr lang="en-US" smtClean="0"/>
+              <a:rPr lang="en-US"/>
               <a:t>Fifth level</a:t>
             </a:r>
-            <a:endParaRPr lang="en-US"/>
           </a:p>
         </p:txBody>
       </p:sp>
@@ -1773,7 +1774,7 @@
           <a:p>
             <a:fld id="{5BCAD085-E8A6-8845-BD4E-CB4CCA059FC4}" type="datetimeFigureOut">
               <a:rPr lang="en-US" smtClean="0"/>
-              <a:t>1/27/13</a:t>
+              <a:t>4/27/2026</a:t>
             </a:fld>
             <a:endParaRPr lang="en-US"/>
           </a:p>
@@ -1867,10 +1868,9 @@
           <a:lstStyle/>
           <a:p>
             <a:r>
-              <a:rPr lang="en-US" smtClean="0"/>
+              <a:rPr lang="en-US"/>
               <a:t>Click to edit Master title style</a:t>
             </a:r>
-            <a:endParaRPr lang="en-US"/>
           </a:p>
         </p:txBody>
       </p:sp>
@@ -1891,7 +1891,7 @@
           <a:p>
             <a:fld id="{5BCAD085-E8A6-8845-BD4E-CB4CCA059FC4}" type="datetimeFigureOut">
               <a:rPr lang="en-US" smtClean="0"/>
-              <a:t>1/27/13</a:t>
+              <a:t>4/27/2026</a:t>
             </a:fld>
             <a:endParaRPr lang="en-US"/>
           </a:p>
@@ -1986,7 +1986,7 @@
           <a:p>
             <a:fld id="{5BCAD085-E8A6-8845-BD4E-CB4CCA059FC4}" type="datetimeFigureOut">
               <a:rPr lang="en-US" smtClean="0"/>
-              <a:t>1/27/13</a:t>
+              <a:t>4/27/2026</a:t>
             </a:fld>
             <a:endParaRPr lang="en-US"/>
           </a:p>
@@ -2089,10 +2089,9 @@
           </a:lstStyle>
           <a:p>
             <a:r>
-              <a:rPr lang="en-US" smtClean="0"/>
+              <a:rPr lang="en-US"/>
               <a:t>Click to edit Master title style</a:t>
             </a:r>
-            <a:endParaRPr lang="en-US"/>
           </a:p>
         </p:txBody>
       </p:sp>
@@ -2146,38 +2145,37 @@
           <a:p>
             <a:pPr lvl="0"/>
             <a:r>
-              <a:rPr lang="en-US" smtClean="0"/>
+              <a:rPr lang="en-US"/>
               <a:t>Click to edit Master text styles</a:t>
             </a:r>
           </a:p>
           <a:p>
             <a:pPr lvl="1"/>
             <a:r>
-              <a:rPr lang="en-US" smtClean="0"/>
+              <a:rPr lang="en-US"/>
               <a:t>Second level</a:t>
             </a:r>
           </a:p>
           <a:p>
             <a:pPr lvl="2"/>
             <a:r>
-              <a:rPr lang="en-US" smtClean="0"/>
+              <a:rPr lang="en-US"/>
               <a:t>Third level</a:t>
             </a:r>
           </a:p>
           <a:p>
             <a:pPr lvl="3"/>
             <a:r>
-              <a:rPr lang="en-US" smtClean="0"/>
+              <a:rPr lang="en-US"/>
               <a:t>Fourth level</a:t>
             </a:r>
           </a:p>
           <a:p>
             <a:pPr lvl="4"/>
             <a:r>
-              <a:rPr lang="en-US" smtClean="0"/>
+              <a:rPr lang="en-US"/>
               <a:t>Fifth level</a:t>
             </a:r>
-            <a:endParaRPr lang="en-US"/>
           </a:p>
         </p:txBody>
       </p:sp>
@@ -2240,7 +2238,7 @@
           <a:p>
             <a:pPr lvl="0"/>
             <a:r>
-              <a:rPr lang="en-US" smtClean="0"/>
+              <a:rPr lang="en-US"/>
               <a:t>Click to edit Master text styles</a:t>
             </a:r>
           </a:p>
@@ -2263,7 +2261,7 @@
           <a:p>
             <a:fld id="{5BCAD085-E8A6-8845-BD4E-CB4CCA059FC4}" type="datetimeFigureOut">
               <a:rPr lang="en-US" smtClean="0"/>
-              <a:t>1/27/13</a:t>
+              <a:t>4/27/2026</a:t>
             </a:fld>
             <a:endParaRPr lang="en-US"/>
           </a:p>
@@ -2366,10 +2364,9 @@
           </a:lstStyle>
           <a:p>
             <a:r>
-              <a:rPr lang="en-US" smtClean="0"/>
+              <a:rPr lang="en-US"/>
               <a:t>Click to edit Master title style</a:t>
             </a:r>
-            <a:endParaRPr lang="en-US"/>
           </a:p>
         </p:txBody>
       </p:sp>
@@ -2493,7 +2490,7 @@
           <a:p>
             <a:pPr lvl="0"/>
             <a:r>
-              <a:rPr lang="en-US" smtClean="0"/>
+              <a:rPr lang="en-US"/>
               <a:t>Click to edit Master text styles</a:t>
             </a:r>
           </a:p>
@@ -2516,7 +2513,7 @@
           <a:p>
             <a:fld id="{5BCAD085-E8A6-8845-BD4E-CB4CCA059FC4}" type="datetimeFigureOut">
               <a:rPr lang="en-US" smtClean="0"/>
-              <a:t>1/27/13</a:t>
+              <a:t>4/27/2026</a:t>
             </a:fld>
             <a:endParaRPr lang="en-US"/>
           </a:p>
@@ -2625,10 +2622,9 @@
           <a:lstStyle/>
           <a:p>
             <a:r>
-              <a:rPr lang="en-US" smtClean="0"/>
+              <a:rPr lang="en-US"/>
               <a:t>Click to edit Master title style</a:t>
             </a:r>
-            <a:endParaRPr lang="en-US"/>
           </a:p>
         </p:txBody>
       </p:sp>
@@ -2659,38 +2655,37 @@
           <a:p>
             <a:pPr lvl="0"/>
             <a:r>
-              <a:rPr lang="en-US" smtClean="0"/>
+              <a:rPr lang="en-US"/>
               <a:t>Click to edit Master text styles</a:t>
             </a:r>
           </a:p>
           <a:p>
             <a:pPr lvl="1"/>
             <a:r>
-              <a:rPr lang="en-US" smtClean="0"/>
+              <a:rPr lang="en-US"/>
               <a:t>Second level</a:t>
             </a:r>
           </a:p>
           <a:p>
             <a:pPr lvl="2"/>
             <a:r>
-              <a:rPr lang="en-US" smtClean="0"/>
+              <a:rPr lang="en-US"/>
               <a:t>Third level</a:t>
             </a:r>
           </a:p>
           <a:p>
             <a:pPr lvl="3"/>
             <a:r>
-              <a:rPr lang="en-US" smtClean="0"/>
+              <a:rPr lang="en-US"/>
               <a:t>Fourth level</a:t>
             </a:r>
           </a:p>
           <a:p>
             <a:pPr lvl="4"/>
             <a:r>
-              <a:rPr lang="en-US" smtClean="0"/>
+              <a:rPr lang="en-US"/>
               <a:t>Fifth level</a:t>
             </a:r>
-            <a:endParaRPr lang="en-US"/>
           </a:p>
         </p:txBody>
       </p:sp>
@@ -2729,7 +2724,7 @@
           <a:p>
             <a:fld id="{5BCAD085-E8A6-8845-BD4E-CB4CCA059FC4}" type="datetimeFigureOut">
               <a:rPr lang="en-US" smtClean="0"/>
-              <a:t>1/27/13</a:t>
+              <a:t>4/27/2026</a:t>
             </a:fld>
             <a:endParaRPr lang="en-US"/>
           </a:p>
@@ -3088,7 +3083,7 @@
 </file>
 
 <file path=ppt/slides/slide1.xml><?xml version="1.0" encoding="utf-8"?>
-<p:sld xmlns:a="http://schemas.openxmlformats.org/drawingml/2006/main" xmlns:p="http://schemas.openxmlformats.org/presentationml/2006/main" xmlns:r="http://schemas.openxmlformats.org/officeDocument/2006/relationships">
+<p:sld xmlns:a="http://schemas.openxmlformats.org/drawingml/2006/main" xmlns:r="http://schemas.openxmlformats.org/officeDocument/2006/relationships" xmlns:p="http://schemas.openxmlformats.org/presentationml/2006/main">
   <p:cSld>
     <p:bg>
       <p:bgPr>
@@ -3104,7 +3099,14 @@
         <p:cNvGrpSpPr/>
         <p:nvPr/>
       </p:nvGrpSpPr>
-      <p:grpSpPr/>
+      <p:grpSpPr>
+        <a:xfrm>
+          <a:off x="0" y="0"/>
+          <a:ext cx="0" cy="0"/>
+          <a:chOff x="0" y="0"/>
+          <a:chExt cx="0" cy="0"/>
+        </a:xfrm>
+      </p:grpSpPr>
       <p:sp>
         <p:nvSpPr>
           <p:cNvPr id="2" name="TextBox 1"/>
@@ -3237,7 +3239,7 @@
 </file>
 
 <file path=ppt/slides/slide10.xml><?xml version="1.0" encoding="utf-8"?>
-<p:sld xmlns:a="http://schemas.openxmlformats.org/drawingml/2006/main" xmlns:p="http://schemas.openxmlformats.org/presentationml/2006/main" xmlns:r="http://schemas.openxmlformats.org/officeDocument/2006/relationships">
+<p:sld xmlns:a="http://schemas.openxmlformats.org/drawingml/2006/main" xmlns:r="http://schemas.openxmlformats.org/officeDocument/2006/relationships" xmlns:p="http://schemas.openxmlformats.org/presentationml/2006/main">
   <p:cSld>
     <p:bg>
       <p:bgPr>
@@ -3253,7 +3255,14 @@
         <p:cNvGrpSpPr/>
         <p:nvPr/>
       </p:nvGrpSpPr>
-      <p:grpSpPr/>
+      <p:grpSpPr>
+        <a:xfrm>
+          <a:off x="0" y="0"/>
+          <a:ext cx="0" cy="0"/>
+          <a:chOff x="0" y="0"/>
+          <a:chExt cx="0" cy="0"/>
+        </a:xfrm>
+      </p:grpSpPr>
       <p:sp>
         <p:nvSpPr>
           <p:cNvPr id="2" name="TextBox 1"/>
@@ -3389,6 +3398,7 @@
                 </a:solidFill>
               </a:defRPr>
             </a:pPr>
+            <a:endParaRPr/>
           </a:p>
           <a:p>
             <a:pPr algn="l">
@@ -3601,6 +3611,7 @@
                 </a:solidFill>
               </a:defRPr>
             </a:pPr>
+            <a:endParaRPr/>
           </a:p>
           <a:p>
             <a:pPr algn="l">
@@ -3721,7 +3732,7 @@
 </file>
 
 <file path=ppt/slides/slide2.xml><?xml version="1.0" encoding="utf-8"?>
-<p:sld xmlns:a="http://schemas.openxmlformats.org/drawingml/2006/main" xmlns:p="http://schemas.openxmlformats.org/presentationml/2006/main" xmlns:r="http://schemas.openxmlformats.org/officeDocument/2006/relationships">
+<p:sld xmlns:a="http://schemas.openxmlformats.org/drawingml/2006/main" xmlns:r="http://schemas.openxmlformats.org/officeDocument/2006/relationships" xmlns:p="http://schemas.openxmlformats.org/presentationml/2006/main">
   <p:cSld>
     <p:bg>
       <p:bgPr>
@@ -3737,7 +3748,14 @@
         <p:cNvGrpSpPr/>
         <p:nvPr/>
       </p:nvGrpSpPr>
-      <p:grpSpPr/>
+      <p:grpSpPr>
+        <a:xfrm>
+          <a:off x="0" y="0"/>
+          <a:ext cx="0" cy="0"/>
+          <a:chOff x="0" y="0"/>
+          <a:chExt cx="0" cy="0"/>
+        </a:xfrm>
+      </p:grpSpPr>
       <p:sp>
         <p:nvSpPr>
           <p:cNvPr id="2" name="TextBox 1"/>
@@ -3846,7 +3864,7 @@
           </a:fontRef>
         </p:style>
         <p:txBody>
-          <a:bodyPr rtlCol="0" anchor="ctr" wrap="square"/>
+          <a:bodyPr wrap="square" rtlCol="0" anchor="ctr"/>
           <a:lstStyle/>
           <a:p>
             <a:pPr algn="l">
@@ -3856,6 +3874,7 @@
                 </a:solidFill>
               </a:defRPr>
             </a:pPr>
+            <a:endParaRPr/>
           </a:p>
           <a:p>
             <a:pPr algn="ctr">
@@ -3889,6 +3908,7 @@
                 </a:solidFill>
               </a:defRPr>
             </a:pPr>
+            <a:endParaRPr/>
           </a:p>
           <a:p>
             <a:pPr algn="ctr">
@@ -3918,7 +3938,7 @@
         </p:nvSpPr>
         <p:spPr>
           <a:xfrm>
-            <a:off x="914400" y="5029200"/>
+            <a:off x="914400" y="4626630"/>
             <a:ext cx="10332720" cy="1371600"/>
           </a:xfrm>
           <a:prstGeom prst="rect">
@@ -3931,7 +3951,9 @@
             <a:spAutoFit/>
           </a:bodyPr>
           <a:lstStyle/>
-          <a:p/>
+          <a:p>
+            <a:endParaRPr/>
+          </a:p>
           <a:p>
             <a:pPr algn="l">
               <a:spcBef>
@@ -4051,7 +4073,7 @@
 </file>
 
 <file path=ppt/slides/slide3.xml><?xml version="1.0" encoding="utf-8"?>
-<p:sld xmlns:a="http://schemas.openxmlformats.org/drawingml/2006/main" xmlns:p="http://schemas.openxmlformats.org/presentationml/2006/main" xmlns:r="http://schemas.openxmlformats.org/officeDocument/2006/relationships">
+<p:sld xmlns:a="http://schemas.openxmlformats.org/drawingml/2006/main" xmlns:r="http://schemas.openxmlformats.org/officeDocument/2006/relationships" xmlns:p="http://schemas.openxmlformats.org/presentationml/2006/main">
   <p:cSld>
     <p:bg>
       <p:bgPr>
@@ -4067,7 +4089,14 @@
         <p:cNvGrpSpPr/>
         <p:nvPr/>
       </p:nvGrpSpPr>
-      <p:grpSpPr/>
+      <p:grpSpPr>
+        <a:xfrm>
+          <a:off x="0" y="0"/>
+          <a:ext cx="0" cy="0"/>
+          <a:chOff x="0" y="0"/>
+          <a:chExt cx="0" cy="0"/>
+        </a:xfrm>
+      </p:grpSpPr>
       <p:sp>
         <p:nvSpPr>
           <p:cNvPr id="2" name="TextBox 1"/>
@@ -4613,7 +4642,7 @@
 </file>
 
 <file path=ppt/slides/slide4.xml><?xml version="1.0" encoding="utf-8"?>
-<p:sld xmlns:a="http://schemas.openxmlformats.org/drawingml/2006/main" xmlns:p="http://schemas.openxmlformats.org/presentationml/2006/main" xmlns:r="http://schemas.openxmlformats.org/officeDocument/2006/relationships">
+<p:sld xmlns:a="http://schemas.openxmlformats.org/drawingml/2006/main" xmlns:r="http://schemas.openxmlformats.org/officeDocument/2006/relationships" xmlns:p="http://schemas.openxmlformats.org/presentationml/2006/main">
   <p:cSld>
     <p:bg>
       <p:bgPr>
@@ -4629,7 +4658,14 @@
         <p:cNvGrpSpPr/>
         <p:nvPr/>
       </p:nvGrpSpPr>
-      <p:grpSpPr/>
+      <p:grpSpPr>
+        <a:xfrm>
+          <a:off x="0" y="0"/>
+          <a:ext cx="0" cy="0"/>
+          <a:chOff x="0" y="0"/>
+          <a:chExt cx="0" cy="0"/>
+        </a:xfrm>
+      </p:grpSpPr>
       <p:sp>
         <p:nvSpPr>
           <p:cNvPr id="2" name="TextBox 1"/>
@@ -4922,7 +4958,9 @@
             <a:spAutoFit/>
           </a:bodyPr>
           <a:lstStyle/>
-          <a:p/>
+          <a:p>
+            <a:endParaRPr/>
+          </a:p>
           <a:p>
             <a:pPr algn="l">
               <a:spcBef>
@@ -5065,7 +5103,7 @@
 </file>
 
 <file path=ppt/slides/slide5.xml><?xml version="1.0" encoding="utf-8"?>
-<p:sld xmlns:a="http://schemas.openxmlformats.org/drawingml/2006/main" xmlns:p="http://schemas.openxmlformats.org/presentationml/2006/main" xmlns:r="http://schemas.openxmlformats.org/officeDocument/2006/relationships">
+<p:sld xmlns:a="http://schemas.openxmlformats.org/drawingml/2006/main" xmlns:r="http://schemas.openxmlformats.org/officeDocument/2006/relationships" xmlns:p="http://schemas.openxmlformats.org/presentationml/2006/main">
   <p:cSld>
     <p:bg>
       <p:bgPr>
@@ -5081,7 +5119,14 @@
         <p:cNvGrpSpPr/>
         <p:nvPr/>
       </p:nvGrpSpPr>
-      <p:grpSpPr/>
+      <p:grpSpPr>
+        <a:xfrm>
+          <a:off x="0" y="0"/>
+          <a:ext cx="0" cy="0"/>
+          <a:chOff x="0" y="0"/>
+          <a:chExt cx="0" cy="0"/>
+        </a:xfrm>
+      </p:grpSpPr>
       <p:sp>
         <p:nvSpPr>
           <p:cNvPr id="2" name="TextBox 1"/>
@@ -5334,6 +5379,7 @@
           <a:lstStyle/>
           <a:p>
             <a:pPr algn="ctr"/>
+            <a:endParaRPr/>
           </a:p>
         </p:txBody>
       </p:sp>
@@ -5519,6 +5565,7 @@
           <a:lstStyle/>
           <a:p>
             <a:pPr algn="ctr"/>
+            <a:endParaRPr/>
           </a:p>
         </p:txBody>
       </p:sp>
@@ -5704,6 +5751,7 @@
           <a:lstStyle/>
           <a:p>
             <a:pPr algn="ctr"/>
+            <a:endParaRPr/>
           </a:p>
         </p:txBody>
       </p:sp>
@@ -5889,6 +5937,7 @@
           <a:lstStyle/>
           <a:p>
             <a:pPr algn="ctr"/>
+            <a:endParaRPr/>
           </a:p>
         </p:txBody>
       </p:sp>
@@ -6074,6 +6123,7 @@
           <a:lstStyle/>
           <a:p>
             <a:pPr algn="ctr"/>
+            <a:endParaRPr/>
           </a:p>
         </p:txBody>
       </p:sp>
@@ -6259,6 +6309,7 @@
           <a:lstStyle/>
           <a:p>
             <a:pPr algn="ctr"/>
+            <a:endParaRPr/>
           </a:p>
         </p:txBody>
       </p:sp>
@@ -6444,6 +6495,7 @@
           <a:lstStyle/>
           <a:p>
             <a:pPr algn="ctr"/>
+            <a:endParaRPr/>
           </a:p>
         </p:txBody>
       </p:sp>
@@ -6629,6 +6681,7 @@
           <a:lstStyle/>
           <a:p>
             <a:pPr algn="ctr"/>
+            <a:endParaRPr/>
           </a:p>
         </p:txBody>
       </p:sp>
@@ -6814,6 +6867,7 @@
           <a:lstStyle/>
           <a:p>
             <a:pPr algn="ctr"/>
+            <a:endParaRPr/>
           </a:p>
         </p:txBody>
       </p:sp>
@@ -6999,6 +7053,7 @@
           <a:lstStyle/>
           <a:p>
             <a:pPr algn="ctr"/>
+            <a:endParaRPr/>
           </a:p>
         </p:txBody>
       </p:sp>
@@ -7151,7 +7206,7 @@
 </file>
 
 <file path=ppt/slides/slide6.xml><?xml version="1.0" encoding="utf-8"?>
-<p:sld xmlns:a="http://schemas.openxmlformats.org/drawingml/2006/main" xmlns:p="http://schemas.openxmlformats.org/presentationml/2006/main" xmlns:r="http://schemas.openxmlformats.org/officeDocument/2006/relationships">
+<p:sld xmlns:a="http://schemas.openxmlformats.org/drawingml/2006/main" xmlns:r="http://schemas.openxmlformats.org/officeDocument/2006/relationships" xmlns:p="http://schemas.openxmlformats.org/presentationml/2006/main">
   <p:cSld>
     <p:bg>
       <p:bgPr>
@@ -7167,7 +7222,14 @@
         <p:cNvGrpSpPr/>
         <p:nvPr/>
       </p:nvGrpSpPr>
-      <p:grpSpPr/>
+      <p:grpSpPr>
+        <a:xfrm>
+          <a:off x="0" y="0"/>
+          <a:ext cx="0" cy="0"/>
+          <a:chOff x="0" y="0"/>
+          <a:chExt cx="0" cy="0"/>
+        </a:xfrm>
+      </p:grpSpPr>
       <p:sp>
         <p:nvSpPr>
           <p:cNvPr id="2" name="TextBox 1"/>
@@ -7411,6 +7473,7 @@
                 </a:solidFill>
               </a:defRPr>
             </a:pPr>
+            <a:endParaRPr/>
           </a:p>
           <a:p>
             <a:pPr algn="l">
@@ -7627,7 +7690,7 @@
 </file>
 
 <file path=ppt/slides/slide7.xml><?xml version="1.0" encoding="utf-8"?>
-<p:sld xmlns:a="http://schemas.openxmlformats.org/drawingml/2006/main" xmlns:p="http://schemas.openxmlformats.org/presentationml/2006/main" xmlns:r="http://schemas.openxmlformats.org/officeDocument/2006/relationships">
+<p:sld xmlns:a="http://schemas.openxmlformats.org/drawingml/2006/main" xmlns:r="http://schemas.openxmlformats.org/officeDocument/2006/relationships" xmlns:p="http://schemas.openxmlformats.org/presentationml/2006/main">
   <p:cSld>
     <p:bg>
       <p:bgPr>
@@ -7643,7 +7706,14 @@
         <p:cNvGrpSpPr/>
         <p:nvPr/>
       </p:nvGrpSpPr>
-      <p:grpSpPr/>
+      <p:grpSpPr>
+        <a:xfrm>
+          <a:off x="0" y="0"/>
+          <a:ext cx="0" cy="0"/>
+          <a:chOff x="0" y="0"/>
+          <a:chExt cx="0" cy="0"/>
+        </a:xfrm>
+      </p:grpSpPr>
       <p:sp>
         <p:nvSpPr>
           <p:cNvPr id="2" name="TextBox 1"/>
@@ -7744,6 +7814,7 @@
               </a:defRPr>
             </a:pPr>
             <a:r>
+              <a:rPr dirty="0"/>
               <a:t>Setup</a:t>
             </a:r>
           </a:p>
@@ -7762,8 +7833,10 @@
               </a:defRPr>
             </a:pPr>
             <a:r>
+              <a:rPr dirty="0" err="1"/>
               <a:t>설정</a:t>
             </a:r>
+            <a:endParaRPr dirty="0"/>
           </a:p>
           <a:p>
             <a:pPr algn="l">
@@ -7780,6 +7853,7 @@
               </a:defRPr>
             </a:pPr>
             <a:r>
+              <a:rPr dirty="0"/>
               <a:t>• Uniform 1D array, N = 31</a:t>
             </a:r>
           </a:p>
@@ -7798,7 +7872,24 @@
               </a:defRPr>
             </a:pPr>
             <a:r>
-              <a:t>  1D 균일 배열, N = 31</a:t>
+              <a:rPr dirty="0"/>
+              <a:t>  1D </a:t>
+            </a:r>
+            <a:r>
+              <a:rPr dirty="0" err="1"/>
+              <a:t>균일</a:t>
+            </a:r>
+            <a:r>
+              <a:rPr dirty="0"/>
+              <a:t> </a:t>
+            </a:r>
+            <a:r>
+              <a:rPr dirty="0" err="1"/>
+              <a:t>배열</a:t>
+            </a:r>
+            <a:r>
+              <a:rPr dirty="0"/>
+              <a:t>, N = 31</a:t>
             </a:r>
           </a:p>
           <a:p>
@@ -7816,6 +7907,7 @@
               </a:defRPr>
             </a:pPr>
             <a:r>
+              <a:rPr dirty="0"/>
               <a:t>• Period P = 0.6 λ (sub-wavelength)</a:t>
             </a:r>
           </a:p>
@@ -7834,7 +7926,24 @@
               </a:defRPr>
             </a:pPr>
             <a:r>
-              <a:t>  주기 P = 0.6 λ (서브파장)</a:t>
+              <a:rPr dirty="0"/>
+              <a:t>  </a:t>
+            </a:r>
+            <a:r>
+              <a:rPr dirty="0" err="1"/>
+              <a:t>주기</a:t>
+            </a:r>
+            <a:r>
+              <a:rPr dirty="0"/>
+              <a:t> P = 0.6 λ (</a:t>
+            </a:r>
+            <a:r>
+              <a:rPr dirty="0" err="1"/>
+              <a:t>서브파장</a:t>
+            </a:r>
+            <a:r>
+              <a:rPr dirty="0"/>
+              <a:t>)</a:t>
             </a:r>
           </a:p>
           <a:p>
@@ -7852,6 +7961,7 @@
               </a:defRPr>
             </a:pPr>
             <a:r>
+              <a:rPr dirty="0"/>
               <a:t>• Normal-incidence plane wave</a:t>
             </a:r>
           </a:p>
@@ -7870,8 +7980,30 @@
               </a:defRPr>
             </a:pPr>
             <a:r>
-              <a:t>  정상 입사 평면파</a:t>
-            </a:r>
+              <a:rPr dirty="0"/>
+              <a:t>  </a:t>
+            </a:r>
+            <a:r>
+              <a:rPr dirty="0" err="1"/>
+              <a:t>정상</a:t>
+            </a:r>
+            <a:r>
+              <a:rPr dirty="0"/>
+              <a:t> </a:t>
+            </a:r>
+            <a:r>
+              <a:rPr dirty="0" err="1"/>
+              <a:t>입사</a:t>
+            </a:r>
+            <a:r>
+              <a:rPr dirty="0"/>
+              <a:t> </a:t>
+            </a:r>
+            <a:r>
+              <a:rPr dirty="0" err="1"/>
+              <a:t>평면파</a:t>
+            </a:r>
+            <a:endParaRPr dirty="0"/>
           </a:p>
           <a:p>
             <a:pPr algn="l">
@@ -7887,6 +8019,7 @@
                 </a:solidFill>
               </a:defRPr>
             </a:pPr>
+            <a:endParaRPr dirty="0"/>
           </a:p>
           <a:p>
             <a:pPr algn="l">
@@ -7903,6 +8036,7 @@
               </a:defRPr>
             </a:pPr>
             <a:r>
+              <a:rPr dirty="0"/>
               <a:t>Measured</a:t>
             </a:r>
           </a:p>
@@ -7921,8 +8055,18 @@
               </a:defRPr>
             </a:pPr>
             <a:r>
-              <a:t>측정 결과</a:t>
-            </a:r>
+              <a:rPr dirty="0" err="1"/>
+              <a:t>측정</a:t>
+            </a:r>
+            <a:r>
+              <a:rPr dirty="0"/>
+              <a:t> </a:t>
+            </a:r>
+            <a:r>
+              <a:rPr dirty="0" err="1"/>
+              <a:t>결과</a:t>
+            </a:r>
+            <a:endParaRPr dirty="0"/>
           </a:p>
           <a:p>
             <a:pPr algn="l">
@@ -7939,7 +8083,16 @@
               </a:defRPr>
             </a:pPr>
             <a:r>
-              <a:t>• Mean |Δφ| = 6.09°</a:t>
+              <a:rPr dirty="0"/>
+              <a:t>• Mean |</a:t>
+            </a:r>
+            <a:r>
+              <a:rPr dirty="0" err="1"/>
+              <a:t>Δφ</a:t>
+            </a:r>
+            <a:r>
+              <a:rPr dirty="0"/>
+              <a:t>| = 6.09°</a:t>
             </a:r>
           </a:p>
           <a:p>
@@ -7957,7 +8110,32 @@
               </a:defRPr>
             </a:pPr>
             <a:r>
-              <a:t>  평균 위상 편차 6.09°</a:t>
+              <a:rPr dirty="0"/>
+              <a:t>  </a:t>
+            </a:r>
+            <a:r>
+              <a:rPr dirty="0" err="1"/>
+              <a:t>평균</a:t>
+            </a:r>
+            <a:r>
+              <a:rPr dirty="0"/>
+              <a:t> </a:t>
+            </a:r>
+            <a:r>
+              <a:rPr dirty="0" err="1"/>
+              <a:t>위상</a:t>
+            </a:r>
+            <a:r>
+              <a:rPr dirty="0"/>
+              <a:t> </a:t>
+            </a:r>
+            <a:r>
+              <a:rPr dirty="0" err="1"/>
+              <a:t>편차</a:t>
+            </a:r>
+            <a:r>
+              <a:rPr dirty="0"/>
+              <a:t> 6.09°</a:t>
             </a:r>
           </a:p>
           <a:p>
@@ -7975,7 +8153,16 @@
               </a:defRPr>
             </a:pPr>
             <a:r>
-              <a:t>• Max |Δφ| = 7.89°</a:t>
+              <a:rPr dirty="0"/>
+              <a:t>• Max |</a:t>
+            </a:r>
+            <a:r>
+              <a:rPr dirty="0" err="1"/>
+              <a:t>Δφ</a:t>
+            </a:r>
+            <a:r>
+              <a:rPr dirty="0"/>
+              <a:t>| = 7.89°</a:t>
             </a:r>
           </a:p>
           <a:p>
@@ -7993,7 +8180,24 @@
               </a:defRPr>
             </a:pPr>
             <a:r>
-              <a:t>  최대 편차 7.89°</a:t>
+              <a:rPr dirty="0"/>
+              <a:t>  </a:t>
+            </a:r>
+            <a:r>
+              <a:rPr dirty="0" err="1"/>
+              <a:t>최대</a:t>
+            </a:r>
+            <a:r>
+              <a:rPr dirty="0"/>
+              <a:t> </a:t>
+            </a:r>
+            <a:r>
+              <a:rPr dirty="0" err="1"/>
+              <a:t>편차</a:t>
+            </a:r>
+            <a:r>
+              <a:rPr dirty="0"/>
+              <a:t> 7.89°</a:t>
             </a:r>
           </a:p>
           <a:p>
@@ -8011,6 +8215,7 @@
               </a:defRPr>
             </a:pPr>
             <a:r>
+              <a:rPr dirty="0"/>
               <a:t>• ADR range [0.979, 1.041]</a:t>
             </a:r>
           </a:p>
@@ -8029,7 +8234,24 @@
               </a:defRPr>
             </a:pPr>
             <a:r>
-              <a:t>  진폭 왜곡 비 [0.979, 1.041]</a:t>
+              <a:rPr dirty="0"/>
+              <a:t>  </a:t>
+            </a:r>
+            <a:r>
+              <a:rPr dirty="0" err="1"/>
+              <a:t>진폭</a:t>
+            </a:r>
+            <a:r>
+              <a:rPr dirty="0"/>
+              <a:t> </a:t>
+            </a:r>
+            <a:r>
+              <a:rPr dirty="0" err="1"/>
+              <a:t>왜곡</a:t>
+            </a:r>
+            <a:r>
+              <a:rPr dirty="0"/>
+              <a:t> 비 [0.979, 1.041]</a:t>
             </a:r>
           </a:p>
           <a:p>
@@ -8046,60 +8268,7 @@
                 </a:solidFill>
               </a:defRPr>
             </a:pPr>
-          </a:p>
-          <a:p>
-            <a:pPr algn="l">
-              <a:spcBef>
-                <a:spcPts val="1000"/>
-              </a:spcBef>
-              <a:spcAft>
-                <a:spcPts val="200"/>
-              </a:spcAft>
-              <a:defRPr sz="2000" b="1">
-                <a:solidFill>
-                  <a:srgbClr val="1E8A4C"/>
-                </a:solidFill>
-              </a:defRPr>
-            </a:pPr>
-            <a:r>
-              <a:t>Conclusion</a:t>
-            </a:r>
-          </a:p>
-          <a:p>
-            <a:pPr algn="l">
-              <a:spcBef>
-                <a:spcPts val="400"/>
-              </a:spcBef>
-              <a:spcAft>
-                <a:spcPts val="200"/>
-              </a:spcAft>
-              <a:defRPr sz="1600" b="0">
-                <a:solidFill>
-                  <a:srgbClr val="222222"/>
-                </a:solidFill>
-              </a:defRPr>
-            </a:pPr>
-            <a:r>
-              <a:t>• Coupling is real, measurable, non-negligible</a:t>
-            </a:r>
-          </a:p>
-          <a:p>
-            <a:pPr algn="l">
-              <a:spcBef>
-                <a:spcPts val="0"/>
-              </a:spcBef>
-              <a:spcAft>
-                <a:spcPts val="200"/>
-              </a:spcAft>
-              <a:defRPr sz="1400" b="0">
-                <a:solidFill>
-                  <a:srgbClr val="666677"/>
-                </a:solidFill>
-              </a:defRPr>
-            </a:pPr>
-            <a:r>
-              <a:t>  커플링은 실제로 측정 가능한 수준</a:t>
-            </a:r>
+            <a:endParaRPr dirty="0"/>
           </a:p>
         </p:txBody>
       </p:sp>
@@ -8127,6 +8296,96 @@
           </a:prstGeom>
         </p:spPr>
       </p:pic>
+      <p:sp>
+        <p:nvSpPr>
+          <p:cNvPr id="7" name="TextBox 6">
+            <a:extLst>
+              <a:ext uri="{FF2B5EF4-FFF2-40B4-BE49-F238E27FC236}">
+                <a16:creationId xmlns:a16="http://schemas.microsoft.com/office/drawing/2014/main" id="{478DEE29-8212-34B5-3C35-6B7B4B4DC475}"/>
+              </a:ext>
+            </a:extLst>
+          </p:cNvPr>
+          <p:cNvSpPr txBox="1"/>
+          <p:nvPr/>
+        </p:nvSpPr>
+        <p:spPr>
+          <a:xfrm>
+            <a:off x="6126480" y="5283137"/>
+            <a:ext cx="6096000" cy="964367"/>
+          </a:xfrm>
+          <a:prstGeom prst="rect">
+            <a:avLst/>
+          </a:prstGeom>
+          <a:noFill/>
+        </p:spPr>
+        <p:txBody>
+          <a:bodyPr wrap="square">
+            <a:spAutoFit/>
+          </a:bodyPr>
+          <a:lstStyle/>
+          <a:p>
+            <a:pPr algn="l">
+              <a:spcBef>
+                <a:spcPts val="1000"/>
+              </a:spcBef>
+              <a:spcAft>
+                <a:spcPts val="200"/>
+              </a:spcAft>
+              <a:defRPr sz="2000" b="1">
+                <a:solidFill>
+                  <a:srgbClr val="1E8A4C"/>
+                </a:solidFill>
+              </a:defRPr>
+            </a:pPr>
+            <a:r>
+              <a:rPr lang="en-US" altLang="ko-KR" dirty="0"/>
+              <a:t>Conclusion</a:t>
+            </a:r>
+          </a:p>
+          <a:p>
+            <a:pPr algn="l">
+              <a:spcBef>
+                <a:spcPts val="400"/>
+              </a:spcBef>
+              <a:spcAft>
+                <a:spcPts val="200"/>
+              </a:spcAft>
+              <a:defRPr sz="1600" b="0">
+                <a:solidFill>
+                  <a:srgbClr val="222222"/>
+                </a:solidFill>
+              </a:defRPr>
+            </a:pPr>
+            <a:r>
+              <a:rPr lang="en-US" altLang="ko-KR" dirty="0"/>
+              <a:t>• Coupling is real, measurable, non-negligible</a:t>
+            </a:r>
+          </a:p>
+          <a:p>
+            <a:pPr algn="l">
+              <a:spcBef>
+                <a:spcPts val="0"/>
+              </a:spcBef>
+              <a:spcAft>
+                <a:spcPts val="200"/>
+              </a:spcAft>
+              <a:defRPr sz="1400" b="0">
+                <a:solidFill>
+                  <a:srgbClr val="666677"/>
+                </a:solidFill>
+              </a:defRPr>
+            </a:pPr>
+            <a:r>
+              <a:rPr lang="en-US" altLang="ko-KR" dirty="0"/>
+              <a:t>  </a:t>
+            </a:r>
+            <a:r>
+              <a:rPr lang="ko-KR" altLang="en-US" dirty="0"/>
+              <a:t>커플링은 실제로 측정 가능한 수준</a:t>
+            </a:r>
+          </a:p>
+        </p:txBody>
+      </p:sp>
     </p:spTree>
   </p:cSld>
   <p:clrMapOvr>
@@ -8136,7 +8395,7 @@
 </file>
 
 <file path=ppt/slides/slide8.xml><?xml version="1.0" encoding="utf-8"?>
-<p:sld xmlns:a="http://schemas.openxmlformats.org/drawingml/2006/main" xmlns:p="http://schemas.openxmlformats.org/presentationml/2006/main" xmlns:r="http://schemas.openxmlformats.org/officeDocument/2006/relationships">
+<p:sld xmlns:a="http://schemas.openxmlformats.org/drawingml/2006/main" xmlns:r="http://schemas.openxmlformats.org/officeDocument/2006/relationships" xmlns:p="http://schemas.openxmlformats.org/presentationml/2006/main">
   <p:cSld>
     <p:bg>
       <p:bgPr>
@@ -8152,7 +8411,14 @@
         <p:cNvGrpSpPr/>
         <p:nvPr/>
       </p:nvGrpSpPr>
-      <p:grpSpPr/>
+      <p:grpSpPr>
+        <a:xfrm>
+          <a:off x="0" y="0"/>
+          <a:ext cx="0" cy="0"/>
+          <a:chOff x="0" y="0"/>
+          <a:chExt cx="0" cy="0"/>
+        </a:xfrm>
+      </p:grpSpPr>
       <p:sp>
         <p:nvSpPr>
           <p:cNvPr id="2" name="TextBox 1"/>
@@ -8396,6 +8662,7 @@
                 </a:solidFill>
               </a:defRPr>
             </a:pPr>
+            <a:endParaRPr/>
           </a:p>
           <a:p>
             <a:pPr algn="l">
@@ -8576,7 +8843,7 @@
 </file>
 
 <file path=ppt/slides/slide9.xml><?xml version="1.0" encoding="utf-8"?>
-<p:sld xmlns:a="http://schemas.openxmlformats.org/drawingml/2006/main" xmlns:p="http://schemas.openxmlformats.org/presentationml/2006/main" xmlns:r="http://schemas.openxmlformats.org/officeDocument/2006/relationships">
+<p:sld xmlns:a="http://schemas.openxmlformats.org/drawingml/2006/main" xmlns:r="http://schemas.openxmlformats.org/officeDocument/2006/relationships" xmlns:p="http://schemas.openxmlformats.org/presentationml/2006/main">
   <p:cSld>
     <p:bg>
       <p:bgPr>
@@ -8592,7 +8859,14 @@
         <p:cNvGrpSpPr/>
         <p:nvPr/>
       </p:nvGrpSpPr>
-      <p:grpSpPr/>
+      <p:grpSpPr>
+        <a:xfrm>
+          <a:off x="0" y="0"/>
+          <a:ext cx="0" cy="0"/>
+          <a:chOff x="0" y="0"/>
+          <a:chExt cx="0" cy="0"/>
+        </a:xfrm>
+      </p:grpSpPr>
       <p:sp>
         <p:nvSpPr>
           <p:cNvPr id="2" name="TextBox 1"/>
@@ -8701,7 +8975,7 @@
           </a:fontRef>
         </p:style>
         <p:txBody>
-          <a:bodyPr rtlCol="0" anchor="ctr" wrap="square"/>
+          <a:bodyPr wrap="square" rtlCol="0" anchor="ctr"/>
           <a:lstStyle/>
           <a:p>
             <a:pPr algn="ctr">
@@ -8747,6 +9021,7 @@
                 </a:solidFill>
               </a:defRPr>
             </a:pPr>
+            <a:endParaRPr/>
           </a:p>
           <a:p>
             <a:pPr algn="l">
@@ -8896,7 +9171,7 @@
           </a:fontRef>
         </p:style>
         <p:txBody>
-          <a:bodyPr rtlCol="0" anchor="ctr" wrap="square"/>
+          <a:bodyPr wrap="square" rtlCol="0" anchor="ctr"/>
           <a:lstStyle/>
           <a:p>
             <a:pPr algn="ctr">
@@ -8942,6 +9217,7 @@
                 </a:solidFill>
               </a:defRPr>
             </a:pPr>
+            <a:endParaRPr/>
           </a:p>
           <a:p>
             <a:pPr algn="l">
